--- a/ulesie_sebastien_2_presentation_062026.pptx
+++ b/ulesie_sebastien_2_presentation_062026.pptx
@@ -5,10 +5,10 @@
     <p:sldMasterId id="2147483712" r:id="rId1"/>
   </p:sldMasterIdLst>
   <p:notesMasterIdLst>
-    <p:notesMasterId r:id="rId23"/>
+    <p:notesMasterId r:id="rId21"/>
   </p:notesMasterIdLst>
   <p:handoutMasterIdLst>
-    <p:handoutMasterId r:id="rId24"/>
+    <p:handoutMasterId r:id="rId22"/>
   </p:handoutMasterIdLst>
   <p:sldIdLst>
     <p:sldId id="257" r:id="rId2"/>
@@ -21,17 +21,15 @@
     <p:sldId id="263" r:id="rId9"/>
     <p:sldId id="264" r:id="rId10"/>
     <p:sldId id="289" r:id="rId11"/>
-    <p:sldId id="266" r:id="rId12"/>
-    <p:sldId id="286" r:id="rId13"/>
-    <p:sldId id="287" r:id="rId14"/>
-    <p:sldId id="288" r:id="rId15"/>
-    <p:sldId id="290" r:id="rId16"/>
-    <p:sldId id="291" r:id="rId17"/>
-    <p:sldId id="292" r:id="rId18"/>
-    <p:sldId id="293" r:id="rId19"/>
-    <p:sldId id="294" r:id="rId20"/>
-    <p:sldId id="295" r:id="rId21"/>
-    <p:sldId id="282" r:id="rId22"/>
+    <p:sldId id="287" r:id="rId12"/>
+    <p:sldId id="288" r:id="rId13"/>
+    <p:sldId id="290" r:id="rId14"/>
+    <p:sldId id="291" r:id="rId15"/>
+    <p:sldId id="292" r:id="rId16"/>
+    <p:sldId id="293" r:id="rId17"/>
+    <p:sldId id="294" r:id="rId18"/>
+    <p:sldId id="295" r:id="rId19"/>
+    <p:sldId id="282" r:id="rId20"/>
   </p:sldIdLst>
   <p:sldSz cx="12192000" cy="6858000"/>
   <p:notesSz cx="6858000" cy="9144000"/>
@@ -1991,1844 +1989,6 @@
 </dgm:colorsDef>
 </file>
 
-<file path=ppt/diagrams/colors11.xml><?xml version="1.0" encoding="utf-8"?>
-<dgm:colorsDef xmlns:dgm="http://schemas.openxmlformats.org/drawingml/2006/diagram" xmlns:a="http://schemas.openxmlformats.org/drawingml/2006/main" uniqueId="urn:microsoft.com/office/officeart/2005/8/colors/colorful1">
-  <dgm:title val=""/>
-  <dgm:desc val=""/>
-  <dgm:catLst>
-    <dgm:cat type="colorful" pri="10100"/>
-  </dgm:catLst>
-  <dgm:styleLbl name="node0">
-    <dgm:fillClrLst meth="repeat">
-      <a:schemeClr val="accent1"/>
-    </dgm:fillClrLst>
-    <dgm:linClrLst meth="repeat">
-      <a:schemeClr val="lt1"/>
-    </dgm:linClrLst>
-    <dgm:effectClrLst/>
-    <dgm:txLinClrLst/>
-    <dgm:txFillClrLst/>
-    <dgm:txEffectClrLst/>
-  </dgm:styleLbl>
-  <dgm:styleLbl name="node1">
-    <dgm:fillClrLst meth="repeat">
-      <a:schemeClr val="accent2"/>
-      <a:schemeClr val="accent3"/>
-      <a:schemeClr val="accent4"/>
-      <a:schemeClr val="accent5"/>
-      <a:schemeClr val="accent6"/>
-    </dgm:fillClrLst>
-    <dgm:linClrLst meth="repeat">
-      <a:schemeClr val="lt1"/>
-    </dgm:linClrLst>
-    <dgm:effectClrLst/>
-    <dgm:txLinClrLst/>
-    <dgm:txFillClrLst/>
-    <dgm:txEffectClrLst/>
-  </dgm:styleLbl>
-  <dgm:styleLbl name="alignNode1">
-    <dgm:fillClrLst meth="repeat">
-      <a:schemeClr val="accent2"/>
-      <a:schemeClr val="accent3"/>
-      <a:schemeClr val="accent4"/>
-      <a:schemeClr val="accent5"/>
-      <a:schemeClr val="accent6"/>
-    </dgm:fillClrLst>
-    <dgm:linClrLst meth="repeat">
-      <a:schemeClr val="accent2"/>
-      <a:schemeClr val="accent3"/>
-      <a:schemeClr val="accent4"/>
-      <a:schemeClr val="accent5"/>
-      <a:schemeClr val="accent6"/>
-    </dgm:linClrLst>
-    <dgm:effectClrLst/>
-    <dgm:txLinClrLst/>
-    <dgm:txFillClrLst/>
-    <dgm:txEffectClrLst/>
-  </dgm:styleLbl>
-  <dgm:styleLbl name="lnNode1">
-    <dgm:fillClrLst meth="repeat">
-      <a:schemeClr val="accent2"/>
-      <a:schemeClr val="accent3"/>
-      <a:schemeClr val="accent4"/>
-      <a:schemeClr val="accent5"/>
-      <a:schemeClr val="accent6"/>
-    </dgm:fillClrLst>
-    <dgm:linClrLst meth="repeat">
-      <a:schemeClr val="lt1"/>
-    </dgm:linClrLst>
-    <dgm:effectClrLst/>
-    <dgm:txLinClrLst/>
-    <dgm:txFillClrLst/>
-    <dgm:txEffectClrLst/>
-  </dgm:styleLbl>
-  <dgm:styleLbl name="vennNode1">
-    <dgm:fillClrLst meth="repeat">
-      <a:schemeClr val="accent2">
-        <a:alpha val="50000"/>
-      </a:schemeClr>
-      <a:schemeClr val="accent3">
-        <a:alpha val="50000"/>
-      </a:schemeClr>
-      <a:schemeClr val="accent4">
-        <a:alpha val="50000"/>
-      </a:schemeClr>
-      <a:schemeClr val="accent5">
-        <a:alpha val="50000"/>
-      </a:schemeClr>
-      <a:schemeClr val="accent6">
-        <a:alpha val="50000"/>
-      </a:schemeClr>
-    </dgm:fillClrLst>
-    <dgm:linClrLst meth="repeat">
-      <a:schemeClr val="lt1"/>
-    </dgm:linClrLst>
-    <dgm:effectClrLst/>
-    <dgm:txLinClrLst/>
-    <dgm:txFillClrLst/>
-    <dgm:txEffectClrLst/>
-  </dgm:styleLbl>
-  <dgm:styleLbl name="node2">
-    <dgm:fillClrLst>
-      <a:schemeClr val="accent2"/>
-    </dgm:fillClrLst>
-    <dgm:linClrLst meth="repeat">
-      <a:schemeClr val="lt1"/>
-    </dgm:linClrLst>
-    <dgm:effectClrLst/>
-    <dgm:txLinClrLst/>
-    <dgm:txFillClrLst/>
-    <dgm:txEffectClrLst/>
-  </dgm:styleLbl>
-  <dgm:styleLbl name="node3">
-    <dgm:fillClrLst>
-      <a:schemeClr val="accent3"/>
-    </dgm:fillClrLst>
-    <dgm:linClrLst meth="repeat">
-      <a:schemeClr val="lt1"/>
-    </dgm:linClrLst>
-    <dgm:effectClrLst/>
-    <dgm:txLinClrLst/>
-    <dgm:txFillClrLst/>
-    <dgm:txEffectClrLst/>
-  </dgm:styleLbl>
-  <dgm:styleLbl name="node4">
-    <dgm:fillClrLst>
-      <a:schemeClr val="accent4"/>
-    </dgm:fillClrLst>
-    <dgm:linClrLst meth="repeat">
-      <a:schemeClr val="lt1"/>
-    </dgm:linClrLst>
-    <dgm:effectClrLst/>
-    <dgm:txLinClrLst/>
-    <dgm:txFillClrLst/>
-    <dgm:txEffectClrLst/>
-  </dgm:styleLbl>
-  <dgm:styleLbl name="fgImgPlace1">
-    <dgm:fillClrLst meth="repeat">
-      <a:schemeClr val="accent2">
-        <a:tint val="50000"/>
-      </a:schemeClr>
-      <a:schemeClr val="accent3">
-        <a:tint val="50000"/>
-      </a:schemeClr>
-      <a:schemeClr val="accent4">
-        <a:tint val="50000"/>
-      </a:schemeClr>
-      <a:schemeClr val="accent5">
-        <a:tint val="50000"/>
-      </a:schemeClr>
-      <a:schemeClr val="accent6">
-        <a:tint val="50000"/>
-      </a:schemeClr>
-    </dgm:fillClrLst>
-    <dgm:linClrLst meth="repeat">
-      <a:schemeClr val="lt1"/>
-    </dgm:linClrLst>
-    <dgm:effectClrLst/>
-    <dgm:txLinClrLst/>
-    <dgm:txFillClrLst meth="repeat">
-      <a:schemeClr val="lt1"/>
-    </dgm:txFillClrLst>
-    <dgm:txEffectClrLst/>
-  </dgm:styleLbl>
-  <dgm:styleLbl name="alignImgPlace1">
-    <dgm:fillClrLst>
-      <a:schemeClr val="accent1">
-        <a:tint val="50000"/>
-      </a:schemeClr>
-      <a:schemeClr val="accent2">
-        <a:tint val="20000"/>
-      </a:schemeClr>
-    </dgm:fillClrLst>
-    <dgm:linClrLst meth="repeat">
-      <a:schemeClr val="lt1"/>
-    </dgm:linClrLst>
-    <dgm:effectClrLst/>
-    <dgm:txLinClrLst/>
-    <dgm:txFillClrLst meth="repeat">
-      <a:schemeClr val="lt1"/>
-    </dgm:txFillClrLst>
-    <dgm:txEffectClrLst/>
-  </dgm:styleLbl>
-  <dgm:styleLbl name="bgImgPlace1">
-    <dgm:fillClrLst>
-      <a:schemeClr val="accent1">
-        <a:tint val="50000"/>
-      </a:schemeClr>
-      <a:schemeClr val="accent2">
-        <a:tint val="20000"/>
-      </a:schemeClr>
-    </dgm:fillClrLst>
-    <dgm:linClrLst meth="repeat">
-      <a:schemeClr val="lt1"/>
-    </dgm:linClrLst>
-    <dgm:effectClrLst/>
-    <dgm:txLinClrLst/>
-    <dgm:txFillClrLst meth="repeat">
-      <a:schemeClr val="lt1"/>
-    </dgm:txFillClrLst>
-    <dgm:txEffectClrLst/>
-  </dgm:styleLbl>
-  <dgm:styleLbl name="sibTrans2D1">
-    <dgm:fillClrLst meth="repeat">
-      <a:schemeClr val="accent2"/>
-      <a:schemeClr val="accent3"/>
-      <a:schemeClr val="accent4"/>
-      <a:schemeClr val="accent5"/>
-      <a:schemeClr val="accent6"/>
-    </dgm:fillClrLst>
-    <dgm:linClrLst meth="cycle">
-      <a:schemeClr val="lt1"/>
-    </dgm:linClrLst>
-    <dgm:effectClrLst/>
-    <dgm:txLinClrLst/>
-    <dgm:txFillClrLst/>
-    <dgm:txEffectClrLst/>
-  </dgm:styleLbl>
-  <dgm:styleLbl name="fgSibTrans2D1">
-    <dgm:fillClrLst meth="repeat">
-      <a:schemeClr val="accent2"/>
-      <a:schemeClr val="accent3"/>
-      <a:schemeClr val="accent4"/>
-      <a:schemeClr val="accent5"/>
-      <a:schemeClr val="accent6"/>
-    </dgm:fillClrLst>
-    <dgm:linClrLst meth="cycle">
-      <a:schemeClr val="lt1"/>
-    </dgm:linClrLst>
-    <dgm:effectClrLst/>
-    <dgm:txLinClrLst/>
-    <dgm:txFillClrLst meth="repeat">
-      <a:schemeClr val="lt1"/>
-    </dgm:txFillClrLst>
-    <dgm:txEffectClrLst/>
-  </dgm:styleLbl>
-  <dgm:styleLbl name="bgSibTrans2D1">
-    <dgm:fillClrLst meth="repeat">
-      <a:schemeClr val="accent2"/>
-      <a:schemeClr val="accent3"/>
-      <a:schemeClr val="accent4"/>
-      <a:schemeClr val="accent5"/>
-      <a:schemeClr val="accent6"/>
-    </dgm:fillClrLst>
-    <dgm:linClrLst meth="cycle">
-      <a:schemeClr val="lt1"/>
-    </dgm:linClrLst>
-    <dgm:effectClrLst/>
-    <dgm:txLinClrLst/>
-    <dgm:txFillClrLst meth="repeat">
-      <a:schemeClr val="lt1"/>
-    </dgm:txFillClrLst>
-    <dgm:txEffectClrLst/>
-  </dgm:styleLbl>
-  <dgm:styleLbl name="sibTrans1D1">
-    <dgm:fillClrLst meth="repeat">
-      <a:schemeClr val="accent2"/>
-      <a:schemeClr val="accent3"/>
-      <a:schemeClr val="accent4"/>
-      <a:schemeClr val="accent5"/>
-      <a:schemeClr val="accent6"/>
-    </dgm:fillClrLst>
-    <dgm:linClrLst meth="repeat">
-      <a:schemeClr val="accent2"/>
-      <a:schemeClr val="accent3"/>
-      <a:schemeClr val="accent4"/>
-      <a:schemeClr val="accent5"/>
-      <a:schemeClr val="accent6"/>
-    </dgm:linClrLst>
-    <dgm:effectClrLst/>
-    <dgm:txLinClrLst/>
-    <dgm:txFillClrLst meth="repeat">
-      <a:schemeClr val="tx1"/>
-    </dgm:txFillClrLst>
-    <dgm:txEffectClrLst/>
-  </dgm:styleLbl>
-  <dgm:styleLbl name="callout">
-    <dgm:fillClrLst meth="repeat">
-      <a:schemeClr val="accent2"/>
-    </dgm:fillClrLst>
-    <dgm:linClrLst meth="repeat">
-      <a:schemeClr val="accent2">
-        <a:tint val="50000"/>
-      </a:schemeClr>
-    </dgm:linClrLst>
-    <dgm:effectClrLst/>
-    <dgm:txLinClrLst/>
-    <dgm:txFillClrLst meth="repeat">
-      <a:schemeClr val="tx1"/>
-    </dgm:txFillClrLst>
-    <dgm:txEffectClrLst/>
-  </dgm:styleLbl>
-  <dgm:styleLbl name="asst0">
-    <dgm:fillClrLst meth="repeat">
-      <a:schemeClr val="accent1"/>
-    </dgm:fillClrLst>
-    <dgm:linClrLst meth="repeat">
-      <a:schemeClr val="lt1"/>
-    </dgm:linClrLst>
-    <dgm:effectClrLst/>
-    <dgm:txLinClrLst/>
-    <dgm:txFillClrLst/>
-    <dgm:txEffectClrLst/>
-  </dgm:styleLbl>
-  <dgm:styleLbl name="asst1">
-    <dgm:fillClrLst meth="repeat">
-      <a:schemeClr val="accent2"/>
-    </dgm:fillClrLst>
-    <dgm:linClrLst meth="repeat">
-      <a:schemeClr val="lt1"/>
-    </dgm:linClrLst>
-    <dgm:effectClrLst/>
-    <dgm:txLinClrLst/>
-    <dgm:txFillClrLst/>
-    <dgm:txEffectClrLst/>
-  </dgm:styleLbl>
-  <dgm:styleLbl name="asst2">
-    <dgm:fillClrLst>
-      <a:schemeClr val="accent3"/>
-    </dgm:fillClrLst>
-    <dgm:linClrLst meth="repeat">
-      <a:schemeClr val="lt1"/>
-    </dgm:linClrLst>
-    <dgm:effectClrLst/>
-    <dgm:txLinClrLst/>
-    <dgm:txFillClrLst/>
-    <dgm:txEffectClrLst/>
-  </dgm:styleLbl>
-  <dgm:styleLbl name="asst3">
-    <dgm:fillClrLst>
-      <a:schemeClr val="accent4"/>
-    </dgm:fillClrLst>
-    <dgm:linClrLst meth="repeat">
-      <a:schemeClr val="lt1"/>
-    </dgm:linClrLst>
-    <dgm:effectClrLst/>
-    <dgm:txLinClrLst/>
-    <dgm:txFillClrLst/>
-    <dgm:txEffectClrLst/>
-  </dgm:styleLbl>
-  <dgm:styleLbl name="asst4">
-    <dgm:fillClrLst>
-      <a:schemeClr val="accent5"/>
-    </dgm:fillClrLst>
-    <dgm:linClrLst meth="repeat">
-      <a:schemeClr val="lt1"/>
-    </dgm:linClrLst>
-    <dgm:effectClrLst/>
-    <dgm:txLinClrLst/>
-    <dgm:txFillClrLst/>
-    <dgm:txEffectClrLst/>
-  </dgm:styleLbl>
-  <dgm:styleLbl name="parChTrans2D1">
-    <dgm:fillClrLst meth="repeat">
-      <a:schemeClr val="accent2"/>
-    </dgm:fillClrLst>
-    <dgm:linClrLst meth="repeat">
-      <a:schemeClr val="lt1"/>
-    </dgm:linClrLst>
-    <dgm:effectClrLst/>
-    <dgm:txLinClrLst/>
-    <dgm:txFillClrLst meth="repeat">
-      <a:schemeClr val="lt1"/>
-    </dgm:txFillClrLst>
-    <dgm:txEffectClrLst/>
-  </dgm:styleLbl>
-  <dgm:styleLbl name="parChTrans2D2">
-    <dgm:fillClrLst meth="repeat">
-      <a:schemeClr val="accent3"/>
-    </dgm:fillClrLst>
-    <dgm:linClrLst meth="repeat">
-      <a:schemeClr val="lt1"/>
-    </dgm:linClrLst>
-    <dgm:effectClrLst/>
-    <dgm:txLinClrLst/>
-    <dgm:txFillClrLst/>
-    <dgm:txEffectClrLst/>
-  </dgm:styleLbl>
-  <dgm:styleLbl name="parChTrans2D3">
-    <dgm:fillClrLst meth="repeat">
-      <a:schemeClr val="accent4"/>
-    </dgm:fillClrLst>
-    <dgm:linClrLst meth="repeat">
-      <a:schemeClr val="lt1"/>
-    </dgm:linClrLst>
-    <dgm:effectClrLst/>
-    <dgm:txLinClrLst/>
-    <dgm:txFillClrLst/>
-    <dgm:txEffectClrLst/>
-  </dgm:styleLbl>
-  <dgm:styleLbl name="parChTrans2D4">
-    <dgm:fillClrLst meth="repeat">
-      <a:schemeClr val="accent5"/>
-    </dgm:fillClrLst>
-    <dgm:linClrLst meth="repeat">
-      <a:schemeClr val="lt1"/>
-    </dgm:linClrLst>
-    <dgm:effectClrLst/>
-    <dgm:txLinClrLst/>
-    <dgm:txFillClrLst meth="repeat">
-      <a:schemeClr val="lt1"/>
-    </dgm:txFillClrLst>
-    <dgm:txEffectClrLst/>
-  </dgm:styleLbl>
-  <dgm:styleLbl name="parChTrans1D1">
-    <dgm:fillClrLst meth="repeat">
-      <a:schemeClr val="accent2"/>
-    </dgm:fillClrLst>
-    <dgm:linClrLst meth="repeat">
-      <a:schemeClr val="accent1"/>
-    </dgm:linClrLst>
-    <dgm:effectClrLst/>
-    <dgm:txLinClrLst/>
-    <dgm:txFillClrLst meth="repeat">
-      <a:schemeClr val="tx1"/>
-    </dgm:txFillClrLst>
-    <dgm:txEffectClrLst/>
-  </dgm:styleLbl>
-  <dgm:styleLbl name="parChTrans1D2">
-    <dgm:fillClrLst meth="repeat">
-      <a:schemeClr val="accent3">
-        <a:tint val="90000"/>
-      </a:schemeClr>
-    </dgm:fillClrLst>
-    <dgm:linClrLst meth="repeat">
-      <a:schemeClr val="accent2"/>
-    </dgm:linClrLst>
-    <dgm:effectClrLst/>
-    <dgm:txLinClrLst/>
-    <dgm:txFillClrLst meth="repeat">
-      <a:schemeClr val="tx1"/>
-    </dgm:txFillClrLst>
-    <dgm:txEffectClrLst/>
-  </dgm:styleLbl>
-  <dgm:styleLbl name="parChTrans1D3">
-    <dgm:fillClrLst meth="repeat">
-      <a:schemeClr val="accent4">
-        <a:tint val="70000"/>
-      </a:schemeClr>
-    </dgm:fillClrLst>
-    <dgm:linClrLst meth="repeat">
-      <a:schemeClr val="accent3"/>
-    </dgm:linClrLst>
-    <dgm:effectClrLst/>
-    <dgm:txLinClrLst/>
-    <dgm:txFillClrLst meth="repeat">
-      <a:schemeClr val="tx1"/>
-    </dgm:txFillClrLst>
-    <dgm:txEffectClrLst/>
-  </dgm:styleLbl>
-  <dgm:styleLbl name="parChTrans1D4">
-    <dgm:fillClrLst meth="repeat">
-      <a:schemeClr val="accent5">
-        <a:tint val="50000"/>
-      </a:schemeClr>
-    </dgm:fillClrLst>
-    <dgm:linClrLst meth="repeat">
-      <a:schemeClr val="accent4"/>
-    </dgm:linClrLst>
-    <dgm:effectClrLst/>
-    <dgm:txLinClrLst/>
-    <dgm:txFillClrLst meth="repeat">
-      <a:schemeClr val="tx1"/>
-    </dgm:txFillClrLst>
-    <dgm:txEffectClrLst/>
-  </dgm:styleLbl>
-  <dgm:styleLbl name="fgAcc1">
-    <dgm:fillClrLst meth="repeat">
-      <a:schemeClr val="lt1">
-        <a:alpha val="90000"/>
-      </a:schemeClr>
-    </dgm:fillClrLst>
-    <dgm:linClrLst meth="repeat">
-      <a:schemeClr val="accent2"/>
-      <a:schemeClr val="accent3"/>
-      <a:schemeClr val="accent4"/>
-      <a:schemeClr val="accent5"/>
-      <a:schemeClr val="accent6"/>
-    </dgm:linClrLst>
-    <dgm:effectClrLst/>
-    <dgm:txLinClrLst/>
-    <dgm:txFillClrLst meth="repeat">
-      <a:schemeClr val="dk1"/>
-    </dgm:txFillClrLst>
-    <dgm:txEffectClrLst/>
-  </dgm:styleLbl>
-  <dgm:styleLbl name="conFgAcc1">
-    <dgm:fillClrLst meth="repeat">
-      <a:schemeClr val="lt1">
-        <a:alpha val="90000"/>
-      </a:schemeClr>
-    </dgm:fillClrLst>
-    <dgm:linClrLst meth="repeat">
-      <a:schemeClr val="accent2"/>
-      <a:schemeClr val="accent3"/>
-      <a:schemeClr val="accent4"/>
-      <a:schemeClr val="accent5"/>
-      <a:schemeClr val="accent6"/>
-    </dgm:linClrLst>
-    <dgm:effectClrLst/>
-    <dgm:txLinClrLst/>
-    <dgm:txFillClrLst meth="repeat">
-      <a:schemeClr val="dk1"/>
-    </dgm:txFillClrLst>
-    <dgm:txEffectClrLst/>
-  </dgm:styleLbl>
-  <dgm:styleLbl name="alignAcc1">
-    <dgm:fillClrLst meth="repeat">
-      <a:schemeClr val="lt1">
-        <a:alpha val="90000"/>
-      </a:schemeClr>
-    </dgm:fillClrLst>
-    <dgm:linClrLst meth="repeat">
-      <a:schemeClr val="accent2"/>
-      <a:schemeClr val="accent3"/>
-      <a:schemeClr val="accent4"/>
-      <a:schemeClr val="accent5"/>
-      <a:schemeClr val="accent6"/>
-    </dgm:linClrLst>
-    <dgm:effectClrLst/>
-    <dgm:txLinClrLst/>
-    <dgm:txFillClrLst meth="repeat">
-      <a:schemeClr val="dk1"/>
-    </dgm:txFillClrLst>
-    <dgm:txEffectClrLst/>
-  </dgm:styleLbl>
-  <dgm:styleLbl name="trAlignAcc1">
-    <dgm:fillClrLst meth="repeat">
-      <a:schemeClr val="lt1">
-        <a:alpha val="40000"/>
-      </a:schemeClr>
-    </dgm:fillClrLst>
-    <dgm:linClrLst meth="repeat">
-      <a:schemeClr val="accent1"/>
-    </dgm:linClrLst>
-    <dgm:effectClrLst/>
-    <dgm:txLinClrLst/>
-    <dgm:txFillClrLst meth="repeat">
-      <a:schemeClr val="dk1"/>
-    </dgm:txFillClrLst>
-    <dgm:txEffectClrLst/>
-  </dgm:styleLbl>
-  <dgm:styleLbl name="bgAcc1">
-    <dgm:fillClrLst meth="repeat">
-      <a:schemeClr val="lt1">
-        <a:alpha val="90000"/>
-      </a:schemeClr>
-    </dgm:fillClrLst>
-    <dgm:linClrLst meth="repeat">
-      <a:schemeClr val="accent2"/>
-      <a:schemeClr val="accent3"/>
-      <a:schemeClr val="accent4"/>
-      <a:schemeClr val="accent5"/>
-      <a:schemeClr val="accent6"/>
-    </dgm:linClrLst>
-    <dgm:effectClrLst/>
-    <dgm:txLinClrLst/>
-    <dgm:txFillClrLst meth="repeat">
-      <a:schemeClr val="dk1"/>
-    </dgm:txFillClrLst>
-    <dgm:txEffectClrLst/>
-  </dgm:styleLbl>
-  <dgm:styleLbl name="solidFgAcc1">
-    <dgm:fillClrLst meth="repeat">
-      <a:schemeClr val="lt1"/>
-    </dgm:fillClrLst>
-    <dgm:linClrLst meth="repeat">
-      <a:schemeClr val="accent2"/>
-      <a:schemeClr val="accent3"/>
-      <a:schemeClr val="accent4"/>
-      <a:schemeClr val="accent5"/>
-      <a:schemeClr val="accent6"/>
-    </dgm:linClrLst>
-    <dgm:effectClrLst/>
-    <dgm:txLinClrLst/>
-    <dgm:txFillClrLst meth="repeat">
-      <a:schemeClr val="dk1"/>
-    </dgm:txFillClrLst>
-    <dgm:txEffectClrLst/>
-  </dgm:styleLbl>
-  <dgm:styleLbl name="solidAlignAcc1">
-    <dgm:fillClrLst meth="repeat">
-      <a:schemeClr val="lt1"/>
-    </dgm:fillClrLst>
-    <dgm:linClrLst meth="repeat">
-      <a:schemeClr val="accent2"/>
-      <a:schemeClr val="accent3"/>
-      <a:schemeClr val="accent4"/>
-      <a:schemeClr val="accent5"/>
-      <a:schemeClr val="accent6"/>
-    </dgm:linClrLst>
-    <dgm:effectClrLst/>
-    <dgm:txLinClrLst/>
-    <dgm:txFillClrLst meth="repeat">
-      <a:schemeClr val="dk1"/>
-    </dgm:txFillClrLst>
-    <dgm:txEffectClrLst/>
-  </dgm:styleLbl>
-  <dgm:styleLbl name="solidBgAcc1">
-    <dgm:fillClrLst meth="repeat">
-      <a:schemeClr val="lt1"/>
-    </dgm:fillClrLst>
-    <dgm:linClrLst meth="repeat">
-      <a:schemeClr val="accent2"/>
-      <a:schemeClr val="accent3"/>
-      <a:schemeClr val="accent4"/>
-      <a:schemeClr val="accent5"/>
-      <a:schemeClr val="accent6"/>
-    </dgm:linClrLst>
-    <dgm:effectClrLst/>
-    <dgm:txLinClrLst/>
-    <dgm:txFillClrLst meth="repeat">
-      <a:schemeClr val="dk1"/>
-    </dgm:txFillClrLst>
-    <dgm:txEffectClrLst/>
-  </dgm:styleLbl>
-  <dgm:styleLbl name="fgAccFollowNode1">
-    <dgm:fillClrLst meth="repeat">
-      <a:schemeClr val="accent2">
-        <a:tint val="40000"/>
-        <a:alpha val="90000"/>
-      </a:schemeClr>
-      <a:schemeClr val="accent3">
-        <a:tint val="40000"/>
-        <a:alpha val="90000"/>
-      </a:schemeClr>
-      <a:schemeClr val="accent4">
-        <a:tint val="40000"/>
-        <a:alpha val="90000"/>
-      </a:schemeClr>
-      <a:schemeClr val="accent5">
-        <a:tint val="40000"/>
-        <a:alpha val="90000"/>
-      </a:schemeClr>
-      <a:schemeClr val="accent6">
-        <a:tint val="40000"/>
-        <a:alpha val="90000"/>
-      </a:schemeClr>
-    </dgm:fillClrLst>
-    <dgm:linClrLst meth="repeat">
-      <a:schemeClr val="accent2">
-        <a:tint val="40000"/>
-        <a:alpha val="90000"/>
-      </a:schemeClr>
-      <a:schemeClr val="accent3">
-        <a:tint val="40000"/>
-        <a:alpha val="90000"/>
-      </a:schemeClr>
-      <a:schemeClr val="accent4">
-        <a:tint val="40000"/>
-        <a:alpha val="90000"/>
-      </a:schemeClr>
-      <a:schemeClr val="accent5">
-        <a:tint val="40000"/>
-        <a:alpha val="90000"/>
-      </a:schemeClr>
-      <a:schemeClr val="accent6">
-        <a:tint val="40000"/>
-        <a:alpha val="90000"/>
-      </a:schemeClr>
-    </dgm:linClrLst>
-    <dgm:effectClrLst/>
-    <dgm:txLinClrLst/>
-    <dgm:txFillClrLst meth="repeat">
-      <a:schemeClr val="dk1"/>
-    </dgm:txFillClrLst>
-    <dgm:txEffectClrLst/>
-  </dgm:styleLbl>
-  <dgm:styleLbl name="alignAccFollowNode1">
-    <dgm:fillClrLst meth="repeat">
-      <a:schemeClr val="accent2">
-        <a:tint val="40000"/>
-        <a:alpha val="90000"/>
-      </a:schemeClr>
-      <a:schemeClr val="accent3">
-        <a:tint val="40000"/>
-        <a:alpha val="90000"/>
-      </a:schemeClr>
-      <a:schemeClr val="accent4">
-        <a:tint val="40000"/>
-        <a:alpha val="90000"/>
-      </a:schemeClr>
-      <a:schemeClr val="accent5">
-        <a:tint val="40000"/>
-        <a:alpha val="90000"/>
-      </a:schemeClr>
-      <a:schemeClr val="accent6">
-        <a:tint val="40000"/>
-        <a:alpha val="90000"/>
-      </a:schemeClr>
-    </dgm:fillClrLst>
-    <dgm:linClrLst meth="repeat">
-      <a:schemeClr val="accent2">
-        <a:tint val="40000"/>
-        <a:alpha val="90000"/>
-      </a:schemeClr>
-      <a:schemeClr val="accent3">
-        <a:tint val="40000"/>
-        <a:alpha val="90000"/>
-      </a:schemeClr>
-      <a:schemeClr val="accent4">
-        <a:tint val="40000"/>
-        <a:alpha val="90000"/>
-      </a:schemeClr>
-      <a:schemeClr val="accent5">
-        <a:tint val="40000"/>
-        <a:alpha val="90000"/>
-      </a:schemeClr>
-      <a:schemeClr val="accent6">
-        <a:tint val="40000"/>
-        <a:alpha val="90000"/>
-      </a:schemeClr>
-    </dgm:linClrLst>
-    <dgm:effectClrLst/>
-    <dgm:txLinClrLst/>
-    <dgm:txFillClrLst meth="repeat">
-      <a:schemeClr val="dk1"/>
-    </dgm:txFillClrLst>
-    <dgm:txEffectClrLst/>
-  </dgm:styleLbl>
-  <dgm:styleLbl name="bgAccFollowNode1">
-    <dgm:fillClrLst meth="repeat">
-      <a:schemeClr val="accent2">
-        <a:tint val="40000"/>
-        <a:alpha val="90000"/>
-      </a:schemeClr>
-      <a:schemeClr val="accent3">
-        <a:tint val="40000"/>
-        <a:alpha val="90000"/>
-      </a:schemeClr>
-      <a:schemeClr val="accent4">
-        <a:tint val="40000"/>
-        <a:alpha val="90000"/>
-      </a:schemeClr>
-      <a:schemeClr val="accent5">
-        <a:tint val="40000"/>
-        <a:alpha val="90000"/>
-      </a:schemeClr>
-      <a:schemeClr val="accent6">
-        <a:tint val="40000"/>
-        <a:alpha val="90000"/>
-      </a:schemeClr>
-    </dgm:fillClrLst>
-    <dgm:linClrLst meth="repeat">
-      <a:schemeClr val="accent2">
-        <a:tint val="40000"/>
-        <a:alpha val="90000"/>
-      </a:schemeClr>
-      <a:schemeClr val="accent3">
-        <a:tint val="40000"/>
-        <a:alpha val="90000"/>
-      </a:schemeClr>
-      <a:schemeClr val="accent4">
-        <a:tint val="40000"/>
-        <a:alpha val="90000"/>
-      </a:schemeClr>
-      <a:schemeClr val="accent5">
-        <a:tint val="40000"/>
-        <a:alpha val="90000"/>
-      </a:schemeClr>
-      <a:schemeClr val="accent6">
-        <a:tint val="40000"/>
-        <a:alpha val="90000"/>
-      </a:schemeClr>
-    </dgm:linClrLst>
-    <dgm:effectClrLst/>
-    <dgm:txLinClrLst/>
-    <dgm:txFillClrLst meth="repeat">
-      <a:schemeClr val="dk1"/>
-    </dgm:txFillClrLst>
-    <dgm:txEffectClrLst/>
-  </dgm:styleLbl>
-  <dgm:styleLbl name="fgAcc0">
-    <dgm:fillClrLst meth="repeat">
-      <a:schemeClr val="lt1">
-        <a:alpha val="90000"/>
-      </a:schemeClr>
-    </dgm:fillClrLst>
-    <dgm:linClrLst>
-      <a:schemeClr val="accent1"/>
-    </dgm:linClrLst>
-    <dgm:effectClrLst/>
-    <dgm:txLinClrLst/>
-    <dgm:txFillClrLst meth="repeat">
-      <a:schemeClr val="dk1"/>
-    </dgm:txFillClrLst>
-    <dgm:txEffectClrLst/>
-  </dgm:styleLbl>
-  <dgm:styleLbl name="fgAcc2">
-    <dgm:fillClrLst meth="repeat">
-      <a:schemeClr val="lt1">
-        <a:alpha val="90000"/>
-      </a:schemeClr>
-    </dgm:fillClrLst>
-    <dgm:linClrLst>
-      <a:schemeClr val="accent2"/>
-    </dgm:linClrLst>
-    <dgm:effectClrLst/>
-    <dgm:txLinClrLst/>
-    <dgm:txFillClrLst meth="repeat">
-      <a:schemeClr val="dk1"/>
-    </dgm:txFillClrLst>
-    <dgm:txEffectClrLst/>
-  </dgm:styleLbl>
-  <dgm:styleLbl name="fgAcc3">
-    <dgm:fillClrLst meth="repeat">
-      <a:schemeClr val="lt1">
-        <a:alpha val="90000"/>
-      </a:schemeClr>
-    </dgm:fillClrLst>
-    <dgm:linClrLst>
-      <a:schemeClr val="accent3"/>
-    </dgm:linClrLst>
-    <dgm:effectClrLst/>
-    <dgm:txLinClrLst/>
-    <dgm:txFillClrLst meth="repeat">
-      <a:schemeClr val="dk1"/>
-    </dgm:txFillClrLst>
-    <dgm:txEffectClrLst/>
-  </dgm:styleLbl>
-  <dgm:styleLbl name="fgAcc4">
-    <dgm:fillClrLst meth="repeat">
-      <a:schemeClr val="lt1">
-        <a:alpha val="90000"/>
-      </a:schemeClr>
-    </dgm:fillClrLst>
-    <dgm:linClrLst>
-      <a:schemeClr val="accent4"/>
-    </dgm:linClrLst>
-    <dgm:effectClrLst/>
-    <dgm:txLinClrLst/>
-    <dgm:txFillClrLst meth="repeat">
-      <a:schemeClr val="dk1"/>
-    </dgm:txFillClrLst>
-    <dgm:txEffectClrLst/>
-  </dgm:styleLbl>
-  <dgm:styleLbl name="bgShp">
-    <dgm:fillClrLst meth="repeat">
-      <a:schemeClr val="accent2">
-        <a:tint val="40000"/>
-      </a:schemeClr>
-    </dgm:fillClrLst>
-    <dgm:linClrLst meth="repeat">
-      <a:schemeClr val="dk1"/>
-    </dgm:linClrLst>
-    <dgm:effectClrLst/>
-    <dgm:txLinClrLst/>
-    <dgm:txFillClrLst meth="repeat">
-      <a:schemeClr val="dk1"/>
-    </dgm:txFillClrLst>
-    <dgm:txEffectClrLst/>
-  </dgm:styleLbl>
-  <dgm:styleLbl name="dkBgShp">
-    <dgm:fillClrLst meth="repeat">
-      <a:schemeClr val="accent2">
-        <a:shade val="90000"/>
-      </a:schemeClr>
-    </dgm:fillClrLst>
-    <dgm:linClrLst meth="repeat">
-      <a:schemeClr val="dk1"/>
-    </dgm:linClrLst>
-    <dgm:effectClrLst/>
-    <dgm:txLinClrLst/>
-    <dgm:txFillClrLst meth="repeat">
-      <a:schemeClr val="lt1"/>
-    </dgm:txFillClrLst>
-    <dgm:txEffectClrLst/>
-  </dgm:styleLbl>
-  <dgm:styleLbl name="trBgShp">
-    <dgm:fillClrLst meth="repeat">
-      <a:schemeClr val="accent1">
-        <a:tint val="50000"/>
-        <a:alpha val="40000"/>
-      </a:schemeClr>
-    </dgm:fillClrLst>
-    <dgm:linClrLst meth="repeat">
-      <a:schemeClr val="accent2"/>
-    </dgm:linClrLst>
-    <dgm:effectClrLst/>
-    <dgm:txLinClrLst/>
-    <dgm:txFillClrLst meth="repeat">
-      <a:schemeClr val="lt1"/>
-    </dgm:txFillClrLst>
-    <dgm:txEffectClrLst/>
-  </dgm:styleLbl>
-  <dgm:styleLbl name="fgShp">
-    <dgm:fillClrLst meth="repeat">
-      <a:schemeClr val="accent2">
-        <a:tint val="40000"/>
-      </a:schemeClr>
-    </dgm:fillClrLst>
-    <dgm:linClrLst meth="repeat">
-      <a:schemeClr val="lt1"/>
-    </dgm:linClrLst>
-    <dgm:effectClrLst/>
-    <dgm:txLinClrLst/>
-    <dgm:txFillClrLst meth="repeat">
-      <a:schemeClr val="dk1"/>
-    </dgm:txFillClrLst>
-    <dgm:txEffectClrLst/>
-  </dgm:styleLbl>
-  <dgm:styleLbl name="revTx">
-    <dgm:fillClrLst meth="repeat">
-      <a:schemeClr val="lt1">
-        <a:alpha val="0"/>
-      </a:schemeClr>
-    </dgm:fillClrLst>
-    <dgm:linClrLst meth="repeat">
-      <a:schemeClr val="dk1">
-        <a:alpha val="0"/>
-      </a:schemeClr>
-    </dgm:linClrLst>
-    <dgm:effectClrLst/>
-    <dgm:txLinClrLst/>
-    <dgm:txFillClrLst meth="repeat">
-      <a:schemeClr val="tx1"/>
-    </dgm:txFillClrLst>
-    <dgm:txEffectClrLst/>
-  </dgm:styleLbl>
-</dgm:colorsDef>
-</file>
-
-<file path=ppt/diagrams/colors12.xml><?xml version="1.0" encoding="utf-8"?>
-<dgm:colorsDef xmlns:dgm="http://schemas.openxmlformats.org/drawingml/2006/diagram" xmlns:a="http://schemas.openxmlformats.org/drawingml/2006/main" uniqueId="urn:microsoft.com/office/officeart/2005/8/colors/colorful1">
-  <dgm:title val=""/>
-  <dgm:desc val=""/>
-  <dgm:catLst>
-    <dgm:cat type="colorful" pri="10100"/>
-  </dgm:catLst>
-  <dgm:styleLbl name="node0">
-    <dgm:fillClrLst meth="repeat">
-      <a:schemeClr val="accent1"/>
-    </dgm:fillClrLst>
-    <dgm:linClrLst meth="repeat">
-      <a:schemeClr val="lt1"/>
-    </dgm:linClrLst>
-    <dgm:effectClrLst/>
-    <dgm:txLinClrLst/>
-    <dgm:txFillClrLst/>
-    <dgm:txEffectClrLst/>
-  </dgm:styleLbl>
-  <dgm:styleLbl name="node1">
-    <dgm:fillClrLst meth="repeat">
-      <a:schemeClr val="accent2"/>
-      <a:schemeClr val="accent3"/>
-      <a:schemeClr val="accent4"/>
-      <a:schemeClr val="accent5"/>
-      <a:schemeClr val="accent6"/>
-    </dgm:fillClrLst>
-    <dgm:linClrLst meth="repeat">
-      <a:schemeClr val="lt1"/>
-    </dgm:linClrLst>
-    <dgm:effectClrLst/>
-    <dgm:txLinClrLst/>
-    <dgm:txFillClrLst/>
-    <dgm:txEffectClrLst/>
-  </dgm:styleLbl>
-  <dgm:styleLbl name="alignNode1">
-    <dgm:fillClrLst meth="repeat">
-      <a:schemeClr val="accent2"/>
-      <a:schemeClr val="accent3"/>
-      <a:schemeClr val="accent4"/>
-      <a:schemeClr val="accent5"/>
-      <a:schemeClr val="accent6"/>
-    </dgm:fillClrLst>
-    <dgm:linClrLst meth="repeat">
-      <a:schemeClr val="accent2"/>
-      <a:schemeClr val="accent3"/>
-      <a:schemeClr val="accent4"/>
-      <a:schemeClr val="accent5"/>
-      <a:schemeClr val="accent6"/>
-    </dgm:linClrLst>
-    <dgm:effectClrLst/>
-    <dgm:txLinClrLst/>
-    <dgm:txFillClrLst/>
-    <dgm:txEffectClrLst/>
-  </dgm:styleLbl>
-  <dgm:styleLbl name="lnNode1">
-    <dgm:fillClrLst meth="repeat">
-      <a:schemeClr val="accent2"/>
-      <a:schemeClr val="accent3"/>
-      <a:schemeClr val="accent4"/>
-      <a:schemeClr val="accent5"/>
-      <a:schemeClr val="accent6"/>
-    </dgm:fillClrLst>
-    <dgm:linClrLst meth="repeat">
-      <a:schemeClr val="lt1"/>
-    </dgm:linClrLst>
-    <dgm:effectClrLst/>
-    <dgm:txLinClrLst/>
-    <dgm:txFillClrLst/>
-    <dgm:txEffectClrLst/>
-  </dgm:styleLbl>
-  <dgm:styleLbl name="vennNode1">
-    <dgm:fillClrLst meth="repeat">
-      <a:schemeClr val="accent2">
-        <a:alpha val="50000"/>
-      </a:schemeClr>
-      <a:schemeClr val="accent3">
-        <a:alpha val="50000"/>
-      </a:schemeClr>
-      <a:schemeClr val="accent4">
-        <a:alpha val="50000"/>
-      </a:schemeClr>
-      <a:schemeClr val="accent5">
-        <a:alpha val="50000"/>
-      </a:schemeClr>
-      <a:schemeClr val="accent6">
-        <a:alpha val="50000"/>
-      </a:schemeClr>
-    </dgm:fillClrLst>
-    <dgm:linClrLst meth="repeat">
-      <a:schemeClr val="lt1"/>
-    </dgm:linClrLst>
-    <dgm:effectClrLst/>
-    <dgm:txLinClrLst/>
-    <dgm:txFillClrLst/>
-    <dgm:txEffectClrLst/>
-  </dgm:styleLbl>
-  <dgm:styleLbl name="node2">
-    <dgm:fillClrLst>
-      <a:schemeClr val="accent2"/>
-    </dgm:fillClrLst>
-    <dgm:linClrLst meth="repeat">
-      <a:schemeClr val="lt1"/>
-    </dgm:linClrLst>
-    <dgm:effectClrLst/>
-    <dgm:txLinClrLst/>
-    <dgm:txFillClrLst/>
-    <dgm:txEffectClrLst/>
-  </dgm:styleLbl>
-  <dgm:styleLbl name="node3">
-    <dgm:fillClrLst>
-      <a:schemeClr val="accent3"/>
-    </dgm:fillClrLst>
-    <dgm:linClrLst meth="repeat">
-      <a:schemeClr val="lt1"/>
-    </dgm:linClrLst>
-    <dgm:effectClrLst/>
-    <dgm:txLinClrLst/>
-    <dgm:txFillClrLst/>
-    <dgm:txEffectClrLst/>
-  </dgm:styleLbl>
-  <dgm:styleLbl name="node4">
-    <dgm:fillClrLst>
-      <a:schemeClr val="accent4"/>
-    </dgm:fillClrLst>
-    <dgm:linClrLst meth="repeat">
-      <a:schemeClr val="lt1"/>
-    </dgm:linClrLst>
-    <dgm:effectClrLst/>
-    <dgm:txLinClrLst/>
-    <dgm:txFillClrLst/>
-    <dgm:txEffectClrLst/>
-  </dgm:styleLbl>
-  <dgm:styleLbl name="fgImgPlace1">
-    <dgm:fillClrLst meth="repeat">
-      <a:schemeClr val="accent2">
-        <a:tint val="50000"/>
-      </a:schemeClr>
-      <a:schemeClr val="accent3">
-        <a:tint val="50000"/>
-      </a:schemeClr>
-      <a:schemeClr val="accent4">
-        <a:tint val="50000"/>
-      </a:schemeClr>
-      <a:schemeClr val="accent5">
-        <a:tint val="50000"/>
-      </a:schemeClr>
-      <a:schemeClr val="accent6">
-        <a:tint val="50000"/>
-      </a:schemeClr>
-    </dgm:fillClrLst>
-    <dgm:linClrLst meth="repeat">
-      <a:schemeClr val="lt1"/>
-    </dgm:linClrLst>
-    <dgm:effectClrLst/>
-    <dgm:txLinClrLst/>
-    <dgm:txFillClrLst meth="repeat">
-      <a:schemeClr val="lt1"/>
-    </dgm:txFillClrLst>
-    <dgm:txEffectClrLst/>
-  </dgm:styleLbl>
-  <dgm:styleLbl name="alignImgPlace1">
-    <dgm:fillClrLst>
-      <a:schemeClr val="accent1">
-        <a:tint val="50000"/>
-      </a:schemeClr>
-      <a:schemeClr val="accent2">
-        <a:tint val="20000"/>
-      </a:schemeClr>
-    </dgm:fillClrLst>
-    <dgm:linClrLst meth="repeat">
-      <a:schemeClr val="lt1"/>
-    </dgm:linClrLst>
-    <dgm:effectClrLst/>
-    <dgm:txLinClrLst/>
-    <dgm:txFillClrLst meth="repeat">
-      <a:schemeClr val="lt1"/>
-    </dgm:txFillClrLst>
-    <dgm:txEffectClrLst/>
-  </dgm:styleLbl>
-  <dgm:styleLbl name="bgImgPlace1">
-    <dgm:fillClrLst>
-      <a:schemeClr val="accent1">
-        <a:tint val="50000"/>
-      </a:schemeClr>
-      <a:schemeClr val="accent2">
-        <a:tint val="20000"/>
-      </a:schemeClr>
-    </dgm:fillClrLst>
-    <dgm:linClrLst meth="repeat">
-      <a:schemeClr val="lt1"/>
-    </dgm:linClrLst>
-    <dgm:effectClrLst/>
-    <dgm:txLinClrLst/>
-    <dgm:txFillClrLst meth="repeat">
-      <a:schemeClr val="lt1"/>
-    </dgm:txFillClrLst>
-    <dgm:txEffectClrLst/>
-  </dgm:styleLbl>
-  <dgm:styleLbl name="sibTrans2D1">
-    <dgm:fillClrLst meth="repeat">
-      <a:schemeClr val="accent2"/>
-      <a:schemeClr val="accent3"/>
-      <a:schemeClr val="accent4"/>
-      <a:schemeClr val="accent5"/>
-      <a:schemeClr val="accent6"/>
-    </dgm:fillClrLst>
-    <dgm:linClrLst meth="cycle">
-      <a:schemeClr val="lt1"/>
-    </dgm:linClrLst>
-    <dgm:effectClrLst/>
-    <dgm:txLinClrLst/>
-    <dgm:txFillClrLst/>
-    <dgm:txEffectClrLst/>
-  </dgm:styleLbl>
-  <dgm:styleLbl name="fgSibTrans2D1">
-    <dgm:fillClrLst meth="repeat">
-      <a:schemeClr val="accent2"/>
-      <a:schemeClr val="accent3"/>
-      <a:schemeClr val="accent4"/>
-      <a:schemeClr val="accent5"/>
-      <a:schemeClr val="accent6"/>
-    </dgm:fillClrLst>
-    <dgm:linClrLst meth="cycle">
-      <a:schemeClr val="lt1"/>
-    </dgm:linClrLst>
-    <dgm:effectClrLst/>
-    <dgm:txLinClrLst/>
-    <dgm:txFillClrLst meth="repeat">
-      <a:schemeClr val="lt1"/>
-    </dgm:txFillClrLst>
-    <dgm:txEffectClrLst/>
-  </dgm:styleLbl>
-  <dgm:styleLbl name="bgSibTrans2D1">
-    <dgm:fillClrLst meth="repeat">
-      <a:schemeClr val="accent2"/>
-      <a:schemeClr val="accent3"/>
-      <a:schemeClr val="accent4"/>
-      <a:schemeClr val="accent5"/>
-      <a:schemeClr val="accent6"/>
-    </dgm:fillClrLst>
-    <dgm:linClrLst meth="cycle">
-      <a:schemeClr val="lt1"/>
-    </dgm:linClrLst>
-    <dgm:effectClrLst/>
-    <dgm:txLinClrLst/>
-    <dgm:txFillClrLst meth="repeat">
-      <a:schemeClr val="lt1"/>
-    </dgm:txFillClrLst>
-    <dgm:txEffectClrLst/>
-  </dgm:styleLbl>
-  <dgm:styleLbl name="sibTrans1D1">
-    <dgm:fillClrLst meth="repeat">
-      <a:schemeClr val="accent2"/>
-      <a:schemeClr val="accent3"/>
-      <a:schemeClr val="accent4"/>
-      <a:schemeClr val="accent5"/>
-      <a:schemeClr val="accent6"/>
-    </dgm:fillClrLst>
-    <dgm:linClrLst meth="repeat">
-      <a:schemeClr val="accent2"/>
-      <a:schemeClr val="accent3"/>
-      <a:schemeClr val="accent4"/>
-      <a:schemeClr val="accent5"/>
-      <a:schemeClr val="accent6"/>
-    </dgm:linClrLst>
-    <dgm:effectClrLst/>
-    <dgm:txLinClrLst/>
-    <dgm:txFillClrLst meth="repeat">
-      <a:schemeClr val="tx1"/>
-    </dgm:txFillClrLst>
-    <dgm:txEffectClrLst/>
-  </dgm:styleLbl>
-  <dgm:styleLbl name="callout">
-    <dgm:fillClrLst meth="repeat">
-      <a:schemeClr val="accent2"/>
-    </dgm:fillClrLst>
-    <dgm:linClrLst meth="repeat">
-      <a:schemeClr val="accent2">
-        <a:tint val="50000"/>
-      </a:schemeClr>
-    </dgm:linClrLst>
-    <dgm:effectClrLst/>
-    <dgm:txLinClrLst/>
-    <dgm:txFillClrLst meth="repeat">
-      <a:schemeClr val="tx1"/>
-    </dgm:txFillClrLst>
-    <dgm:txEffectClrLst/>
-  </dgm:styleLbl>
-  <dgm:styleLbl name="asst0">
-    <dgm:fillClrLst meth="repeat">
-      <a:schemeClr val="accent1"/>
-    </dgm:fillClrLst>
-    <dgm:linClrLst meth="repeat">
-      <a:schemeClr val="lt1"/>
-    </dgm:linClrLst>
-    <dgm:effectClrLst/>
-    <dgm:txLinClrLst/>
-    <dgm:txFillClrLst/>
-    <dgm:txEffectClrLst/>
-  </dgm:styleLbl>
-  <dgm:styleLbl name="asst1">
-    <dgm:fillClrLst meth="repeat">
-      <a:schemeClr val="accent2"/>
-    </dgm:fillClrLst>
-    <dgm:linClrLst meth="repeat">
-      <a:schemeClr val="lt1"/>
-    </dgm:linClrLst>
-    <dgm:effectClrLst/>
-    <dgm:txLinClrLst/>
-    <dgm:txFillClrLst/>
-    <dgm:txEffectClrLst/>
-  </dgm:styleLbl>
-  <dgm:styleLbl name="asst2">
-    <dgm:fillClrLst>
-      <a:schemeClr val="accent3"/>
-    </dgm:fillClrLst>
-    <dgm:linClrLst meth="repeat">
-      <a:schemeClr val="lt1"/>
-    </dgm:linClrLst>
-    <dgm:effectClrLst/>
-    <dgm:txLinClrLst/>
-    <dgm:txFillClrLst/>
-    <dgm:txEffectClrLst/>
-  </dgm:styleLbl>
-  <dgm:styleLbl name="asst3">
-    <dgm:fillClrLst>
-      <a:schemeClr val="accent4"/>
-    </dgm:fillClrLst>
-    <dgm:linClrLst meth="repeat">
-      <a:schemeClr val="lt1"/>
-    </dgm:linClrLst>
-    <dgm:effectClrLst/>
-    <dgm:txLinClrLst/>
-    <dgm:txFillClrLst/>
-    <dgm:txEffectClrLst/>
-  </dgm:styleLbl>
-  <dgm:styleLbl name="asst4">
-    <dgm:fillClrLst>
-      <a:schemeClr val="accent5"/>
-    </dgm:fillClrLst>
-    <dgm:linClrLst meth="repeat">
-      <a:schemeClr val="lt1"/>
-    </dgm:linClrLst>
-    <dgm:effectClrLst/>
-    <dgm:txLinClrLst/>
-    <dgm:txFillClrLst/>
-    <dgm:txEffectClrLst/>
-  </dgm:styleLbl>
-  <dgm:styleLbl name="parChTrans2D1">
-    <dgm:fillClrLst meth="repeat">
-      <a:schemeClr val="accent2"/>
-    </dgm:fillClrLst>
-    <dgm:linClrLst meth="repeat">
-      <a:schemeClr val="lt1"/>
-    </dgm:linClrLst>
-    <dgm:effectClrLst/>
-    <dgm:txLinClrLst/>
-    <dgm:txFillClrLst meth="repeat">
-      <a:schemeClr val="lt1"/>
-    </dgm:txFillClrLst>
-    <dgm:txEffectClrLst/>
-  </dgm:styleLbl>
-  <dgm:styleLbl name="parChTrans2D2">
-    <dgm:fillClrLst meth="repeat">
-      <a:schemeClr val="accent3"/>
-    </dgm:fillClrLst>
-    <dgm:linClrLst meth="repeat">
-      <a:schemeClr val="lt1"/>
-    </dgm:linClrLst>
-    <dgm:effectClrLst/>
-    <dgm:txLinClrLst/>
-    <dgm:txFillClrLst/>
-    <dgm:txEffectClrLst/>
-  </dgm:styleLbl>
-  <dgm:styleLbl name="parChTrans2D3">
-    <dgm:fillClrLst meth="repeat">
-      <a:schemeClr val="accent4"/>
-    </dgm:fillClrLst>
-    <dgm:linClrLst meth="repeat">
-      <a:schemeClr val="lt1"/>
-    </dgm:linClrLst>
-    <dgm:effectClrLst/>
-    <dgm:txLinClrLst/>
-    <dgm:txFillClrLst/>
-    <dgm:txEffectClrLst/>
-  </dgm:styleLbl>
-  <dgm:styleLbl name="parChTrans2D4">
-    <dgm:fillClrLst meth="repeat">
-      <a:schemeClr val="accent5"/>
-    </dgm:fillClrLst>
-    <dgm:linClrLst meth="repeat">
-      <a:schemeClr val="lt1"/>
-    </dgm:linClrLst>
-    <dgm:effectClrLst/>
-    <dgm:txLinClrLst/>
-    <dgm:txFillClrLst meth="repeat">
-      <a:schemeClr val="lt1"/>
-    </dgm:txFillClrLst>
-    <dgm:txEffectClrLst/>
-  </dgm:styleLbl>
-  <dgm:styleLbl name="parChTrans1D1">
-    <dgm:fillClrLst meth="repeat">
-      <a:schemeClr val="accent2"/>
-    </dgm:fillClrLst>
-    <dgm:linClrLst meth="repeat">
-      <a:schemeClr val="accent1"/>
-    </dgm:linClrLst>
-    <dgm:effectClrLst/>
-    <dgm:txLinClrLst/>
-    <dgm:txFillClrLst meth="repeat">
-      <a:schemeClr val="tx1"/>
-    </dgm:txFillClrLst>
-    <dgm:txEffectClrLst/>
-  </dgm:styleLbl>
-  <dgm:styleLbl name="parChTrans1D2">
-    <dgm:fillClrLst meth="repeat">
-      <a:schemeClr val="accent3">
-        <a:tint val="90000"/>
-      </a:schemeClr>
-    </dgm:fillClrLst>
-    <dgm:linClrLst meth="repeat">
-      <a:schemeClr val="accent2"/>
-    </dgm:linClrLst>
-    <dgm:effectClrLst/>
-    <dgm:txLinClrLst/>
-    <dgm:txFillClrLst meth="repeat">
-      <a:schemeClr val="tx1"/>
-    </dgm:txFillClrLst>
-    <dgm:txEffectClrLst/>
-  </dgm:styleLbl>
-  <dgm:styleLbl name="parChTrans1D3">
-    <dgm:fillClrLst meth="repeat">
-      <a:schemeClr val="accent4">
-        <a:tint val="70000"/>
-      </a:schemeClr>
-    </dgm:fillClrLst>
-    <dgm:linClrLst meth="repeat">
-      <a:schemeClr val="accent3"/>
-    </dgm:linClrLst>
-    <dgm:effectClrLst/>
-    <dgm:txLinClrLst/>
-    <dgm:txFillClrLst meth="repeat">
-      <a:schemeClr val="tx1"/>
-    </dgm:txFillClrLst>
-    <dgm:txEffectClrLst/>
-  </dgm:styleLbl>
-  <dgm:styleLbl name="parChTrans1D4">
-    <dgm:fillClrLst meth="repeat">
-      <a:schemeClr val="accent5">
-        <a:tint val="50000"/>
-      </a:schemeClr>
-    </dgm:fillClrLst>
-    <dgm:linClrLst meth="repeat">
-      <a:schemeClr val="accent4"/>
-    </dgm:linClrLst>
-    <dgm:effectClrLst/>
-    <dgm:txLinClrLst/>
-    <dgm:txFillClrLst meth="repeat">
-      <a:schemeClr val="tx1"/>
-    </dgm:txFillClrLst>
-    <dgm:txEffectClrLst/>
-  </dgm:styleLbl>
-  <dgm:styleLbl name="fgAcc1">
-    <dgm:fillClrLst meth="repeat">
-      <a:schemeClr val="lt1">
-        <a:alpha val="90000"/>
-      </a:schemeClr>
-    </dgm:fillClrLst>
-    <dgm:linClrLst meth="repeat">
-      <a:schemeClr val="accent2"/>
-      <a:schemeClr val="accent3"/>
-      <a:schemeClr val="accent4"/>
-      <a:schemeClr val="accent5"/>
-      <a:schemeClr val="accent6"/>
-    </dgm:linClrLst>
-    <dgm:effectClrLst/>
-    <dgm:txLinClrLst/>
-    <dgm:txFillClrLst meth="repeat">
-      <a:schemeClr val="dk1"/>
-    </dgm:txFillClrLst>
-    <dgm:txEffectClrLst/>
-  </dgm:styleLbl>
-  <dgm:styleLbl name="conFgAcc1">
-    <dgm:fillClrLst meth="repeat">
-      <a:schemeClr val="lt1">
-        <a:alpha val="90000"/>
-      </a:schemeClr>
-    </dgm:fillClrLst>
-    <dgm:linClrLst meth="repeat">
-      <a:schemeClr val="accent2"/>
-      <a:schemeClr val="accent3"/>
-      <a:schemeClr val="accent4"/>
-      <a:schemeClr val="accent5"/>
-      <a:schemeClr val="accent6"/>
-    </dgm:linClrLst>
-    <dgm:effectClrLst/>
-    <dgm:txLinClrLst/>
-    <dgm:txFillClrLst meth="repeat">
-      <a:schemeClr val="dk1"/>
-    </dgm:txFillClrLst>
-    <dgm:txEffectClrLst/>
-  </dgm:styleLbl>
-  <dgm:styleLbl name="alignAcc1">
-    <dgm:fillClrLst meth="repeat">
-      <a:schemeClr val="lt1">
-        <a:alpha val="90000"/>
-      </a:schemeClr>
-    </dgm:fillClrLst>
-    <dgm:linClrLst meth="repeat">
-      <a:schemeClr val="accent2"/>
-      <a:schemeClr val="accent3"/>
-      <a:schemeClr val="accent4"/>
-      <a:schemeClr val="accent5"/>
-      <a:schemeClr val="accent6"/>
-    </dgm:linClrLst>
-    <dgm:effectClrLst/>
-    <dgm:txLinClrLst/>
-    <dgm:txFillClrLst meth="repeat">
-      <a:schemeClr val="dk1"/>
-    </dgm:txFillClrLst>
-    <dgm:txEffectClrLst/>
-  </dgm:styleLbl>
-  <dgm:styleLbl name="trAlignAcc1">
-    <dgm:fillClrLst meth="repeat">
-      <a:schemeClr val="lt1">
-        <a:alpha val="40000"/>
-      </a:schemeClr>
-    </dgm:fillClrLst>
-    <dgm:linClrLst meth="repeat">
-      <a:schemeClr val="accent1"/>
-    </dgm:linClrLst>
-    <dgm:effectClrLst/>
-    <dgm:txLinClrLst/>
-    <dgm:txFillClrLst meth="repeat">
-      <a:schemeClr val="dk1"/>
-    </dgm:txFillClrLst>
-    <dgm:txEffectClrLst/>
-  </dgm:styleLbl>
-  <dgm:styleLbl name="bgAcc1">
-    <dgm:fillClrLst meth="repeat">
-      <a:schemeClr val="lt1">
-        <a:alpha val="90000"/>
-      </a:schemeClr>
-    </dgm:fillClrLst>
-    <dgm:linClrLst meth="repeat">
-      <a:schemeClr val="accent2"/>
-      <a:schemeClr val="accent3"/>
-      <a:schemeClr val="accent4"/>
-      <a:schemeClr val="accent5"/>
-      <a:schemeClr val="accent6"/>
-    </dgm:linClrLst>
-    <dgm:effectClrLst/>
-    <dgm:txLinClrLst/>
-    <dgm:txFillClrLst meth="repeat">
-      <a:schemeClr val="dk1"/>
-    </dgm:txFillClrLst>
-    <dgm:txEffectClrLst/>
-  </dgm:styleLbl>
-  <dgm:styleLbl name="solidFgAcc1">
-    <dgm:fillClrLst meth="repeat">
-      <a:schemeClr val="lt1"/>
-    </dgm:fillClrLst>
-    <dgm:linClrLst meth="repeat">
-      <a:schemeClr val="accent2"/>
-      <a:schemeClr val="accent3"/>
-      <a:schemeClr val="accent4"/>
-      <a:schemeClr val="accent5"/>
-      <a:schemeClr val="accent6"/>
-    </dgm:linClrLst>
-    <dgm:effectClrLst/>
-    <dgm:txLinClrLst/>
-    <dgm:txFillClrLst meth="repeat">
-      <a:schemeClr val="dk1"/>
-    </dgm:txFillClrLst>
-    <dgm:txEffectClrLst/>
-  </dgm:styleLbl>
-  <dgm:styleLbl name="solidAlignAcc1">
-    <dgm:fillClrLst meth="repeat">
-      <a:schemeClr val="lt1"/>
-    </dgm:fillClrLst>
-    <dgm:linClrLst meth="repeat">
-      <a:schemeClr val="accent2"/>
-      <a:schemeClr val="accent3"/>
-      <a:schemeClr val="accent4"/>
-      <a:schemeClr val="accent5"/>
-      <a:schemeClr val="accent6"/>
-    </dgm:linClrLst>
-    <dgm:effectClrLst/>
-    <dgm:txLinClrLst/>
-    <dgm:txFillClrLst meth="repeat">
-      <a:schemeClr val="dk1"/>
-    </dgm:txFillClrLst>
-    <dgm:txEffectClrLst/>
-  </dgm:styleLbl>
-  <dgm:styleLbl name="solidBgAcc1">
-    <dgm:fillClrLst meth="repeat">
-      <a:schemeClr val="lt1"/>
-    </dgm:fillClrLst>
-    <dgm:linClrLst meth="repeat">
-      <a:schemeClr val="accent2"/>
-      <a:schemeClr val="accent3"/>
-      <a:schemeClr val="accent4"/>
-      <a:schemeClr val="accent5"/>
-      <a:schemeClr val="accent6"/>
-    </dgm:linClrLst>
-    <dgm:effectClrLst/>
-    <dgm:txLinClrLst/>
-    <dgm:txFillClrLst meth="repeat">
-      <a:schemeClr val="dk1"/>
-    </dgm:txFillClrLst>
-    <dgm:txEffectClrLst/>
-  </dgm:styleLbl>
-  <dgm:styleLbl name="fgAccFollowNode1">
-    <dgm:fillClrLst meth="repeat">
-      <a:schemeClr val="accent2">
-        <a:tint val="40000"/>
-        <a:alpha val="90000"/>
-      </a:schemeClr>
-      <a:schemeClr val="accent3">
-        <a:tint val="40000"/>
-        <a:alpha val="90000"/>
-      </a:schemeClr>
-      <a:schemeClr val="accent4">
-        <a:tint val="40000"/>
-        <a:alpha val="90000"/>
-      </a:schemeClr>
-      <a:schemeClr val="accent5">
-        <a:tint val="40000"/>
-        <a:alpha val="90000"/>
-      </a:schemeClr>
-      <a:schemeClr val="accent6">
-        <a:tint val="40000"/>
-        <a:alpha val="90000"/>
-      </a:schemeClr>
-    </dgm:fillClrLst>
-    <dgm:linClrLst meth="repeat">
-      <a:schemeClr val="accent2">
-        <a:tint val="40000"/>
-        <a:alpha val="90000"/>
-      </a:schemeClr>
-      <a:schemeClr val="accent3">
-        <a:tint val="40000"/>
-        <a:alpha val="90000"/>
-      </a:schemeClr>
-      <a:schemeClr val="accent4">
-        <a:tint val="40000"/>
-        <a:alpha val="90000"/>
-      </a:schemeClr>
-      <a:schemeClr val="accent5">
-        <a:tint val="40000"/>
-        <a:alpha val="90000"/>
-      </a:schemeClr>
-      <a:schemeClr val="accent6">
-        <a:tint val="40000"/>
-        <a:alpha val="90000"/>
-      </a:schemeClr>
-    </dgm:linClrLst>
-    <dgm:effectClrLst/>
-    <dgm:txLinClrLst/>
-    <dgm:txFillClrLst meth="repeat">
-      <a:schemeClr val="dk1"/>
-    </dgm:txFillClrLst>
-    <dgm:txEffectClrLst/>
-  </dgm:styleLbl>
-  <dgm:styleLbl name="alignAccFollowNode1">
-    <dgm:fillClrLst meth="repeat">
-      <a:schemeClr val="accent2">
-        <a:tint val="40000"/>
-        <a:alpha val="90000"/>
-      </a:schemeClr>
-      <a:schemeClr val="accent3">
-        <a:tint val="40000"/>
-        <a:alpha val="90000"/>
-      </a:schemeClr>
-      <a:schemeClr val="accent4">
-        <a:tint val="40000"/>
-        <a:alpha val="90000"/>
-      </a:schemeClr>
-      <a:schemeClr val="accent5">
-        <a:tint val="40000"/>
-        <a:alpha val="90000"/>
-      </a:schemeClr>
-      <a:schemeClr val="accent6">
-        <a:tint val="40000"/>
-        <a:alpha val="90000"/>
-      </a:schemeClr>
-    </dgm:fillClrLst>
-    <dgm:linClrLst meth="repeat">
-      <a:schemeClr val="accent2">
-        <a:tint val="40000"/>
-        <a:alpha val="90000"/>
-      </a:schemeClr>
-      <a:schemeClr val="accent3">
-        <a:tint val="40000"/>
-        <a:alpha val="90000"/>
-      </a:schemeClr>
-      <a:schemeClr val="accent4">
-        <a:tint val="40000"/>
-        <a:alpha val="90000"/>
-      </a:schemeClr>
-      <a:schemeClr val="accent5">
-        <a:tint val="40000"/>
-        <a:alpha val="90000"/>
-      </a:schemeClr>
-      <a:schemeClr val="accent6">
-        <a:tint val="40000"/>
-        <a:alpha val="90000"/>
-      </a:schemeClr>
-    </dgm:linClrLst>
-    <dgm:effectClrLst/>
-    <dgm:txLinClrLst/>
-    <dgm:txFillClrLst meth="repeat">
-      <a:schemeClr val="dk1"/>
-    </dgm:txFillClrLst>
-    <dgm:txEffectClrLst/>
-  </dgm:styleLbl>
-  <dgm:styleLbl name="bgAccFollowNode1">
-    <dgm:fillClrLst meth="repeat">
-      <a:schemeClr val="accent2">
-        <a:tint val="40000"/>
-        <a:alpha val="90000"/>
-      </a:schemeClr>
-      <a:schemeClr val="accent3">
-        <a:tint val="40000"/>
-        <a:alpha val="90000"/>
-      </a:schemeClr>
-      <a:schemeClr val="accent4">
-        <a:tint val="40000"/>
-        <a:alpha val="90000"/>
-      </a:schemeClr>
-      <a:schemeClr val="accent5">
-        <a:tint val="40000"/>
-        <a:alpha val="90000"/>
-      </a:schemeClr>
-      <a:schemeClr val="accent6">
-        <a:tint val="40000"/>
-        <a:alpha val="90000"/>
-      </a:schemeClr>
-    </dgm:fillClrLst>
-    <dgm:linClrLst meth="repeat">
-      <a:schemeClr val="accent2">
-        <a:tint val="40000"/>
-        <a:alpha val="90000"/>
-      </a:schemeClr>
-      <a:schemeClr val="accent3">
-        <a:tint val="40000"/>
-        <a:alpha val="90000"/>
-      </a:schemeClr>
-      <a:schemeClr val="accent4">
-        <a:tint val="40000"/>
-        <a:alpha val="90000"/>
-      </a:schemeClr>
-      <a:schemeClr val="accent5">
-        <a:tint val="40000"/>
-        <a:alpha val="90000"/>
-      </a:schemeClr>
-      <a:schemeClr val="accent6">
-        <a:tint val="40000"/>
-        <a:alpha val="90000"/>
-      </a:schemeClr>
-    </dgm:linClrLst>
-    <dgm:effectClrLst/>
-    <dgm:txLinClrLst/>
-    <dgm:txFillClrLst meth="repeat">
-      <a:schemeClr val="dk1"/>
-    </dgm:txFillClrLst>
-    <dgm:txEffectClrLst/>
-  </dgm:styleLbl>
-  <dgm:styleLbl name="fgAcc0">
-    <dgm:fillClrLst meth="repeat">
-      <a:schemeClr val="lt1">
-        <a:alpha val="90000"/>
-      </a:schemeClr>
-    </dgm:fillClrLst>
-    <dgm:linClrLst>
-      <a:schemeClr val="accent1"/>
-    </dgm:linClrLst>
-    <dgm:effectClrLst/>
-    <dgm:txLinClrLst/>
-    <dgm:txFillClrLst meth="repeat">
-      <a:schemeClr val="dk1"/>
-    </dgm:txFillClrLst>
-    <dgm:txEffectClrLst/>
-  </dgm:styleLbl>
-  <dgm:styleLbl name="fgAcc2">
-    <dgm:fillClrLst meth="repeat">
-      <a:schemeClr val="lt1">
-        <a:alpha val="90000"/>
-      </a:schemeClr>
-    </dgm:fillClrLst>
-    <dgm:linClrLst>
-      <a:schemeClr val="accent2"/>
-    </dgm:linClrLst>
-    <dgm:effectClrLst/>
-    <dgm:txLinClrLst/>
-    <dgm:txFillClrLst meth="repeat">
-      <a:schemeClr val="dk1"/>
-    </dgm:txFillClrLst>
-    <dgm:txEffectClrLst/>
-  </dgm:styleLbl>
-  <dgm:styleLbl name="fgAcc3">
-    <dgm:fillClrLst meth="repeat">
-      <a:schemeClr val="lt1">
-        <a:alpha val="90000"/>
-      </a:schemeClr>
-    </dgm:fillClrLst>
-    <dgm:linClrLst>
-      <a:schemeClr val="accent3"/>
-    </dgm:linClrLst>
-    <dgm:effectClrLst/>
-    <dgm:txLinClrLst/>
-    <dgm:txFillClrLst meth="repeat">
-      <a:schemeClr val="dk1"/>
-    </dgm:txFillClrLst>
-    <dgm:txEffectClrLst/>
-  </dgm:styleLbl>
-  <dgm:styleLbl name="fgAcc4">
-    <dgm:fillClrLst meth="repeat">
-      <a:schemeClr val="lt1">
-        <a:alpha val="90000"/>
-      </a:schemeClr>
-    </dgm:fillClrLst>
-    <dgm:linClrLst>
-      <a:schemeClr val="accent4"/>
-    </dgm:linClrLst>
-    <dgm:effectClrLst/>
-    <dgm:txLinClrLst/>
-    <dgm:txFillClrLst meth="repeat">
-      <a:schemeClr val="dk1"/>
-    </dgm:txFillClrLst>
-    <dgm:txEffectClrLst/>
-  </dgm:styleLbl>
-  <dgm:styleLbl name="bgShp">
-    <dgm:fillClrLst meth="repeat">
-      <a:schemeClr val="accent2">
-        <a:tint val="40000"/>
-      </a:schemeClr>
-    </dgm:fillClrLst>
-    <dgm:linClrLst meth="repeat">
-      <a:schemeClr val="dk1"/>
-    </dgm:linClrLst>
-    <dgm:effectClrLst/>
-    <dgm:txLinClrLst/>
-    <dgm:txFillClrLst meth="repeat">
-      <a:schemeClr val="dk1"/>
-    </dgm:txFillClrLst>
-    <dgm:txEffectClrLst/>
-  </dgm:styleLbl>
-  <dgm:styleLbl name="dkBgShp">
-    <dgm:fillClrLst meth="repeat">
-      <a:schemeClr val="accent2">
-        <a:shade val="90000"/>
-      </a:schemeClr>
-    </dgm:fillClrLst>
-    <dgm:linClrLst meth="repeat">
-      <a:schemeClr val="dk1"/>
-    </dgm:linClrLst>
-    <dgm:effectClrLst/>
-    <dgm:txLinClrLst/>
-    <dgm:txFillClrLst meth="repeat">
-      <a:schemeClr val="lt1"/>
-    </dgm:txFillClrLst>
-    <dgm:txEffectClrLst/>
-  </dgm:styleLbl>
-  <dgm:styleLbl name="trBgShp">
-    <dgm:fillClrLst meth="repeat">
-      <a:schemeClr val="accent1">
-        <a:tint val="50000"/>
-        <a:alpha val="40000"/>
-      </a:schemeClr>
-    </dgm:fillClrLst>
-    <dgm:linClrLst meth="repeat">
-      <a:schemeClr val="accent2"/>
-    </dgm:linClrLst>
-    <dgm:effectClrLst/>
-    <dgm:txLinClrLst/>
-    <dgm:txFillClrLst meth="repeat">
-      <a:schemeClr val="lt1"/>
-    </dgm:txFillClrLst>
-    <dgm:txEffectClrLst/>
-  </dgm:styleLbl>
-  <dgm:styleLbl name="fgShp">
-    <dgm:fillClrLst meth="repeat">
-      <a:schemeClr val="accent2">
-        <a:tint val="40000"/>
-      </a:schemeClr>
-    </dgm:fillClrLst>
-    <dgm:linClrLst meth="repeat">
-      <a:schemeClr val="lt1"/>
-    </dgm:linClrLst>
-    <dgm:effectClrLst/>
-    <dgm:txLinClrLst/>
-    <dgm:txFillClrLst meth="repeat">
-      <a:schemeClr val="dk1"/>
-    </dgm:txFillClrLst>
-    <dgm:txEffectClrLst/>
-  </dgm:styleLbl>
-  <dgm:styleLbl name="revTx">
-    <dgm:fillClrLst meth="repeat">
-      <a:schemeClr val="lt1">
-        <a:alpha val="0"/>
-      </a:schemeClr>
-    </dgm:fillClrLst>
-    <dgm:linClrLst meth="repeat">
-      <a:schemeClr val="dk1">
-        <a:alpha val="0"/>
-      </a:schemeClr>
-    </dgm:linClrLst>
-    <dgm:effectClrLst/>
-    <dgm:txLinClrLst/>
-    <dgm:txFillClrLst meth="repeat">
-      <a:schemeClr val="tx1"/>
-    </dgm:txFillClrLst>
-    <dgm:txEffectClrLst/>
-  </dgm:styleLbl>
-</dgm:colorsDef>
-</file>
-
 <file path=ppt/diagrams/colors2.xml><?xml version="1.0" encoding="utf-8"?>
 <dgm:colorsDef xmlns:dgm="http://schemas.openxmlformats.org/drawingml/2006/diagram" xmlns:a="http://schemas.openxmlformats.org/drawingml/2006/main" uniqueId="urn:microsoft.com/office/officeart/2005/8/colors/colorful1">
   <dgm:title val=""/>
@@ -11157,86 +9317,6 @@
 </file>
 
 <file path=ppt/diagrams/data10.xml><?xml version="1.0" encoding="utf-8"?>
-<dgm:dataModel xmlns:dgm="http://schemas.openxmlformats.org/drawingml/2006/diagram" xmlns:a="http://schemas.openxmlformats.org/drawingml/2006/main">
-  <dgm:ptLst>
-    <dgm:pt modelId="{3BEB04EA-2A1D-4233-8432-18F3302557BE}" type="doc">
-      <dgm:prSet loTypeId="urn:microsoft.com/office/officeart/2005/8/layout/default" loCatId="list" qsTypeId="urn:microsoft.com/office/officeart/2005/8/quickstyle/simple4" qsCatId="simple" csTypeId="urn:microsoft.com/office/officeart/2005/8/colors/colorful1" csCatId="colorful" phldr="1"/>
-      <dgm:spPr/>
-      <dgm:t>
-        <a:bodyPr/>
-        <a:lstStyle/>
-        <a:p>
-          <a:endParaRPr lang="fr-FR"/>
-        </a:p>
-      </dgm:t>
-    </dgm:pt>
-    <dgm:pt modelId="{42E72EA3-4EAC-4FB2-A2E4-06B32E132E59}" type="pres">
-      <dgm:prSet presAssocID="{3BEB04EA-2A1D-4233-8432-18F3302557BE}" presName="diagram" presStyleCnt="0">
-        <dgm:presLayoutVars>
-          <dgm:dir/>
-          <dgm:resizeHandles val="exact"/>
-        </dgm:presLayoutVars>
-      </dgm:prSet>
-      <dgm:spPr/>
-    </dgm:pt>
-  </dgm:ptLst>
-  <dgm:cxnLst>
-    <dgm:cxn modelId="{2A19BEBE-7E0E-4B50-A936-08F4C5C992A5}" type="presOf" srcId="{3BEB04EA-2A1D-4233-8432-18F3302557BE}" destId="{42E72EA3-4EAC-4FB2-A2E4-06B32E132E59}" srcOrd="0" destOrd="0" presId="urn:microsoft.com/office/officeart/2005/8/layout/default"/>
-  </dgm:cxnLst>
-  <dgm:bg/>
-  <dgm:whole/>
-  <dgm:extLst>
-    <a:ext uri="http://schemas.microsoft.com/office/drawing/2008/diagram">
-      <dsp:dataModelExt xmlns:dsp="http://schemas.microsoft.com/office/drawing/2008/diagram" relId="rId6" minVer="http://schemas.openxmlformats.org/drawingml/2006/diagram"/>
-    </a:ext>
-    <a:ext uri="{C62137D5-CB1D-491B-B009-E17868A290BF}">
-      <dgm14:recolorImg xmlns:dgm14="http://schemas.microsoft.com/office/drawing/2010/diagram" val="1"/>
-    </a:ext>
-  </dgm:extLst>
-</dgm:dataModel>
-</file>
-
-<file path=ppt/diagrams/data11.xml><?xml version="1.0" encoding="utf-8"?>
-<dgm:dataModel xmlns:dgm="http://schemas.openxmlformats.org/drawingml/2006/diagram" xmlns:a="http://schemas.openxmlformats.org/drawingml/2006/main">
-  <dgm:ptLst>
-    <dgm:pt modelId="{3BEB04EA-2A1D-4233-8432-18F3302557BE}" type="doc">
-      <dgm:prSet loTypeId="urn:microsoft.com/office/officeart/2005/8/layout/default" loCatId="list" qsTypeId="urn:microsoft.com/office/officeart/2005/8/quickstyle/simple4" qsCatId="simple" csTypeId="urn:microsoft.com/office/officeart/2005/8/colors/colorful1" csCatId="colorful" phldr="1"/>
-      <dgm:spPr/>
-      <dgm:t>
-        <a:bodyPr/>
-        <a:lstStyle/>
-        <a:p>
-          <a:endParaRPr lang="fr-FR"/>
-        </a:p>
-      </dgm:t>
-    </dgm:pt>
-    <dgm:pt modelId="{42E72EA3-4EAC-4FB2-A2E4-06B32E132E59}" type="pres">
-      <dgm:prSet presAssocID="{3BEB04EA-2A1D-4233-8432-18F3302557BE}" presName="diagram" presStyleCnt="0">
-        <dgm:presLayoutVars>
-          <dgm:dir/>
-          <dgm:resizeHandles val="exact"/>
-        </dgm:presLayoutVars>
-      </dgm:prSet>
-      <dgm:spPr/>
-    </dgm:pt>
-  </dgm:ptLst>
-  <dgm:cxnLst>
-    <dgm:cxn modelId="{2A19BEBE-7E0E-4B50-A936-08F4C5C992A5}" type="presOf" srcId="{3BEB04EA-2A1D-4233-8432-18F3302557BE}" destId="{42E72EA3-4EAC-4FB2-A2E4-06B32E132E59}" srcOrd="0" destOrd="0" presId="urn:microsoft.com/office/officeart/2005/8/layout/default"/>
-  </dgm:cxnLst>
-  <dgm:bg/>
-  <dgm:whole/>
-  <dgm:extLst>
-    <a:ext uri="http://schemas.microsoft.com/office/drawing/2008/diagram">
-      <dsp:dataModelExt xmlns:dsp="http://schemas.microsoft.com/office/drawing/2008/diagram" relId="rId6" minVer="http://schemas.openxmlformats.org/drawingml/2006/diagram"/>
-    </a:ext>
-    <a:ext uri="{C62137D5-CB1D-491B-B009-E17868A290BF}">
-      <dgm14:recolorImg xmlns:dgm14="http://schemas.microsoft.com/office/drawing/2010/diagram" val="1"/>
-    </a:ext>
-  </dgm:extLst>
-</dgm:dataModel>
-</file>
-
-<file path=ppt/diagrams/data12.xml><?xml version="1.0" encoding="utf-8"?>
 <dgm:dataModel xmlns:dgm="http://schemas.openxmlformats.org/drawingml/2006/diagram" xmlns:a="http://schemas.openxmlformats.org/drawingml/2006/main">
   <dgm:ptLst>
     <dgm:pt modelId="{A04E26BD-327B-4D1C-89CF-E099AF905FFE}" type="doc">
@@ -12134,7 +10214,7 @@
         <a:lstStyle/>
         <a:p>
           <a:r>
-            <a:rPr lang="en-US">
+            <a:rPr lang="en-US" dirty="0">
               <a:solidFill>
                 <a:srgbClr val="1E293B"/>
               </a:solidFill>
@@ -12142,7 +10222,40 @@
               <a:ea typeface="Calibri" pitchFamily="34" charset="-122"/>
               <a:cs typeface="Calibri" pitchFamily="34" charset="-120"/>
             </a:rPr>
-            <a:t>Index créés correctement</a:t>
+            <a:t>Index </a:t>
+          </a:r>
+          <a:r>
+            <a:rPr lang="en-US" dirty="0" err="1">
+              <a:solidFill>
+                <a:srgbClr val="1E293B"/>
+              </a:solidFill>
+              <a:latin typeface="Calibri" pitchFamily="34" charset="0"/>
+              <a:ea typeface="Calibri" pitchFamily="34" charset="-122"/>
+              <a:cs typeface="Calibri" pitchFamily="34" charset="-120"/>
+            </a:rPr>
+            <a:t>créés</a:t>
+          </a:r>
+          <a:r>
+            <a:rPr lang="en-US" dirty="0">
+              <a:solidFill>
+                <a:srgbClr val="1E293B"/>
+              </a:solidFill>
+              <a:latin typeface="Calibri" pitchFamily="34" charset="0"/>
+              <a:ea typeface="Calibri" pitchFamily="34" charset="-122"/>
+              <a:cs typeface="Calibri" pitchFamily="34" charset="-120"/>
+            </a:rPr>
+            <a:t> </a:t>
+          </a:r>
+          <a:r>
+            <a:rPr lang="en-US" dirty="0" err="1">
+              <a:solidFill>
+                <a:srgbClr val="1E293B"/>
+              </a:solidFill>
+              <a:latin typeface="Calibri" pitchFamily="34" charset="0"/>
+              <a:ea typeface="Calibri" pitchFamily="34" charset="-122"/>
+              <a:cs typeface="Calibri" pitchFamily="34" charset="-120"/>
+            </a:rPr>
+            <a:t>correctement</a:t>
           </a:r>
           <a:endParaRPr lang="fr-FR" dirty="0">
             <a:solidFill>
@@ -13074,7 +11187,15 @@
     </dgm:pt>
     <dgm:pt modelId="{1E0B526D-29FA-423C-B5D3-8FC27BC52216}" type="pres">
       <dgm:prSet presAssocID="{9F219B54-5064-4F17-A528-68414DD5FDEB}" presName="adorn" presStyleLbl="fgAccFollowNode1" presStyleIdx="0" presStyleCnt="4"/>
-      <dgm:spPr/>
+      <dgm:spPr>
+        <a:blipFill rotWithShape="1">
+          <a:blip xmlns:r="http://schemas.openxmlformats.org/officeDocument/2006/relationships" r:embed="rId1"/>
+          <a:srcRect/>
+          <a:stretch>
+            <a:fillRect l="-1000" r="-1000"/>
+          </a:stretch>
+        </a:blipFill>
+      </dgm:spPr>
     </dgm:pt>
     <dgm:pt modelId="{80548B2C-4C06-4B91-ADEA-C24A0068D4B1}" type="pres">
       <dgm:prSet presAssocID="{12ABFCAE-649B-4BED-956D-45074AB7AB9D}" presName="sibTrans" presStyleLbl="sibTrans2D1" presStyleIdx="0" presStyleCnt="0"/>
@@ -13107,7 +11228,15 @@
     </dgm:pt>
     <dgm:pt modelId="{539087A1-2D23-40E5-B9E2-FCBE84DED87A}" type="pres">
       <dgm:prSet presAssocID="{F4603282-136D-40E1-89E5-CA2EE6D50178}" presName="adorn" presStyleLbl="fgAccFollowNode1" presStyleIdx="1" presStyleCnt="4"/>
-      <dgm:spPr/>
+      <dgm:spPr>
+        <a:blipFill rotWithShape="1">
+          <a:blip xmlns:r="http://schemas.openxmlformats.org/officeDocument/2006/relationships" r:embed="rId2"/>
+          <a:srcRect/>
+          <a:stretch>
+            <a:fillRect t="-1000" b="-1000"/>
+          </a:stretch>
+        </a:blipFill>
+      </dgm:spPr>
     </dgm:pt>
     <dgm:pt modelId="{ABE9B633-DA0F-42D5-AD1B-DE0C94CBF4C9}" type="pres">
       <dgm:prSet presAssocID="{D083E516-79A9-42AE-913B-AE1074AC0BB3}" presName="sibTrans" presStyleLbl="sibTrans2D1" presStyleIdx="0" presStyleCnt="0"/>
@@ -13140,7 +11269,15 @@
     </dgm:pt>
     <dgm:pt modelId="{CC146F42-D9EA-4724-8768-37E4B23BAC69}" type="pres">
       <dgm:prSet presAssocID="{0A7E40FF-FE21-430A-B249-9422D975E0C8}" presName="adorn" presStyleLbl="fgAccFollowNode1" presStyleIdx="2" presStyleCnt="4"/>
-      <dgm:spPr/>
+      <dgm:spPr>
+        <a:blipFill rotWithShape="1">
+          <a:blip xmlns:r="http://schemas.openxmlformats.org/officeDocument/2006/relationships" r:embed="rId2"/>
+          <a:srcRect/>
+          <a:stretch>
+            <a:fillRect t="-1000" b="-1000"/>
+          </a:stretch>
+        </a:blipFill>
+      </dgm:spPr>
     </dgm:pt>
     <dgm:pt modelId="{43E09F17-89CF-4DCD-9FA8-EF96F6F5CC8A}" type="pres">
       <dgm:prSet presAssocID="{5581A62D-10DC-42E8-AECC-552E41EA41ED}" presName="sibTrans" presStyleLbl="sibTrans2D1" presStyleIdx="0" presStyleCnt="0"/>
@@ -13173,7 +11310,15 @@
     </dgm:pt>
     <dgm:pt modelId="{70224A6A-6363-4459-A2BA-C28BAAEEE118}" type="pres">
       <dgm:prSet presAssocID="{4FF16969-F6EF-4CEF-B080-C7C98C57FD96}" presName="adorn" presStyleLbl="fgAccFollowNode1" presStyleIdx="3" presStyleCnt="4"/>
-      <dgm:spPr/>
+      <dgm:spPr>
+        <a:blipFill rotWithShape="1">
+          <a:blip xmlns:r="http://schemas.openxmlformats.org/officeDocument/2006/relationships" r:embed="rId2"/>
+          <a:srcRect/>
+          <a:stretch>
+            <a:fillRect t="-1000" b="-1000"/>
+          </a:stretch>
+        </a:blipFill>
+      </dgm:spPr>
     </dgm:pt>
   </dgm:ptLst>
   <dgm:cxnLst>
@@ -13418,15 +11563,7 @@
           <a:pPr algn="l"/>
           <a:r>
             <a:rPr lang="fr-FR" dirty="0"/>
-            <a:t>Automatiser la migration des données CSV vers MongoDB avec nettoyage, validation, création d'index </a:t>
-          </a:r>
-          <a:r>
-            <a:rPr lang="fr-FR"/>
-            <a:t>et export, le </a:t>
-          </a:r>
-          <a:r>
-            <a:rPr lang="fr-FR" dirty="0"/>
-            <a:t>tout dans un environnement Docker reproductible.</a:t>
+            <a:t>Automatiser la migration des données CSV vers MongoDB avec nettoyage, validation, création d'index et export, le tout dans un environnement Docker reproductible.</a:t>
           </a:r>
         </a:p>
       </dgm:t>
@@ -17593,8 +15730,8 @@
 <file path=ppt/diagrams/data9.xml><?xml version="1.0" encoding="utf-8"?>
 <dgm:dataModel xmlns:dgm="http://schemas.openxmlformats.org/drawingml/2006/diagram" xmlns:a="http://schemas.openxmlformats.org/drawingml/2006/main">
   <dgm:ptLst>
-    <dgm:pt modelId="{030A18F8-BDDB-470D-9FDB-1B4C731446D6}" type="doc">
-      <dgm:prSet loTypeId="urn:microsoft.com/office/officeart/2005/8/layout/hList1" loCatId="list" qsTypeId="urn:microsoft.com/office/officeart/2005/8/quickstyle/simple5" qsCatId="simple" csTypeId="urn:microsoft.com/office/officeart/2005/8/colors/colorful1" csCatId="colorful" phldr="1"/>
+    <dgm:pt modelId="{3BEB04EA-2A1D-4233-8432-18F3302557BE}" type="doc">
+      <dgm:prSet loTypeId="urn:microsoft.com/office/officeart/2005/8/layout/default" loCatId="list" qsTypeId="urn:microsoft.com/office/officeart/2005/8/quickstyle/simple4" qsCatId="simple" csTypeId="urn:microsoft.com/office/officeart/2005/8/colors/colorful1" csCatId="colorful" phldr="1"/>
       <dgm:spPr/>
       <dgm:t>
         <a:bodyPr/>
@@ -17604,849 +15741,27 @@
         </a:p>
       </dgm:t>
     </dgm:pt>
-    <dgm:pt modelId="{201B2AAF-6042-4894-9CC9-2E735F479543}">
-      <dgm:prSet phldrT="[Texte]" phldr="0" custT="1"/>
-      <dgm:spPr/>
-      <dgm:t>
-        <a:bodyPr/>
-        <a:lstStyle/>
-        <a:p>
-          <a:r>
-            <a:rPr lang="fr-FR" sz="2800" b="1"/>
-            <a:t>CREATE</a:t>
-          </a:r>
-          <a:endParaRPr lang="fr-FR" sz="2800" b="1" dirty="0"/>
-        </a:p>
-      </dgm:t>
-    </dgm:pt>
-    <dgm:pt modelId="{1B640122-5F06-479F-BCB1-E92A2599104F}" type="parTrans" cxnId="{27082A9B-0885-4A34-B920-3E5CD4C2253C}">
-      <dgm:prSet/>
-      <dgm:spPr/>
-      <dgm:t>
-        <a:bodyPr/>
-        <a:lstStyle/>
-        <a:p>
-          <a:endParaRPr lang="fr-FR" sz="1600"/>
-        </a:p>
-      </dgm:t>
-    </dgm:pt>
-    <dgm:pt modelId="{B56E812C-8F3B-4F04-96E9-7089420D69CF}" type="sibTrans" cxnId="{27082A9B-0885-4A34-B920-3E5CD4C2253C}">
-      <dgm:prSet/>
-      <dgm:spPr/>
-      <dgm:t>
-        <a:bodyPr/>
-        <a:lstStyle/>
-        <a:p>
-          <a:endParaRPr lang="fr-FR" sz="1600"/>
-        </a:p>
-      </dgm:t>
-    </dgm:pt>
-    <dgm:pt modelId="{A499BD18-B222-4259-9DE7-B44FD861202F}">
-      <dgm:prSet phldrT="[Texte]" custT="1"/>
-      <dgm:spPr/>
-      <dgm:t>
-        <a:bodyPr/>
-        <a:lstStyle/>
-        <a:p>
-          <a:pPr algn="ctr">
-            <a:buNone/>
-          </a:pPr>
-          <a:r>
-            <a:rPr lang="fr-FR" sz="1800" b="1" dirty="0" err="1"/>
-            <a:t>create_one_document</a:t>
-          </a:r>
-          <a:r>
-            <a:rPr lang="fr-FR" sz="1800" b="1" dirty="0"/>
-            <a:t>()
-</a:t>
-          </a:r>
-          <a:r>
-            <a:rPr lang="fr-FR" sz="1800" b="1" dirty="0" err="1"/>
-            <a:t>create_documents</a:t>
-          </a:r>
-          <a:r>
-            <a:rPr lang="fr-FR" sz="1800" b="1" dirty="0"/>
-            <a:t>()</a:t>
-          </a:r>
-        </a:p>
-      </dgm:t>
-    </dgm:pt>
-    <dgm:pt modelId="{F55664BA-7D82-456D-B1F9-786CE02F2231}" type="parTrans" cxnId="{98120BD3-53E0-48C8-ACAB-5B8374226F1E}">
-      <dgm:prSet/>
-      <dgm:spPr/>
-      <dgm:t>
-        <a:bodyPr/>
-        <a:lstStyle/>
-        <a:p>
-          <a:endParaRPr lang="fr-FR" sz="1600"/>
-        </a:p>
-      </dgm:t>
-    </dgm:pt>
-    <dgm:pt modelId="{0FA2E3C5-16A9-4765-A693-D539E190C038}" type="sibTrans" cxnId="{98120BD3-53E0-48C8-ACAB-5B8374226F1E}">
-      <dgm:prSet/>
-      <dgm:spPr/>
-      <dgm:t>
-        <a:bodyPr/>
-        <a:lstStyle/>
-        <a:p>
-          <a:endParaRPr lang="fr-FR" sz="1600"/>
-        </a:p>
-      </dgm:t>
-    </dgm:pt>
-    <dgm:pt modelId="{FD24F202-4695-42DF-A441-FB2108DB7DEE}">
-      <dgm:prSet phldrT="[Texte]" phldr="0" custT="1"/>
-      <dgm:spPr/>
-      <dgm:t>
-        <a:bodyPr/>
-        <a:lstStyle/>
-        <a:p>
-          <a:r>
-            <a:rPr lang="fr-FR" sz="2800" b="1"/>
-            <a:t>READ</a:t>
-          </a:r>
-          <a:endParaRPr lang="fr-FR" sz="2800" b="1" dirty="0"/>
-        </a:p>
-      </dgm:t>
-    </dgm:pt>
-    <dgm:pt modelId="{325A19AB-074B-4446-BDF0-6491DB2AC349}" type="parTrans" cxnId="{706F5B59-A260-4981-B9FD-AB314EEF605B}">
-      <dgm:prSet/>
-      <dgm:spPr/>
-      <dgm:t>
-        <a:bodyPr/>
-        <a:lstStyle/>
-        <a:p>
-          <a:endParaRPr lang="fr-FR" sz="1600"/>
-        </a:p>
-      </dgm:t>
-    </dgm:pt>
-    <dgm:pt modelId="{7B4E381F-6A7C-4A2F-A787-FD28678EE7E7}" type="sibTrans" cxnId="{706F5B59-A260-4981-B9FD-AB314EEF605B}">
-      <dgm:prSet/>
-      <dgm:spPr/>
-      <dgm:t>
-        <a:bodyPr/>
-        <a:lstStyle/>
-        <a:p>
-          <a:endParaRPr lang="fr-FR" sz="1600"/>
-        </a:p>
-      </dgm:t>
-    </dgm:pt>
-    <dgm:pt modelId="{6C397841-ECB5-42F5-8608-B89728C6A873}">
-      <dgm:prSet phldrT="[Texte]" phldr="0" custT="1"/>
-      <dgm:spPr/>
-      <dgm:t>
-        <a:bodyPr/>
-        <a:lstStyle/>
-        <a:p>
-          <a:pPr algn="ctr">
-            <a:buNone/>
-          </a:pPr>
-          <a:r>
-            <a:rPr lang="fr-FR" sz="1800" b="1" kern="1200" dirty="0" err="1">
-              <a:latin typeface="+mn-lt"/>
-              <a:ea typeface="Calibri" pitchFamily="34" charset="-122"/>
-              <a:cs typeface="Calibri" pitchFamily="34" charset="-120"/>
-            </a:rPr>
-            <a:t>read_one_document</a:t>
-          </a:r>
-          <a:r>
-            <a:rPr lang="fr-FR" sz="1800" b="1" kern="1200" dirty="0">
-              <a:latin typeface="+mn-lt"/>
-              <a:ea typeface="Calibri" pitchFamily="34" charset="-122"/>
-              <a:cs typeface="Calibri" pitchFamily="34" charset="-120"/>
-            </a:rPr>
-            <a:t>()
-</a:t>
-          </a:r>
-          <a:r>
-            <a:rPr lang="fr-FR" sz="1800" b="1" kern="1200" dirty="0" err="1">
-              <a:latin typeface="+mn-lt"/>
-              <a:ea typeface="Calibri" pitchFamily="34" charset="-122"/>
-              <a:cs typeface="Calibri" pitchFamily="34" charset="-120"/>
-            </a:rPr>
-            <a:t>read_documents</a:t>
-          </a:r>
-          <a:r>
-            <a:rPr lang="fr-FR" sz="1800" b="1" kern="1200" dirty="0">
-              <a:latin typeface="+mn-lt"/>
-              <a:ea typeface="Calibri" pitchFamily="34" charset="-122"/>
-              <a:cs typeface="Calibri" pitchFamily="34" charset="-120"/>
-            </a:rPr>
-            <a:t>()</a:t>
-          </a:r>
-          <a:endParaRPr lang="fr-FR" sz="1800" kern="1200" dirty="0">
-            <a:latin typeface="+mn-lt"/>
-          </a:endParaRPr>
-        </a:p>
-      </dgm:t>
-    </dgm:pt>
-    <dgm:pt modelId="{84469614-6233-482E-8266-744713893455}" type="parTrans" cxnId="{6F25A23C-AB32-4E64-ABBF-C2D881A1387F}">
-      <dgm:prSet/>
-      <dgm:spPr/>
-      <dgm:t>
-        <a:bodyPr/>
-        <a:lstStyle/>
-        <a:p>
-          <a:endParaRPr lang="fr-FR" sz="1600"/>
-        </a:p>
-      </dgm:t>
-    </dgm:pt>
-    <dgm:pt modelId="{0199EE3C-246C-4DED-98D4-90B907A527E2}" type="sibTrans" cxnId="{6F25A23C-AB32-4E64-ABBF-C2D881A1387F}">
-      <dgm:prSet/>
-      <dgm:spPr/>
-      <dgm:t>
-        <a:bodyPr/>
-        <a:lstStyle/>
-        <a:p>
-          <a:endParaRPr lang="fr-FR" sz="1600"/>
-        </a:p>
-      </dgm:t>
-    </dgm:pt>
-    <dgm:pt modelId="{2C81F785-B686-4A3D-B326-2DF8F3906836}">
-      <dgm:prSet phldrT="[Texte]" phldr="0" custT="1"/>
-      <dgm:spPr/>
-      <dgm:t>
-        <a:bodyPr/>
-        <a:lstStyle/>
-        <a:p>
-          <a:r>
-            <a:rPr lang="fr-FR" sz="2800" b="1"/>
-            <a:t>UPDATE</a:t>
-          </a:r>
-          <a:endParaRPr lang="fr-FR" sz="2800" b="1" dirty="0"/>
-        </a:p>
-      </dgm:t>
-    </dgm:pt>
-    <dgm:pt modelId="{0E719C52-C631-4916-8DDE-257898C6D5F5}" type="parTrans" cxnId="{F69842AC-C3BE-4075-9BDA-B95245A34B32}">
-      <dgm:prSet/>
-      <dgm:spPr/>
-      <dgm:t>
-        <a:bodyPr/>
-        <a:lstStyle/>
-        <a:p>
-          <a:endParaRPr lang="fr-FR" sz="1600"/>
-        </a:p>
-      </dgm:t>
-    </dgm:pt>
-    <dgm:pt modelId="{AC83E7BB-71A2-4CED-9D11-DA674D25ABE8}" type="sibTrans" cxnId="{F69842AC-C3BE-4075-9BDA-B95245A34B32}">
-      <dgm:prSet/>
-      <dgm:spPr/>
-      <dgm:t>
-        <a:bodyPr/>
-        <a:lstStyle/>
-        <a:p>
-          <a:endParaRPr lang="fr-FR" sz="1600"/>
-        </a:p>
-      </dgm:t>
-    </dgm:pt>
-    <dgm:pt modelId="{7FAEC95F-4669-44F7-9474-179A2A08238F}">
-      <dgm:prSet phldrT="[Texte]" phldr="0" custT="1"/>
-      <dgm:spPr/>
-      <dgm:t>
-        <a:bodyPr/>
-        <a:lstStyle/>
-        <a:p>
-          <a:pPr algn="ctr">
-            <a:buNone/>
-          </a:pPr>
-          <a:r>
-            <a:rPr lang="fr-FR" sz="1800" b="1" kern="1200" dirty="0" err="1">
-              <a:latin typeface="Franklin Gothic Book" panose="020B0502020104020203"/>
-              <a:ea typeface="+mn-ea"/>
-              <a:cs typeface="+mn-cs"/>
-            </a:rPr>
-            <a:t>update_one_document</a:t>
-          </a:r>
-          <a:r>
-            <a:rPr lang="fr-FR" sz="1800" b="1" kern="1200" dirty="0">
-              <a:latin typeface="Franklin Gothic Book" panose="020B0502020104020203"/>
-              <a:ea typeface="+mn-ea"/>
-              <a:cs typeface="+mn-cs"/>
-            </a:rPr>
-            <a:t>()
-</a:t>
-          </a:r>
-          <a:r>
-            <a:rPr lang="fr-FR" sz="1800" b="1" kern="1200" dirty="0" err="1">
-              <a:latin typeface="Franklin Gothic Book" panose="020B0502020104020203"/>
-              <a:ea typeface="+mn-ea"/>
-              <a:cs typeface="+mn-cs"/>
-            </a:rPr>
-            <a:t>update_documents</a:t>
-          </a:r>
-          <a:r>
-            <a:rPr lang="fr-FR" sz="1800" b="1" kern="1200" dirty="0">
-              <a:latin typeface="Franklin Gothic Book" panose="020B0502020104020203"/>
-              <a:ea typeface="+mn-ea"/>
-              <a:cs typeface="+mn-cs"/>
-            </a:rPr>
-            <a:t>()
-Mise à jour d'un ou plusieurs documents</a:t>
-          </a:r>
-        </a:p>
-      </dgm:t>
-    </dgm:pt>
-    <dgm:pt modelId="{F628E81E-C8D4-4CB7-AA18-1826453D6E72}" type="parTrans" cxnId="{2555C846-2903-452E-BB12-A6A1B56341D8}">
-      <dgm:prSet/>
-      <dgm:spPr/>
-      <dgm:t>
-        <a:bodyPr/>
-        <a:lstStyle/>
-        <a:p>
-          <a:endParaRPr lang="fr-FR" sz="1600"/>
-        </a:p>
-      </dgm:t>
-    </dgm:pt>
-    <dgm:pt modelId="{B9E7467F-F7FB-44DE-8788-E43020C34A49}" type="sibTrans" cxnId="{2555C846-2903-452E-BB12-A6A1B56341D8}">
-      <dgm:prSet/>
-      <dgm:spPr/>
-      <dgm:t>
-        <a:bodyPr/>
-        <a:lstStyle/>
-        <a:p>
-          <a:endParaRPr lang="fr-FR" sz="1600"/>
-        </a:p>
-      </dgm:t>
-    </dgm:pt>
-    <dgm:pt modelId="{EE7F0B7F-7A87-45E4-8537-52B0BB6DA49F}">
-      <dgm:prSet custT="1"/>
-      <dgm:spPr/>
-      <dgm:t>
-        <a:bodyPr/>
-        <a:lstStyle/>
-        <a:p>
-          <a:pPr algn="l"/>
-          <a:endParaRPr lang="fr-FR" sz="1800" b="1" dirty="0"/>
-        </a:p>
-      </dgm:t>
-    </dgm:pt>
-    <dgm:pt modelId="{608B28AA-9934-491D-8160-5F069516BAD1}" type="parTrans" cxnId="{C8C5AABC-C02C-4AE9-B4DE-B20089C36BEF}">
-      <dgm:prSet/>
-      <dgm:spPr/>
-      <dgm:t>
-        <a:bodyPr/>
-        <a:lstStyle/>
-        <a:p>
-          <a:endParaRPr lang="fr-FR"/>
-        </a:p>
-      </dgm:t>
-    </dgm:pt>
-    <dgm:pt modelId="{708832CA-4EDC-4953-B0C3-84D71FD248B4}" type="sibTrans" cxnId="{C8C5AABC-C02C-4AE9-B4DE-B20089C36BEF}">
-      <dgm:prSet/>
-      <dgm:spPr/>
-      <dgm:t>
-        <a:bodyPr/>
-        <a:lstStyle/>
-        <a:p>
-          <a:endParaRPr lang="fr-FR"/>
-        </a:p>
-      </dgm:t>
-    </dgm:pt>
-    <dgm:pt modelId="{71FEE962-0B4A-4149-9CCB-90C9A4EBE65D}">
-      <dgm:prSet phldrT="[Texte]" custT="1"/>
-      <dgm:spPr/>
-      <dgm:t>
-        <a:bodyPr/>
-        <a:lstStyle/>
-        <a:p>
-          <a:pPr algn="ctr"/>
-          <a:endParaRPr lang="fr-FR" sz="1800" b="1" dirty="0"/>
-        </a:p>
-      </dgm:t>
-    </dgm:pt>
-    <dgm:pt modelId="{70D71C3C-16B6-4E35-BACB-C94A9925DC98}" type="parTrans" cxnId="{074995D2-F29C-4DC0-8C50-5EE7BCBA8D90}">
-      <dgm:prSet/>
-      <dgm:spPr/>
-      <dgm:t>
-        <a:bodyPr/>
-        <a:lstStyle/>
-        <a:p>
-          <a:endParaRPr lang="fr-FR"/>
-        </a:p>
-      </dgm:t>
-    </dgm:pt>
-    <dgm:pt modelId="{3DA817F2-24C3-4606-B9B2-D1619EBE405E}" type="sibTrans" cxnId="{074995D2-F29C-4DC0-8C50-5EE7BCBA8D90}">
-      <dgm:prSet/>
-      <dgm:spPr/>
-      <dgm:t>
-        <a:bodyPr/>
-        <a:lstStyle/>
-        <a:p>
-          <a:endParaRPr lang="fr-FR"/>
-        </a:p>
-      </dgm:t>
-    </dgm:pt>
-    <dgm:pt modelId="{B26C5A88-6585-4F5B-BD53-4EBF4CB1868A}">
-      <dgm:prSet phldrT="[Texte]" custT="1"/>
-      <dgm:spPr/>
-      <dgm:t>
-        <a:bodyPr/>
-        <a:lstStyle/>
-        <a:p>
-          <a:pPr algn="ctr">
-            <a:buFontTx/>
-            <a:buNone/>
-          </a:pPr>
-          <a:r>
-            <a:rPr lang="fr-FR" sz="1800" b="1" dirty="0"/>
-            <a:t>Insertion d'un ou plusieurs documents dans la collection</a:t>
-          </a:r>
-        </a:p>
-      </dgm:t>
-    </dgm:pt>
-    <dgm:pt modelId="{5F2B1101-F5C3-4107-9CA2-351AFE31BA49}" type="parTrans" cxnId="{ABF7D74E-7146-4E2C-B806-B3E60A601703}">
-      <dgm:prSet/>
-      <dgm:spPr/>
-      <dgm:t>
-        <a:bodyPr/>
-        <a:lstStyle/>
-        <a:p>
-          <a:endParaRPr lang="fr-FR"/>
-        </a:p>
-      </dgm:t>
-    </dgm:pt>
-    <dgm:pt modelId="{59C9252F-81D5-4DEF-A3A5-2308669642A8}" type="sibTrans" cxnId="{ABF7D74E-7146-4E2C-B806-B3E60A601703}">
-      <dgm:prSet/>
-      <dgm:spPr/>
-      <dgm:t>
-        <a:bodyPr/>
-        <a:lstStyle/>
-        <a:p>
-          <a:endParaRPr lang="fr-FR"/>
-        </a:p>
-      </dgm:t>
-    </dgm:pt>
-    <dgm:pt modelId="{7F0865F7-7DFF-45B8-85EF-EA7017CBF30D}">
-      <dgm:prSet custT="1"/>
-      <dgm:spPr/>
-      <dgm:t>
-        <a:bodyPr/>
-        <a:lstStyle/>
-        <a:p>
-          <a:pPr algn="l"/>
-          <a:endParaRPr lang="fr-FR" sz="1800" b="1" kern="1200" dirty="0">
-            <a:latin typeface="+mn-lt"/>
-            <a:ea typeface="Calibri" pitchFamily="34" charset="-122"/>
-            <a:cs typeface="Calibri" pitchFamily="34" charset="-120"/>
-          </a:endParaRPr>
-        </a:p>
-      </dgm:t>
-    </dgm:pt>
-    <dgm:pt modelId="{AC90364E-0AA3-4458-894A-AC9BE6E9782E}" type="parTrans" cxnId="{757AFEBA-26E9-447F-A40E-CE6D2F74A9C3}">
-      <dgm:prSet/>
-      <dgm:spPr/>
-      <dgm:t>
-        <a:bodyPr/>
-        <a:lstStyle/>
-        <a:p>
-          <a:endParaRPr lang="fr-FR"/>
-        </a:p>
-      </dgm:t>
-    </dgm:pt>
-    <dgm:pt modelId="{219942B0-303B-4269-8E1A-97507207A9E6}" type="sibTrans" cxnId="{757AFEBA-26E9-447F-A40E-CE6D2F74A9C3}">
-      <dgm:prSet/>
-      <dgm:spPr/>
-      <dgm:t>
-        <a:bodyPr/>
-        <a:lstStyle/>
-        <a:p>
-          <a:endParaRPr lang="fr-FR"/>
-        </a:p>
-      </dgm:t>
-    </dgm:pt>
-    <dgm:pt modelId="{6A595594-28C0-4597-968C-3A7B7F2EBA42}">
-      <dgm:prSet phldrT="[Texte]" phldr="0" custT="1"/>
-      <dgm:spPr/>
-      <dgm:t>
-        <a:bodyPr/>
-        <a:lstStyle/>
-        <a:p>
-          <a:pPr algn="ctr">
-            <a:buNone/>
-          </a:pPr>
-          <a:r>
-            <a:rPr lang="fr-FR" sz="1800" b="1" kern="1200" dirty="0">
-              <a:latin typeface="+mn-lt"/>
-              <a:ea typeface="Calibri" pitchFamily="34" charset="-122"/>
-              <a:cs typeface="Calibri" pitchFamily="34" charset="-120"/>
-            </a:rPr>
-            <a:t>
-Lecture avec filtres, champs et limite</a:t>
-          </a:r>
-          <a:endParaRPr lang="fr-FR" sz="1800" kern="1200" dirty="0">
-            <a:latin typeface="+mn-lt"/>
-          </a:endParaRPr>
-        </a:p>
-      </dgm:t>
-    </dgm:pt>
-    <dgm:pt modelId="{98198DCD-34E3-4846-BEA9-88A0776F1E52}" type="parTrans" cxnId="{43DB220D-6B13-4AE4-B084-CB9E0D8E9E25}">
-      <dgm:prSet/>
-      <dgm:spPr/>
-      <dgm:t>
-        <a:bodyPr/>
-        <a:lstStyle/>
-        <a:p>
-          <a:endParaRPr lang="fr-FR"/>
-        </a:p>
-      </dgm:t>
-    </dgm:pt>
-    <dgm:pt modelId="{8807AA5B-14F8-433A-A0A4-800C851CCD2E}" type="sibTrans" cxnId="{43DB220D-6B13-4AE4-B084-CB9E0D8E9E25}">
-      <dgm:prSet/>
-      <dgm:spPr/>
-      <dgm:t>
-        <a:bodyPr/>
-        <a:lstStyle/>
-        <a:p>
-          <a:endParaRPr lang="fr-FR"/>
-        </a:p>
-      </dgm:t>
-    </dgm:pt>
-    <dgm:pt modelId="{4FB1D284-AB7C-4E55-9E87-CB62EC056768}">
-      <dgm:prSet phldrT="[Texte]" phldr="0" custT="1"/>
-      <dgm:spPr/>
-      <dgm:t>
-        <a:bodyPr/>
-        <a:lstStyle/>
-        <a:p>
-          <a:pPr>
-            <a:buFontTx/>
-            <a:buNone/>
-          </a:pPr>
-          <a:r>
-            <a:rPr lang="fr-FR" sz="2800" b="1" kern="1200">
-              <a:latin typeface="Franklin Gothic Book" panose="020B0502020104020203"/>
-              <a:ea typeface="+mn-ea"/>
-              <a:cs typeface="+mn-cs"/>
-            </a:rPr>
-            <a:t>DELETE</a:t>
-          </a:r>
-          <a:endParaRPr lang="fr-FR" sz="2800" b="1" kern="1200" dirty="0">
-            <a:latin typeface="Franklin Gothic Book" panose="020B0502020104020203"/>
-            <a:ea typeface="+mn-ea"/>
-            <a:cs typeface="+mn-cs"/>
-          </a:endParaRPr>
-        </a:p>
-      </dgm:t>
-    </dgm:pt>
-    <dgm:pt modelId="{99AF6DFC-AF4C-4BAC-AB97-BA24B4DA41E6}" type="parTrans" cxnId="{D60FEA3E-CBF5-40C3-8C74-79AE285A62DC}">
-      <dgm:prSet/>
-      <dgm:spPr/>
-      <dgm:t>
-        <a:bodyPr/>
-        <a:lstStyle/>
-        <a:p>
-          <a:endParaRPr lang="fr-FR"/>
-        </a:p>
-      </dgm:t>
-    </dgm:pt>
-    <dgm:pt modelId="{386F09DC-F23B-4BC0-8F13-4C66891BB916}" type="sibTrans" cxnId="{D60FEA3E-CBF5-40C3-8C74-79AE285A62DC}">
-      <dgm:prSet/>
-      <dgm:spPr/>
-      <dgm:t>
-        <a:bodyPr/>
-        <a:lstStyle/>
-        <a:p>
-          <a:endParaRPr lang="fr-FR"/>
-        </a:p>
-      </dgm:t>
-    </dgm:pt>
-    <dgm:pt modelId="{9A6985D6-DE54-4364-B92E-062137C0BC16}">
-      <dgm:prSet custT="1"/>
-      <dgm:spPr/>
-      <dgm:t>
-        <a:bodyPr/>
-        <a:lstStyle/>
-        <a:p>
-          <a:pPr algn="l"/>
-          <a:endParaRPr lang="fr-FR" sz="1800" b="1" kern="1200" dirty="0">
-            <a:latin typeface="Franklin Gothic Book" panose="020B0502020104020203"/>
-            <a:ea typeface="+mn-ea"/>
-            <a:cs typeface="+mn-cs"/>
-          </a:endParaRPr>
-        </a:p>
-      </dgm:t>
-    </dgm:pt>
-    <dgm:pt modelId="{D37317D5-8CB8-4A20-9076-E1B44CE6AEF1}" type="parTrans" cxnId="{B0C0C850-B9FE-4428-AF50-B98DF3B1F5DE}">
-      <dgm:prSet/>
-      <dgm:spPr/>
-      <dgm:t>
-        <a:bodyPr/>
-        <a:lstStyle/>
-        <a:p>
-          <a:endParaRPr lang="fr-FR"/>
-        </a:p>
-      </dgm:t>
-    </dgm:pt>
-    <dgm:pt modelId="{D0B25275-8896-4EE4-9715-8213B1BAA2F0}" type="sibTrans" cxnId="{B0C0C850-B9FE-4428-AF50-B98DF3B1F5DE}">
-      <dgm:prSet/>
-      <dgm:spPr/>
-      <dgm:t>
-        <a:bodyPr/>
-        <a:lstStyle/>
-        <a:p>
-          <a:endParaRPr lang="fr-FR"/>
-        </a:p>
-      </dgm:t>
-    </dgm:pt>
-    <dgm:pt modelId="{04D30441-B650-4674-8251-5FB3C61010F9}">
-      <dgm:prSet/>
-      <dgm:spPr/>
-      <dgm:t>
-        <a:bodyPr/>
-        <a:lstStyle/>
-        <a:p>
-          <a:pPr algn="ctr">
-            <a:buNone/>
-          </a:pPr>
-          <a:r>
-            <a:rPr lang="fr-FR" b="1" dirty="0" err="1"/>
-            <a:t>delete_one_document</a:t>
-          </a:r>
-          <a:r>
-            <a:rPr lang="fr-FR" b="1" dirty="0"/>
-            <a:t>()
-</a:t>
-          </a:r>
-          <a:r>
-            <a:rPr lang="fr-FR" b="1" dirty="0" err="1"/>
-            <a:t>delete_documents</a:t>
-          </a:r>
-          <a:r>
-            <a:rPr lang="fr-FR" b="1" dirty="0"/>
-            <a:t>()
-</a:t>
-          </a:r>
-          <a:r>
-            <a:rPr lang="fr-FR" b="1" dirty="0" err="1"/>
-            <a:t>delete_collection</a:t>
-          </a:r>
-          <a:r>
-            <a:rPr lang="fr-FR" b="1" dirty="0"/>
-            <a:t>()
-Suppression ciblée</a:t>
-          </a:r>
-        </a:p>
-      </dgm:t>
-    </dgm:pt>
-    <dgm:pt modelId="{9CA33DDF-F73E-44A9-9455-B21C4BAC5DB9}" type="parTrans" cxnId="{6A7A8DF7-2784-4933-ACCF-97021662A499}">
-      <dgm:prSet/>
-      <dgm:spPr/>
-      <dgm:t>
-        <a:bodyPr/>
-        <a:lstStyle/>
-        <a:p>
-          <a:endParaRPr lang="fr-FR"/>
-        </a:p>
-      </dgm:t>
-    </dgm:pt>
-    <dgm:pt modelId="{4D23AAEC-28E7-4BF3-93FE-01C305A6B40C}" type="sibTrans" cxnId="{6A7A8DF7-2784-4933-ACCF-97021662A499}">
-      <dgm:prSet/>
-      <dgm:spPr/>
-      <dgm:t>
-        <a:bodyPr/>
-        <a:lstStyle/>
-        <a:p>
-          <a:endParaRPr lang="fr-FR"/>
-        </a:p>
-      </dgm:t>
-    </dgm:pt>
-    <dgm:pt modelId="{050F370D-226B-47D0-A5BE-A64C4780C9B2}">
-      <dgm:prSet/>
-      <dgm:spPr/>
-      <dgm:t>
-        <a:bodyPr/>
-        <a:lstStyle/>
-        <a:p>
-          <a:pPr algn="l"/>
-          <a:endParaRPr lang="fr-FR"/>
-        </a:p>
-      </dgm:t>
-    </dgm:pt>
-    <dgm:pt modelId="{54F5C790-5EA8-4ACB-80F8-A77524864946}" type="parTrans" cxnId="{5007BD24-5FA8-4878-8521-E30978584EAB}">
-      <dgm:prSet/>
-      <dgm:spPr/>
-      <dgm:t>
-        <a:bodyPr/>
-        <a:lstStyle/>
-        <a:p>
-          <a:endParaRPr lang="fr-FR"/>
-        </a:p>
-      </dgm:t>
-    </dgm:pt>
-    <dgm:pt modelId="{1A0FA6CC-D33F-451A-9283-405EBF72D524}" type="sibTrans" cxnId="{5007BD24-5FA8-4878-8521-E30978584EAB}">
-      <dgm:prSet/>
-      <dgm:spPr/>
-      <dgm:t>
-        <a:bodyPr/>
-        <a:lstStyle/>
-        <a:p>
-          <a:endParaRPr lang="fr-FR"/>
-        </a:p>
-      </dgm:t>
-    </dgm:pt>
-    <dgm:pt modelId="{5AD34BE4-AFB4-491D-B978-4146FA160EED}" type="pres">
-      <dgm:prSet presAssocID="{030A18F8-BDDB-470D-9FDB-1B4C731446D6}" presName="Name0" presStyleCnt="0">
+    <dgm:pt modelId="{42E72EA3-4EAC-4FB2-A2E4-06B32E132E59}" type="pres">
+      <dgm:prSet presAssocID="{3BEB04EA-2A1D-4233-8432-18F3302557BE}" presName="diagram" presStyleCnt="0">
         <dgm:presLayoutVars>
           <dgm:dir/>
-          <dgm:animLvl val="lvl"/>
           <dgm:resizeHandles val="exact"/>
         </dgm:presLayoutVars>
       </dgm:prSet>
       <dgm:spPr/>
     </dgm:pt>
-    <dgm:pt modelId="{BBD87AED-4D03-42B5-B65A-ADD92683C3EF}" type="pres">
-      <dgm:prSet presAssocID="{201B2AAF-6042-4894-9CC9-2E735F479543}" presName="composite" presStyleCnt="0"/>
-      <dgm:spPr/>
-    </dgm:pt>
-    <dgm:pt modelId="{C993C212-4F85-4FC6-ACB1-0F391E0CE638}" type="pres">
-      <dgm:prSet presAssocID="{201B2AAF-6042-4894-9CC9-2E735F479543}" presName="parTx" presStyleLbl="alignNode1" presStyleIdx="0" presStyleCnt="4" custLinFactNeighborX="-103" custLinFactNeighborY="67">
-        <dgm:presLayoutVars>
-          <dgm:chMax val="0"/>
-          <dgm:chPref val="0"/>
-          <dgm:bulletEnabled val="1"/>
-        </dgm:presLayoutVars>
-      </dgm:prSet>
-      <dgm:spPr/>
-    </dgm:pt>
-    <dgm:pt modelId="{402A4689-5F82-4095-B160-6ED5D0524EAE}" type="pres">
-      <dgm:prSet presAssocID="{201B2AAF-6042-4894-9CC9-2E735F479543}" presName="desTx" presStyleLbl="alignAccFollowNode1" presStyleIdx="0" presStyleCnt="4" custLinFactNeighborX="-47725" custLinFactNeighborY="-292">
-        <dgm:presLayoutVars>
-          <dgm:bulletEnabled val="1"/>
-        </dgm:presLayoutVars>
-      </dgm:prSet>
-      <dgm:spPr/>
-    </dgm:pt>
-    <dgm:pt modelId="{DBF24881-1A25-4F5C-923F-BC75C4893A09}" type="pres">
-      <dgm:prSet presAssocID="{B56E812C-8F3B-4F04-96E9-7089420D69CF}" presName="space" presStyleCnt="0"/>
-      <dgm:spPr/>
-    </dgm:pt>
-    <dgm:pt modelId="{84E473B1-8B63-4F25-AE51-AD1CD5048DAD}" type="pres">
-      <dgm:prSet presAssocID="{FD24F202-4695-42DF-A441-FB2108DB7DEE}" presName="composite" presStyleCnt="0"/>
-      <dgm:spPr/>
-    </dgm:pt>
-    <dgm:pt modelId="{E287B113-DC8F-4125-BDA9-760A4D0972E0}" type="pres">
-      <dgm:prSet presAssocID="{FD24F202-4695-42DF-A441-FB2108DB7DEE}" presName="parTx" presStyleLbl="alignNode1" presStyleIdx="1" presStyleCnt="4" custLinFactNeighborY="-2026">
-        <dgm:presLayoutVars>
-          <dgm:chMax val="0"/>
-          <dgm:chPref val="0"/>
-          <dgm:bulletEnabled val="1"/>
-        </dgm:presLayoutVars>
-      </dgm:prSet>
-      <dgm:spPr/>
-    </dgm:pt>
-    <dgm:pt modelId="{F4B86B3A-2E38-4840-A58F-760A1508EC85}" type="pres">
-      <dgm:prSet presAssocID="{FD24F202-4695-42DF-A441-FB2108DB7DEE}" presName="desTx" presStyleLbl="alignAccFollowNode1" presStyleIdx="1" presStyleCnt="4">
-        <dgm:presLayoutVars>
-          <dgm:bulletEnabled val="1"/>
-        </dgm:presLayoutVars>
-      </dgm:prSet>
-      <dgm:spPr/>
-    </dgm:pt>
-    <dgm:pt modelId="{3CEB41B0-B6EF-4621-8847-EFBB45A4051D}" type="pres">
-      <dgm:prSet presAssocID="{7B4E381F-6A7C-4A2F-A787-FD28678EE7E7}" presName="space" presStyleCnt="0"/>
-      <dgm:spPr/>
-    </dgm:pt>
-    <dgm:pt modelId="{D3D643C8-AF29-40B6-982C-086313E2636C}" type="pres">
-      <dgm:prSet presAssocID="{2C81F785-B686-4A3D-B326-2DF8F3906836}" presName="composite" presStyleCnt="0"/>
-      <dgm:spPr/>
-    </dgm:pt>
-    <dgm:pt modelId="{249659AD-BC72-4673-AF20-1C17D5591BAB}" type="pres">
-      <dgm:prSet presAssocID="{2C81F785-B686-4A3D-B326-2DF8F3906836}" presName="parTx" presStyleLbl="alignNode1" presStyleIdx="2" presStyleCnt="4">
-        <dgm:presLayoutVars>
-          <dgm:chMax val="0"/>
-          <dgm:chPref val="0"/>
-          <dgm:bulletEnabled val="1"/>
-        </dgm:presLayoutVars>
-      </dgm:prSet>
-      <dgm:spPr/>
-    </dgm:pt>
-    <dgm:pt modelId="{F46CA606-2E3E-48EA-AE41-8449EE4FB6B7}" type="pres">
-      <dgm:prSet presAssocID="{2C81F785-B686-4A3D-B326-2DF8F3906836}" presName="desTx" presStyleLbl="alignAccFollowNode1" presStyleIdx="2" presStyleCnt="4">
-        <dgm:presLayoutVars>
-          <dgm:bulletEnabled val="1"/>
-        </dgm:presLayoutVars>
-      </dgm:prSet>
-      <dgm:spPr/>
-    </dgm:pt>
-    <dgm:pt modelId="{EBC1834E-1771-4FCF-81F4-5441FE1D5005}" type="pres">
-      <dgm:prSet presAssocID="{AC83E7BB-71A2-4CED-9D11-DA674D25ABE8}" presName="space" presStyleCnt="0"/>
-      <dgm:spPr/>
-    </dgm:pt>
-    <dgm:pt modelId="{11A52029-0627-4541-ABD1-9AEFB9A9C0B9}" type="pres">
-      <dgm:prSet presAssocID="{4FB1D284-AB7C-4E55-9E87-CB62EC056768}" presName="composite" presStyleCnt="0"/>
-      <dgm:spPr/>
-    </dgm:pt>
-    <dgm:pt modelId="{F2494731-0318-4D19-A1A8-09C210E1E33B}" type="pres">
-      <dgm:prSet presAssocID="{4FB1D284-AB7C-4E55-9E87-CB62EC056768}" presName="parTx" presStyleLbl="alignNode1" presStyleIdx="3" presStyleCnt="4">
-        <dgm:presLayoutVars>
-          <dgm:chMax val="0"/>
-          <dgm:chPref val="0"/>
-          <dgm:bulletEnabled val="1"/>
-        </dgm:presLayoutVars>
-      </dgm:prSet>
-      <dgm:spPr/>
-    </dgm:pt>
-    <dgm:pt modelId="{68C50029-C252-412E-ADA9-57A106DCDCAF}" type="pres">
-      <dgm:prSet presAssocID="{4FB1D284-AB7C-4E55-9E87-CB62EC056768}" presName="desTx" presStyleLbl="alignAccFollowNode1" presStyleIdx="3" presStyleCnt="4">
-        <dgm:presLayoutVars>
-          <dgm:bulletEnabled val="1"/>
-        </dgm:presLayoutVars>
-      </dgm:prSet>
-      <dgm:spPr/>
-    </dgm:pt>
   </dgm:ptLst>
   <dgm:cxnLst>
-    <dgm:cxn modelId="{43DB220D-6B13-4AE4-B084-CB9E0D8E9E25}" srcId="{FD24F202-4695-42DF-A441-FB2108DB7DEE}" destId="{6A595594-28C0-4597-968C-3A7B7F2EBA42}" srcOrd="1" destOrd="0" parTransId="{98198DCD-34E3-4846-BEA9-88A0776F1E52}" sibTransId="{8807AA5B-14F8-433A-A0A4-800C851CCD2E}"/>
-    <dgm:cxn modelId="{03FBE313-2F7C-4FDF-B1D9-01CF7E7CEEB1}" type="presOf" srcId="{2C81F785-B686-4A3D-B326-2DF8F3906836}" destId="{249659AD-BC72-4673-AF20-1C17D5591BAB}" srcOrd="0" destOrd="0" presId="urn:microsoft.com/office/officeart/2005/8/layout/hList1"/>
-    <dgm:cxn modelId="{5007BD24-5FA8-4878-8521-E30978584EAB}" srcId="{4FB1D284-AB7C-4E55-9E87-CB62EC056768}" destId="{050F370D-226B-47D0-A5BE-A64C4780C9B2}" srcOrd="1" destOrd="0" parTransId="{54F5C790-5EA8-4ACB-80F8-A77524864946}" sibTransId="{1A0FA6CC-D33F-451A-9283-405EBF72D524}"/>
-    <dgm:cxn modelId="{6F25A23C-AB32-4E64-ABBF-C2D881A1387F}" srcId="{FD24F202-4695-42DF-A441-FB2108DB7DEE}" destId="{6C397841-ECB5-42F5-8608-B89728C6A873}" srcOrd="0" destOrd="0" parTransId="{84469614-6233-482E-8266-744713893455}" sibTransId="{0199EE3C-246C-4DED-98D4-90B907A527E2}"/>
-    <dgm:cxn modelId="{70A5FB3C-8CBF-415E-B7C1-96093FDDE060}" type="presOf" srcId="{9A6985D6-DE54-4364-B92E-062137C0BC16}" destId="{F46CA606-2E3E-48EA-AE41-8449EE4FB6B7}" srcOrd="0" destOrd="1" presId="urn:microsoft.com/office/officeart/2005/8/layout/hList1"/>
-    <dgm:cxn modelId="{D60FEA3E-CBF5-40C3-8C74-79AE285A62DC}" srcId="{030A18F8-BDDB-470D-9FDB-1B4C731446D6}" destId="{4FB1D284-AB7C-4E55-9E87-CB62EC056768}" srcOrd="3" destOrd="0" parTransId="{99AF6DFC-AF4C-4BAC-AB97-BA24B4DA41E6}" sibTransId="{386F09DC-F23B-4BC0-8F13-4C66891BB916}"/>
-    <dgm:cxn modelId="{F27D4761-1C16-486E-B1AD-4BD279EE8FB9}" type="presOf" srcId="{050F370D-226B-47D0-A5BE-A64C4780C9B2}" destId="{68C50029-C252-412E-ADA9-57A106DCDCAF}" srcOrd="0" destOrd="1" presId="urn:microsoft.com/office/officeart/2005/8/layout/hList1"/>
-    <dgm:cxn modelId="{2555C846-2903-452E-BB12-A6A1B56341D8}" srcId="{2C81F785-B686-4A3D-B326-2DF8F3906836}" destId="{7FAEC95F-4669-44F7-9474-179A2A08238F}" srcOrd="0" destOrd="0" parTransId="{F628E81E-C8D4-4CB7-AA18-1826453D6E72}" sibTransId="{B9E7467F-F7FB-44DE-8788-E43020C34A49}"/>
-    <dgm:cxn modelId="{5FDC144A-FC2E-4F85-AC93-526D3A001223}" type="presOf" srcId="{030A18F8-BDDB-470D-9FDB-1B4C731446D6}" destId="{5AD34BE4-AFB4-491D-B978-4146FA160EED}" srcOrd="0" destOrd="0" presId="urn:microsoft.com/office/officeart/2005/8/layout/hList1"/>
-    <dgm:cxn modelId="{65E3A46B-739F-4701-9FF4-A495F204A787}" type="presOf" srcId="{7F0865F7-7DFF-45B8-85EF-EA7017CBF30D}" destId="{F4B86B3A-2E38-4840-A58F-760A1508EC85}" srcOrd="0" destOrd="2" presId="urn:microsoft.com/office/officeart/2005/8/layout/hList1"/>
-    <dgm:cxn modelId="{697EDA4B-DA50-4993-9734-39C9842F1513}" type="presOf" srcId="{04D30441-B650-4674-8251-5FB3C61010F9}" destId="{68C50029-C252-412E-ADA9-57A106DCDCAF}" srcOrd="0" destOrd="0" presId="urn:microsoft.com/office/officeart/2005/8/layout/hList1"/>
-    <dgm:cxn modelId="{CCE28D4E-8618-4040-A250-FF1463350DDF}" type="presOf" srcId="{EE7F0B7F-7A87-45E4-8537-52B0BB6DA49F}" destId="{402A4689-5F82-4095-B160-6ED5D0524EAE}" srcOrd="0" destOrd="3" presId="urn:microsoft.com/office/officeart/2005/8/layout/hList1"/>
-    <dgm:cxn modelId="{ABF7D74E-7146-4E2C-B806-B3E60A601703}" srcId="{201B2AAF-6042-4894-9CC9-2E735F479543}" destId="{B26C5A88-6585-4F5B-BD53-4EBF4CB1868A}" srcOrd="2" destOrd="0" parTransId="{5F2B1101-F5C3-4107-9CA2-351AFE31BA49}" sibTransId="{59C9252F-81D5-4DEF-A3A5-2308669642A8}"/>
-    <dgm:cxn modelId="{B0C0C850-B9FE-4428-AF50-B98DF3B1F5DE}" srcId="{2C81F785-B686-4A3D-B326-2DF8F3906836}" destId="{9A6985D6-DE54-4364-B92E-062137C0BC16}" srcOrd="1" destOrd="0" parTransId="{D37317D5-8CB8-4A20-9076-E1B44CE6AEF1}" sibTransId="{D0B25275-8896-4EE4-9715-8213B1BAA2F0}"/>
-    <dgm:cxn modelId="{B329D774-5C30-433C-985A-7558C5F011A6}" type="presOf" srcId="{6C397841-ECB5-42F5-8608-B89728C6A873}" destId="{F4B86B3A-2E38-4840-A58F-760A1508EC85}" srcOrd="0" destOrd="0" presId="urn:microsoft.com/office/officeart/2005/8/layout/hList1"/>
-    <dgm:cxn modelId="{706F5B59-A260-4981-B9FD-AB314EEF605B}" srcId="{030A18F8-BDDB-470D-9FDB-1B4C731446D6}" destId="{FD24F202-4695-42DF-A441-FB2108DB7DEE}" srcOrd="1" destOrd="0" parTransId="{325A19AB-074B-4446-BDF0-6491DB2AC349}" sibTransId="{7B4E381F-6A7C-4A2F-A787-FD28678EE7E7}"/>
-    <dgm:cxn modelId="{AB96A38A-2DAD-405C-AC7C-D4D63372C798}" type="presOf" srcId="{7FAEC95F-4669-44F7-9474-179A2A08238F}" destId="{F46CA606-2E3E-48EA-AE41-8449EE4FB6B7}" srcOrd="0" destOrd="0" presId="urn:microsoft.com/office/officeart/2005/8/layout/hList1"/>
-    <dgm:cxn modelId="{27082A9B-0885-4A34-B920-3E5CD4C2253C}" srcId="{030A18F8-BDDB-470D-9FDB-1B4C731446D6}" destId="{201B2AAF-6042-4894-9CC9-2E735F479543}" srcOrd="0" destOrd="0" parTransId="{1B640122-5F06-479F-BCB1-E92A2599104F}" sibTransId="{B56E812C-8F3B-4F04-96E9-7089420D69CF}"/>
-    <dgm:cxn modelId="{3CED439C-B223-4CC1-88CA-EFF2CE8B8D37}" type="presOf" srcId="{4FB1D284-AB7C-4E55-9E87-CB62EC056768}" destId="{F2494731-0318-4D19-A1A8-09C210E1E33B}" srcOrd="0" destOrd="0" presId="urn:microsoft.com/office/officeart/2005/8/layout/hList1"/>
-    <dgm:cxn modelId="{F69842AC-C3BE-4075-9BDA-B95245A34B32}" srcId="{030A18F8-BDDB-470D-9FDB-1B4C731446D6}" destId="{2C81F785-B686-4A3D-B326-2DF8F3906836}" srcOrd="2" destOrd="0" parTransId="{0E719C52-C631-4916-8DDE-257898C6D5F5}" sibTransId="{AC83E7BB-71A2-4CED-9D11-DA674D25ABE8}"/>
-    <dgm:cxn modelId="{565FDBAF-27B2-4D39-AD1C-D9FE3412C4E2}" type="presOf" srcId="{A499BD18-B222-4259-9DE7-B44FD861202F}" destId="{402A4689-5F82-4095-B160-6ED5D0524EAE}" srcOrd="0" destOrd="0" presId="urn:microsoft.com/office/officeart/2005/8/layout/hList1"/>
-    <dgm:cxn modelId="{757AFEBA-26E9-447F-A40E-CE6D2F74A9C3}" srcId="{FD24F202-4695-42DF-A441-FB2108DB7DEE}" destId="{7F0865F7-7DFF-45B8-85EF-EA7017CBF30D}" srcOrd="2" destOrd="0" parTransId="{AC90364E-0AA3-4458-894A-AC9BE6E9782E}" sibTransId="{219942B0-303B-4269-8E1A-97507207A9E6}"/>
-    <dgm:cxn modelId="{809D7EBC-C66A-4EB1-8018-293536D8718A}" type="presOf" srcId="{6A595594-28C0-4597-968C-3A7B7F2EBA42}" destId="{F4B86B3A-2E38-4840-A58F-760A1508EC85}" srcOrd="0" destOrd="1" presId="urn:microsoft.com/office/officeart/2005/8/layout/hList1"/>
-    <dgm:cxn modelId="{C8C5AABC-C02C-4AE9-B4DE-B20089C36BEF}" srcId="{201B2AAF-6042-4894-9CC9-2E735F479543}" destId="{EE7F0B7F-7A87-45E4-8537-52B0BB6DA49F}" srcOrd="3" destOrd="0" parTransId="{608B28AA-9934-491D-8160-5F069516BAD1}" sibTransId="{708832CA-4EDC-4953-B0C3-84D71FD248B4}"/>
-    <dgm:cxn modelId="{06430DC9-EE20-48D9-9B4B-CCC7186B3C7D}" type="presOf" srcId="{B26C5A88-6585-4F5B-BD53-4EBF4CB1868A}" destId="{402A4689-5F82-4095-B160-6ED5D0524EAE}" srcOrd="0" destOrd="2" presId="urn:microsoft.com/office/officeart/2005/8/layout/hList1"/>
-    <dgm:cxn modelId="{074995D2-F29C-4DC0-8C50-5EE7BCBA8D90}" srcId="{201B2AAF-6042-4894-9CC9-2E735F479543}" destId="{71FEE962-0B4A-4149-9CCB-90C9A4EBE65D}" srcOrd="1" destOrd="0" parTransId="{70D71C3C-16B6-4E35-BACB-C94A9925DC98}" sibTransId="{3DA817F2-24C3-4606-B9B2-D1619EBE405E}"/>
-    <dgm:cxn modelId="{98120BD3-53E0-48C8-ACAB-5B8374226F1E}" srcId="{201B2AAF-6042-4894-9CC9-2E735F479543}" destId="{A499BD18-B222-4259-9DE7-B44FD861202F}" srcOrd="0" destOrd="0" parTransId="{F55664BA-7D82-456D-B1F9-786CE02F2231}" sibTransId="{0FA2E3C5-16A9-4765-A693-D539E190C038}"/>
-    <dgm:cxn modelId="{161CF0E8-1982-4C12-8733-7051FF02AE9C}" type="presOf" srcId="{FD24F202-4695-42DF-A441-FB2108DB7DEE}" destId="{E287B113-DC8F-4125-BDA9-760A4D0972E0}" srcOrd="0" destOrd="0" presId="urn:microsoft.com/office/officeart/2005/8/layout/hList1"/>
-    <dgm:cxn modelId="{DA2243E9-B84F-45A5-8823-AA2204A7B8FF}" type="presOf" srcId="{71FEE962-0B4A-4149-9CCB-90C9A4EBE65D}" destId="{402A4689-5F82-4095-B160-6ED5D0524EAE}" srcOrd="0" destOrd="1" presId="urn:microsoft.com/office/officeart/2005/8/layout/hList1"/>
-    <dgm:cxn modelId="{6A7A8DF7-2784-4933-ACCF-97021662A499}" srcId="{4FB1D284-AB7C-4E55-9E87-CB62EC056768}" destId="{04D30441-B650-4674-8251-5FB3C61010F9}" srcOrd="0" destOrd="0" parTransId="{9CA33DDF-F73E-44A9-9455-B21C4BAC5DB9}" sibTransId="{4D23AAEC-28E7-4BF3-93FE-01C305A6B40C}"/>
-    <dgm:cxn modelId="{F0897EF8-8288-4D41-B36E-D4FC1D209AC6}" type="presOf" srcId="{201B2AAF-6042-4894-9CC9-2E735F479543}" destId="{C993C212-4F85-4FC6-ACB1-0F391E0CE638}" srcOrd="0" destOrd="0" presId="urn:microsoft.com/office/officeart/2005/8/layout/hList1"/>
-    <dgm:cxn modelId="{022A50A3-0DF9-41F3-AC31-EF8800519331}" type="presParOf" srcId="{5AD34BE4-AFB4-491D-B978-4146FA160EED}" destId="{BBD87AED-4D03-42B5-B65A-ADD92683C3EF}" srcOrd="0" destOrd="0" presId="urn:microsoft.com/office/officeart/2005/8/layout/hList1"/>
-    <dgm:cxn modelId="{DD1A38BB-2EFC-4856-8D4C-4F206F95285A}" type="presParOf" srcId="{BBD87AED-4D03-42B5-B65A-ADD92683C3EF}" destId="{C993C212-4F85-4FC6-ACB1-0F391E0CE638}" srcOrd="0" destOrd="0" presId="urn:microsoft.com/office/officeart/2005/8/layout/hList1"/>
-    <dgm:cxn modelId="{F72BC611-6565-4F7D-B387-4FF8813450E2}" type="presParOf" srcId="{BBD87AED-4D03-42B5-B65A-ADD92683C3EF}" destId="{402A4689-5F82-4095-B160-6ED5D0524EAE}" srcOrd="1" destOrd="0" presId="urn:microsoft.com/office/officeart/2005/8/layout/hList1"/>
-    <dgm:cxn modelId="{D3B5D163-460A-4A56-B665-186AC16CE295}" type="presParOf" srcId="{5AD34BE4-AFB4-491D-B978-4146FA160EED}" destId="{DBF24881-1A25-4F5C-923F-BC75C4893A09}" srcOrd="1" destOrd="0" presId="urn:microsoft.com/office/officeart/2005/8/layout/hList1"/>
-    <dgm:cxn modelId="{32B675E0-51B3-4D4B-9F8C-225DC85AD84D}" type="presParOf" srcId="{5AD34BE4-AFB4-491D-B978-4146FA160EED}" destId="{84E473B1-8B63-4F25-AE51-AD1CD5048DAD}" srcOrd="2" destOrd="0" presId="urn:microsoft.com/office/officeart/2005/8/layout/hList1"/>
-    <dgm:cxn modelId="{22C03B5D-E8D2-461D-AD8C-84BA9DF7E46A}" type="presParOf" srcId="{84E473B1-8B63-4F25-AE51-AD1CD5048DAD}" destId="{E287B113-DC8F-4125-BDA9-760A4D0972E0}" srcOrd="0" destOrd="0" presId="urn:microsoft.com/office/officeart/2005/8/layout/hList1"/>
-    <dgm:cxn modelId="{BB1CB332-9AE5-4AC2-9ED5-B4547C412A1B}" type="presParOf" srcId="{84E473B1-8B63-4F25-AE51-AD1CD5048DAD}" destId="{F4B86B3A-2E38-4840-A58F-760A1508EC85}" srcOrd="1" destOrd="0" presId="urn:microsoft.com/office/officeart/2005/8/layout/hList1"/>
-    <dgm:cxn modelId="{3BBA8C66-C2E7-44C8-B212-1935492AC12F}" type="presParOf" srcId="{5AD34BE4-AFB4-491D-B978-4146FA160EED}" destId="{3CEB41B0-B6EF-4621-8847-EFBB45A4051D}" srcOrd="3" destOrd="0" presId="urn:microsoft.com/office/officeart/2005/8/layout/hList1"/>
-    <dgm:cxn modelId="{BE13123D-97CB-4177-80E9-84A84E5EAC78}" type="presParOf" srcId="{5AD34BE4-AFB4-491D-B978-4146FA160EED}" destId="{D3D643C8-AF29-40B6-982C-086313E2636C}" srcOrd="4" destOrd="0" presId="urn:microsoft.com/office/officeart/2005/8/layout/hList1"/>
-    <dgm:cxn modelId="{40EB1A67-9818-4DC8-8F4E-8BDC9B8AAAD1}" type="presParOf" srcId="{D3D643C8-AF29-40B6-982C-086313E2636C}" destId="{249659AD-BC72-4673-AF20-1C17D5591BAB}" srcOrd="0" destOrd="0" presId="urn:microsoft.com/office/officeart/2005/8/layout/hList1"/>
-    <dgm:cxn modelId="{344EE7D7-3AB7-4665-B925-AD087039BB2F}" type="presParOf" srcId="{D3D643C8-AF29-40B6-982C-086313E2636C}" destId="{F46CA606-2E3E-48EA-AE41-8449EE4FB6B7}" srcOrd="1" destOrd="0" presId="urn:microsoft.com/office/officeart/2005/8/layout/hList1"/>
-    <dgm:cxn modelId="{A856A505-501D-4018-992F-E581C12830EB}" type="presParOf" srcId="{5AD34BE4-AFB4-491D-B978-4146FA160EED}" destId="{EBC1834E-1771-4FCF-81F4-5441FE1D5005}" srcOrd="5" destOrd="0" presId="urn:microsoft.com/office/officeart/2005/8/layout/hList1"/>
-    <dgm:cxn modelId="{6FC07592-FA2D-4E56-A51B-3F90820B003F}" type="presParOf" srcId="{5AD34BE4-AFB4-491D-B978-4146FA160EED}" destId="{11A52029-0627-4541-ABD1-9AEFB9A9C0B9}" srcOrd="6" destOrd="0" presId="urn:microsoft.com/office/officeart/2005/8/layout/hList1"/>
-    <dgm:cxn modelId="{49EC1C2E-4346-4951-B37F-4E5BA0D2748C}" type="presParOf" srcId="{11A52029-0627-4541-ABD1-9AEFB9A9C0B9}" destId="{F2494731-0318-4D19-A1A8-09C210E1E33B}" srcOrd="0" destOrd="0" presId="urn:microsoft.com/office/officeart/2005/8/layout/hList1"/>
-    <dgm:cxn modelId="{BF39CDD6-1109-425C-B986-8C27EADFBE3F}" type="presParOf" srcId="{11A52029-0627-4541-ABD1-9AEFB9A9C0B9}" destId="{68C50029-C252-412E-ADA9-57A106DCDCAF}" srcOrd="1" destOrd="0" presId="urn:microsoft.com/office/officeart/2005/8/layout/hList1"/>
+    <dgm:cxn modelId="{2A19BEBE-7E0E-4B50-A936-08F4C5C992A5}" type="presOf" srcId="{3BEB04EA-2A1D-4233-8432-18F3302557BE}" destId="{42E72EA3-4EAC-4FB2-A2E4-06B32E132E59}" srcOrd="0" destOrd="0" presId="urn:microsoft.com/office/officeart/2005/8/layout/default"/>
   </dgm:cxnLst>
   <dgm:bg/>
   <dgm:whole/>
   <dgm:extLst>
     <a:ext uri="http://schemas.microsoft.com/office/drawing/2008/diagram">
-      <dsp:dataModelExt xmlns:dsp="http://schemas.microsoft.com/office/drawing/2008/diagram" relId="rId11" minVer="http://schemas.openxmlformats.org/drawingml/2006/diagram"/>
+      <dsp:dataModelExt xmlns:dsp="http://schemas.microsoft.com/office/drawing/2008/diagram" relId="rId6" minVer="http://schemas.openxmlformats.org/drawingml/2006/diagram"/>
+    </a:ext>
+    <a:ext uri="{C62137D5-CB1D-491B-B009-E17868A290BF}">
+      <dgm14:recolorImg xmlns:dgm14="http://schemas.microsoft.com/office/drawing/2010/diagram" val="1"/>
     </a:ext>
   </dgm:extLst>
 </dgm:dataModel>
@@ -19088,30 +16403,6 @@
       <dsp:cNvGrpSpPr/>
     </dsp:nvGrpSpPr>
     <dsp:grpSpPr/>
-  </dsp:spTree>
-</dsp:drawing>
-</file>
-
-<file path=ppt/diagrams/drawing11.xml><?xml version="1.0" encoding="utf-8"?>
-<dsp:drawing xmlns:dgm="http://schemas.openxmlformats.org/drawingml/2006/diagram" xmlns:dsp="http://schemas.microsoft.com/office/drawing/2008/diagram" xmlns:a="http://schemas.openxmlformats.org/drawingml/2006/main">
-  <dsp:spTree>
-    <dsp:nvGrpSpPr>
-      <dsp:cNvPr id="0" name=""/>
-      <dsp:cNvGrpSpPr/>
-    </dsp:nvGrpSpPr>
-    <dsp:grpSpPr/>
-  </dsp:spTree>
-</dsp:drawing>
-</file>
-
-<file path=ppt/diagrams/drawing12.xml><?xml version="1.0" encoding="utf-8"?>
-<dsp:drawing xmlns:dgm="http://schemas.openxmlformats.org/drawingml/2006/diagram" xmlns:dsp="http://schemas.microsoft.com/office/drawing/2008/diagram" xmlns:a="http://schemas.openxmlformats.org/drawingml/2006/main">
-  <dsp:spTree>
-    <dsp:nvGrpSpPr>
-      <dsp:cNvPr id="0" name=""/>
-      <dsp:cNvGrpSpPr/>
-    </dsp:nvGrpSpPr>
-    <dsp:grpSpPr/>
     <dsp:sp modelId="{39D4BCF5-D8FB-4D48-9F05-DF403A0BF58B}">
       <dsp:nvSpPr>
         <dsp:cNvPr id="0" name=""/>
@@ -19603,16 +16894,13 @@
         <a:prstGeom prst="ellipse">
           <a:avLst/>
         </a:prstGeom>
-        <a:solidFill>
-          <a:schemeClr val="accent2">
-            <a:tint val="40000"/>
-            <a:alpha val="90000"/>
-            <a:hueOff val="0"/>
-            <a:satOff val="0"/>
-            <a:lumOff val="0"/>
-            <a:alphaOff val="0"/>
-          </a:schemeClr>
-        </a:solidFill>
+        <a:blipFill rotWithShape="1">
+          <a:blip xmlns:r="http://schemas.openxmlformats.org/officeDocument/2006/relationships" r:embed="rId1"/>
+          <a:srcRect/>
+          <a:stretch>
+            <a:fillRect l="-1000" r="-1000"/>
+          </a:stretch>
+        </a:blipFill>
         <a:ln w="12700" cap="rnd" cmpd="sng" algn="ctr">
           <a:solidFill>
             <a:schemeClr val="accent2">
@@ -19959,7 +17247,7 @@
             <a:buChar char="•"/>
           </a:pPr>
           <a:r>
-            <a:rPr lang="en-US" sz="900" kern="1200">
+            <a:rPr lang="en-US" sz="900" kern="1200" dirty="0">
               <a:solidFill>
                 <a:srgbClr val="1E293B"/>
               </a:solidFill>
@@ -19967,7 +17255,40 @@
               <a:ea typeface="Calibri" pitchFamily="34" charset="-122"/>
               <a:cs typeface="Calibri" pitchFamily="34" charset="-120"/>
             </a:rPr>
-            <a:t>Index créés correctement</a:t>
+            <a:t>Index </a:t>
+          </a:r>
+          <a:r>
+            <a:rPr lang="en-US" sz="900" kern="1200" dirty="0" err="1">
+              <a:solidFill>
+                <a:srgbClr val="1E293B"/>
+              </a:solidFill>
+              <a:latin typeface="Calibri" pitchFamily="34" charset="0"/>
+              <a:ea typeface="Calibri" pitchFamily="34" charset="-122"/>
+              <a:cs typeface="Calibri" pitchFamily="34" charset="-120"/>
+            </a:rPr>
+            <a:t>créés</a:t>
+          </a:r>
+          <a:r>
+            <a:rPr lang="en-US" sz="900" kern="1200" dirty="0">
+              <a:solidFill>
+                <a:srgbClr val="1E293B"/>
+              </a:solidFill>
+              <a:latin typeface="Calibri" pitchFamily="34" charset="0"/>
+              <a:ea typeface="Calibri" pitchFamily="34" charset="-122"/>
+              <a:cs typeface="Calibri" pitchFamily="34" charset="-120"/>
+            </a:rPr>
+            <a:t> </a:t>
+          </a:r>
+          <a:r>
+            <a:rPr lang="en-US" sz="900" kern="1200" dirty="0" err="1">
+              <a:solidFill>
+                <a:srgbClr val="1E293B"/>
+              </a:solidFill>
+              <a:latin typeface="Calibri" pitchFamily="34" charset="0"/>
+              <a:ea typeface="Calibri" pitchFamily="34" charset="-122"/>
+              <a:cs typeface="Calibri" pitchFamily="34" charset="-120"/>
+            </a:rPr>
+            <a:t>correctement</a:t>
           </a:r>
           <a:endParaRPr lang="fr-FR" sz="900" kern="1200" dirty="0">
             <a:solidFill>
@@ -20154,16 +17475,13 @@
         <a:prstGeom prst="ellipse">
           <a:avLst/>
         </a:prstGeom>
-        <a:solidFill>
-          <a:schemeClr val="accent3">
-            <a:tint val="40000"/>
-            <a:alpha val="90000"/>
-            <a:hueOff val="0"/>
-            <a:satOff val="0"/>
-            <a:lumOff val="0"/>
-            <a:alphaOff val="0"/>
-          </a:schemeClr>
-        </a:solidFill>
+        <a:blipFill rotWithShape="1">
+          <a:blip xmlns:r="http://schemas.openxmlformats.org/officeDocument/2006/relationships" r:embed="rId2"/>
+          <a:srcRect/>
+          <a:stretch>
+            <a:fillRect t="-1000" b="-1000"/>
+          </a:stretch>
+        </a:blipFill>
         <a:ln w="12700" cap="rnd" cmpd="sng" algn="ctr">
           <a:solidFill>
             <a:schemeClr val="accent3">
@@ -20623,16 +17941,13 @@
         <a:prstGeom prst="ellipse">
           <a:avLst/>
         </a:prstGeom>
-        <a:solidFill>
-          <a:schemeClr val="accent4">
-            <a:tint val="40000"/>
-            <a:alpha val="90000"/>
-            <a:hueOff val="0"/>
-            <a:satOff val="0"/>
-            <a:lumOff val="0"/>
-            <a:alphaOff val="0"/>
-          </a:schemeClr>
-        </a:solidFill>
+        <a:blipFill rotWithShape="1">
+          <a:blip xmlns:r="http://schemas.openxmlformats.org/officeDocument/2006/relationships" r:embed="rId2"/>
+          <a:srcRect/>
+          <a:stretch>
+            <a:fillRect t="-1000" b="-1000"/>
+          </a:stretch>
+        </a:blipFill>
         <a:ln w="12700" cap="rnd" cmpd="sng" algn="ctr">
           <a:solidFill>
             <a:schemeClr val="accent4">
@@ -21103,16 +18418,13 @@
         <a:prstGeom prst="ellipse">
           <a:avLst/>
         </a:prstGeom>
-        <a:solidFill>
-          <a:schemeClr val="accent5">
-            <a:tint val="40000"/>
-            <a:alpha val="90000"/>
-            <a:hueOff val="0"/>
-            <a:satOff val="0"/>
-            <a:lumOff val="0"/>
-            <a:alphaOff val="0"/>
-          </a:schemeClr>
-        </a:solidFill>
+        <a:blipFill rotWithShape="1">
+          <a:blip xmlns:r="http://schemas.openxmlformats.org/officeDocument/2006/relationships" r:embed="rId2"/>
+          <a:srcRect/>
+          <a:stretch>
+            <a:fillRect t="-1000" b="-1000"/>
+          </a:stretch>
+        </a:blipFill>
         <a:ln w="12700" cap="rnd" cmpd="sng" algn="ctr">
           <a:solidFill>
             <a:schemeClr val="accent5">
@@ -21394,15 +18706,7 @@
           </a:pPr>
           <a:r>
             <a:rPr lang="fr-FR" sz="1600" kern="1200" dirty="0"/>
-            <a:t>Automatiser la migration des données CSV vers MongoDB avec nettoyage, validation, création d'index </a:t>
-          </a:r>
-          <a:r>
-            <a:rPr lang="fr-FR" sz="1600" kern="1200"/>
-            <a:t>et export, le </a:t>
-          </a:r>
-          <a:r>
-            <a:rPr lang="fr-FR" sz="1600" kern="1200" dirty="0"/>
-            <a:t>tout dans un environnement Docker reproductible.</a:t>
+            <a:t>Automatiser la migration des données CSV vers MongoDB avec nettoyage, validation, création d'index et export, le tout dans un environnement Docker reproductible.</a:t>
           </a:r>
         </a:p>
         <a:p>
@@ -26247,1029 +23551,6 @@
       <dsp:cNvGrpSpPr/>
     </dsp:nvGrpSpPr>
     <dsp:grpSpPr/>
-    <dsp:sp modelId="{C993C212-4F85-4FC6-ACB1-0F391E0CE638}">
-      <dsp:nvSpPr>
-        <dsp:cNvPr id="0" name=""/>
-        <dsp:cNvSpPr/>
-      </dsp:nvSpPr>
-      <dsp:spPr>
-        <a:xfrm>
-          <a:off x="1710" y="1394113"/>
-          <a:ext cx="2701200" cy="597195"/>
-        </a:xfrm>
-        <a:prstGeom prst="rect">
-          <a:avLst/>
-        </a:prstGeom>
-        <a:gradFill rotWithShape="0">
-          <a:gsLst>
-            <a:gs pos="0">
-              <a:schemeClr val="accent2">
-                <a:hueOff val="0"/>
-                <a:satOff val="0"/>
-                <a:lumOff val="0"/>
-                <a:alphaOff val="0"/>
-                <a:tint val="98000"/>
-                <a:lumMod val="110000"/>
-              </a:schemeClr>
-            </a:gs>
-            <a:gs pos="84000">
-              <a:schemeClr val="accent2">
-                <a:hueOff val="0"/>
-                <a:satOff val="0"/>
-                <a:lumOff val="0"/>
-                <a:alphaOff val="0"/>
-                <a:shade val="90000"/>
-                <a:lumMod val="88000"/>
-              </a:schemeClr>
-            </a:gs>
-          </a:gsLst>
-          <a:lin ang="5400000" scaled="0"/>
-        </a:gradFill>
-        <a:ln w="12700" cap="rnd" cmpd="sng" algn="ctr">
-          <a:solidFill>
-            <a:schemeClr val="accent2">
-              <a:hueOff val="0"/>
-              <a:satOff val="0"/>
-              <a:lumOff val="0"/>
-              <a:alphaOff val="0"/>
-            </a:schemeClr>
-          </a:solidFill>
-          <a:prstDash val="solid"/>
-        </a:ln>
-        <a:effectLst>
-          <a:outerShdw blurRad="88900" dist="38100" dir="5040000" rotWithShape="0">
-            <a:srgbClr val="000000">
-              <a:alpha val="60000"/>
-            </a:srgbClr>
-          </a:outerShdw>
-        </a:effectLst>
-        <a:scene3d>
-          <a:camera prst="orthographicFront">
-            <a:rot lat="0" lon="0" rev="0"/>
-          </a:camera>
-          <a:lightRig rig="threePt" dir="tl">
-            <a:rot lat="0" lon="0" rev="1200000"/>
-          </a:lightRig>
-        </a:scene3d>
-        <a:sp3d>
-          <a:bevelT w="38100" h="50800"/>
-        </a:sp3d>
-      </dsp:spPr>
-      <dsp:style>
-        <a:lnRef idx="1">
-          <a:scrgbClr r="0" g="0" b="0"/>
-        </a:lnRef>
-        <a:fillRef idx="3">
-          <a:scrgbClr r="0" g="0" b="0"/>
-        </a:fillRef>
-        <a:effectRef idx="3">
-          <a:scrgbClr r="0" g="0" b="0"/>
-        </a:effectRef>
-        <a:fontRef idx="minor">
-          <a:schemeClr val="lt1"/>
-        </a:fontRef>
-      </dsp:style>
-      <dsp:txBody>
-        <a:bodyPr spcFirstLastPara="0" vert="horz" wrap="square" lIns="199136" tIns="113792" rIns="199136" bIns="113792" numCol="1" spcCol="1270" anchor="ctr" anchorCtr="0">
-          <a:noAutofit/>
-        </a:bodyPr>
-        <a:lstStyle/>
-        <a:p>
-          <a:pPr marL="0" lvl="0" indent="0" algn="ctr" defTabSz="1244600">
-            <a:lnSpc>
-              <a:spcPct val="90000"/>
-            </a:lnSpc>
-            <a:spcBef>
-              <a:spcPct val="0"/>
-            </a:spcBef>
-            <a:spcAft>
-              <a:spcPct val="35000"/>
-            </a:spcAft>
-            <a:buNone/>
-          </a:pPr>
-          <a:r>
-            <a:rPr lang="fr-FR" sz="2800" b="1" kern="1200"/>
-            <a:t>CREATE</a:t>
-          </a:r>
-          <a:endParaRPr lang="fr-FR" sz="2800" b="1" kern="1200" dirty="0"/>
-        </a:p>
-      </dsp:txBody>
-      <dsp:txXfrm>
-        <a:off x="1710" y="1394113"/>
-        <a:ext cx="2701200" cy="597195"/>
-      </dsp:txXfrm>
-    </dsp:sp>
-    <dsp:sp modelId="{402A4689-5F82-4095-B160-6ED5D0524EAE}">
-      <dsp:nvSpPr>
-        <dsp:cNvPr id="0" name=""/>
-        <dsp:cNvSpPr/>
-      </dsp:nvSpPr>
-      <dsp:spPr>
-        <a:xfrm>
-          <a:off x="0" y="1984969"/>
-          <a:ext cx="2701200" cy="2034044"/>
-        </a:xfrm>
-        <a:prstGeom prst="rect">
-          <a:avLst/>
-        </a:prstGeom>
-        <a:solidFill>
-          <a:schemeClr val="accent2">
-            <a:tint val="40000"/>
-            <a:alpha val="90000"/>
-            <a:hueOff val="0"/>
-            <a:satOff val="0"/>
-            <a:lumOff val="0"/>
-            <a:alphaOff val="0"/>
-          </a:schemeClr>
-        </a:solidFill>
-        <a:ln w="12700" cap="rnd" cmpd="sng" algn="ctr">
-          <a:solidFill>
-            <a:schemeClr val="accent2">
-              <a:tint val="40000"/>
-              <a:alpha val="90000"/>
-              <a:hueOff val="0"/>
-              <a:satOff val="0"/>
-              <a:lumOff val="0"/>
-              <a:alphaOff val="0"/>
-            </a:schemeClr>
-          </a:solidFill>
-          <a:prstDash val="solid"/>
-        </a:ln>
-        <a:effectLst>
-          <a:outerShdw blurRad="38100" dist="25400" dir="5400000" rotWithShape="0">
-            <a:srgbClr val="000000">
-              <a:alpha val="55000"/>
-            </a:srgbClr>
-          </a:outerShdw>
-        </a:effectLst>
-      </dsp:spPr>
-      <dsp:style>
-        <a:lnRef idx="1">
-          <a:scrgbClr r="0" g="0" b="0"/>
-        </a:lnRef>
-        <a:fillRef idx="1">
-          <a:scrgbClr r="0" g="0" b="0"/>
-        </a:fillRef>
-        <a:effectRef idx="2">
-          <a:scrgbClr r="0" g="0" b="0"/>
-        </a:effectRef>
-        <a:fontRef idx="minor"/>
-      </dsp:style>
-      <dsp:txBody>
-        <a:bodyPr spcFirstLastPara="0" vert="horz" wrap="square" lIns="96012" tIns="96012" rIns="128016" bIns="144018" numCol="1" spcCol="1270" anchor="t" anchorCtr="0">
-          <a:noAutofit/>
-        </a:bodyPr>
-        <a:lstStyle/>
-        <a:p>
-          <a:pPr marL="171450" lvl="1" indent="-171450" algn="ctr" defTabSz="800100">
-            <a:lnSpc>
-              <a:spcPct val="90000"/>
-            </a:lnSpc>
-            <a:spcBef>
-              <a:spcPct val="0"/>
-            </a:spcBef>
-            <a:spcAft>
-              <a:spcPct val="15000"/>
-            </a:spcAft>
-            <a:buNone/>
-          </a:pPr>
-          <a:r>
-            <a:rPr lang="fr-FR" sz="1800" b="1" kern="1200" dirty="0" err="1"/>
-            <a:t>create_one_document</a:t>
-          </a:r>
-          <a:r>
-            <a:rPr lang="fr-FR" sz="1800" b="1" kern="1200" dirty="0"/>
-            <a:t>()
-</a:t>
-          </a:r>
-          <a:r>
-            <a:rPr lang="fr-FR" sz="1800" b="1" kern="1200" dirty="0" err="1"/>
-            <a:t>create_documents</a:t>
-          </a:r>
-          <a:r>
-            <a:rPr lang="fr-FR" sz="1800" b="1" kern="1200" dirty="0"/>
-            <a:t>()</a:t>
-          </a:r>
-        </a:p>
-        <a:p>
-          <a:pPr marL="171450" lvl="1" indent="-171450" algn="ctr" defTabSz="800100">
-            <a:lnSpc>
-              <a:spcPct val="90000"/>
-            </a:lnSpc>
-            <a:spcBef>
-              <a:spcPct val="0"/>
-            </a:spcBef>
-            <a:spcAft>
-              <a:spcPct val="15000"/>
-            </a:spcAft>
-            <a:buChar char="•"/>
-          </a:pPr>
-          <a:endParaRPr lang="fr-FR" sz="1800" b="1" kern="1200" dirty="0"/>
-        </a:p>
-        <a:p>
-          <a:pPr marL="171450" lvl="1" indent="-171450" algn="ctr" defTabSz="800100">
-            <a:lnSpc>
-              <a:spcPct val="90000"/>
-            </a:lnSpc>
-            <a:spcBef>
-              <a:spcPct val="0"/>
-            </a:spcBef>
-            <a:spcAft>
-              <a:spcPct val="15000"/>
-            </a:spcAft>
-            <a:buFontTx/>
-            <a:buNone/>
-          </a:pPr>
-          <a:r>
-            <a:rPr lang="fr-FR" sz="1800" b="1" kern="1200" dirty="0"/>
-            <a:t>Insertion d'un ou plusieurs documents dans la collection</a:t>
-          </a:r>
-        </a:p>
-        <a:p>
-          <a:pPr marL="171450" lvl="1" indent="-171450" algn="l" defTabSz="800100">
-            <a:lnSpc>
-              <a:spcPct val="90000"/>
-            </a:lnSpc>
-            <a:spcBef>
-              <a:spcPct val="0"/>
-            </a:spcBef>
-            <a:spcAft>
-              <a:spcPct val="15000"/>
-            </a:spcAft>
-            <a:buChar char="•"/>
-          </a:pPr>
-          <a:endParaRPr lang="fr-FR" sz="1800" b="1" kern="1200" dirty="0"/>
-        </a:p>
-      </dsp:txBody>
-      <dsp:txXfrm>
-        <a:off x="0" y="1984969"/>
-        <a:ext cx="2701200" cy="2034044"/>
-      </dsp:txXfrm>
-    </dsp:sp>
-    <dsp:sp modelId="{E287B113-DC8F-4125-BDA9-760A4D0972E0}">
-      <dsp:nvSpPr>
-        <dsp:cNvPr id="0" name=""/>
-        <dsp:cNvSpPr/>
-      </dsp:nvSpPr>
-      <dsp:spPr>
-        <a:xfrm>
-          <a:off x="3083861" y="1381614"/>
-          <a:ext cx="2701200" cy="597195"/>
-        </a:xfrm>
-        <a:prstGeom prst="rect">
-          <a:avLst/>
-        </a:prstGeom>
-        <a:gradFill rotWithShape="0">
-          <a:gsLst>
-            <a:gs pos="0">
-              <a:schemeClr val="accent3">
-                <a:hueOff val="0"/>
-                <a:satOff val="0"/>
-                <a:lumOff val="0"/>
-                <a:alphaOff val="0"/>
-                <a:tint val="98000"/>
-                <a:lumMod val="110000"/>
-              </a:schemeClr>
-            </a:gs>
-            <a:gs pos="84000">
-              <a:schemeClr val="accent3">
-                <a:hueOff val="0"/>
-                <a:satOff val="0"/>
-                <a:lumOff val="0"/>
-                <a:alphaOff val="0"/>
-                <a:shade val="90000"/>
-                <a:lumMod val="88000"/>
-              </a:schemeClr>
-            </a:gs>
-          </a:gsLst>
-          <a:lin ang="5400000" scaled="0"/>
-        </a:gradFill>
-        <a:ln w="12700" cap="rnd" cmpd="sng" algn="ctr">
-          <a:solidFill>
-            <a:schemeClr val="accent3">
-              <a:hueOff val="0"/>
-              <a:satOff val="0"/>
-              <a:lumOff val="0"/>
-              <a:alphaOff val="0"/>
-            </a:schemeClr>
-          </a:solidFill>
-          <a:prstDash val="solid"/>
-        </a:ln>
-        <a:effectLst>
-          <a:outerShdw blurRad="88900" dist="38100" dir="5040000" rotWithShape="0">
-            <a:srgbClr val="000000">
-              <a:alpha val="60000"/>
-            </a:srgbClr>
-          </a:outerShdw>
-        </a:effectLst>
-        <a:scene3d>
-          <a:camera prst="orthographicFront">
-            <a:rot lat="0" lon="0" rev="0"/>
-          </a:camera>
-          <a:lightRig rig="threePt" dir="tl">
-            <a:rot lat="0" lon="0" rev="1200000"/>
-          </a:lightRig>
-        </a:scene3d>
-        <a:sp3d>
-          <a:bevelT w="38100" h="50800"/>
-        </a:sp3d>
-      </dsp:spPr>
-      <dsp:style>
-        <a:lnRef idx="1">
-          <a:scrgbClr r="0" g="0" b="0"/>
-        </a:lnRef>
-        <a:fillRef idx="3">
-          <a:scrgbClr r="0" g="0" b="0"/>
-        </a:fillRef>
-        <a:effectRef idx="3">
-          <a:scrgbClr r="0" g="0" b="0"/>
-        </a:effectRef>
-        <a:fontRef idx="minor">
-          <a:schemeClr val="lt1"/>
-        </a:fontRef>
-      </dsp:style>
-      <dsp:txBody>
-        <a:bodyPr spcFirstLastPara="0" vert="horz" wrap="square" lIns="199136" tIns="113792" rIns="199136" bIns="113792" numCol="1" spcCol="1270" anchor="ctr" anchorCtr="0">
-          <a:noAutofit/>
-        </a:bodyPr>
-        <a:lstStyle/>
-        <a:p>
-          <a:pPr marL="0" lvl="0" indent="0" algn="ctr" defTabSz="1244600">
-            <a:lnSpc>
-              <a:spcPct val="90000"/>
-            </a:lnSpc>
-            <a:spcBef>
-              <a:spcPct val="0"/>
-            </a:spcBef>
-            <a:spcAft>
-              <a:spcPct val="35000"/>
-            </a:spcAft>
-            <a:buNone/>
-          </a:pPr>
-          <a:r>
-            <a:rPr lang="fr-FR" sz="2800" b="1" kern="1200"/>
-            <a:t>READ</a:t>
-          </a:r>
-          <a:endParaRPr lang="fr-FR" sz="2800" b="1" kern="1200" dirty="0"/>
-        </a:p>
-      </dsp:txBody>
-      <dsp:txXfrm>
-        <a:off x="3083861" y="1381614"/>
-        <a:ext cx="2701200" cy="597195"/>
-      </dsp:txXfrm>
-    </dsp:sp>
-    <dsp:sp modelId="{F4B86B3A-2E38-4840-A58F-760A1508EC85}">
-      <dsp:nvSpPr>
-        <dsp:cNvPr id="0" name=""/>
-        <dsp:cNvSpPr/>
-      </dsp:nvSpPr>
-      <dsp:spPr>
-        <a:xfrm>
-          <a:off x="3083861" y="1990908"/>
-          <a:ext cx="2701200" cy="2034044"/>
-        </a:xfrm>
-        <a:prstGeom prst="rect">
-          <a:avLst/>
-        </a:prstGeom>
-        <a:solidFill>
-          <a:schemeClr val="accent3">
-            <a:tint val="40000"/>
-            <a:alpha val="90000"/>
-            <a:hueOff val="0"/>
-            <a:satOff val="0"/>
-            <a:lumOff val="0"/>
-            <a:alphaOff val="0"/>
-          </a:schemeClr>
-        </a:solidFill>
-        <a:ln w="12700" cap="rnd" cmpd="sng" algn="ctr">
-          <a:solidFill>
-            <a:schemeClr val="accent3">
-              <a:tint val="40000"/>
-              <a:alpha val="90000"/>
-              <a:hueOff val="0"/>
-              <a:satOff val="0"/>
-              <a:lumOff val="0"/>
-              <a:alphaOff val="0"/>
-            </a:schemeClr>
-          </a:solidFill>
-          <a:prstDash val="solid"/>
-        </a:ln>
-        <a:effectLst>
-          <a:outerShdw blurRad="38100" dist="25400" dir="5400000" rotWithShape="0">
-            <a:srgbClr val="000000">
-              <a:alpha val="55000"/>
-            </a:srgbClr>
-          </a:outerShdw>
-        </a:effectLst>
-      </dsp:spPr>
-      <dsp:style>
-        <a:lnRef idx="1">
-          <a:scrgbClr r="0" g="0" b="0"/>
-        </a:lnRef>
-        <a:fillRef idx="1">
-          <a:scrgbClr r="0" g="0" b="0"/>
-        </a:fillRef>
-        <a:effectRef idx="2">
-          <a:scrgbClr r="0" g="0" b="0"/>
-        </a:effectRef>
-        <a:fontRef idx="minor"/>
-      </dsp:style>
-      <dsp:txBody>
-        <a:bodyPr spcFirstLastPara="0" vert="horz" wrap="square" lIns="96012" tIns="96012" rIns="128016" bIns="144018" numCol="1" spcCol="1270" anchor="t" anchorCtr="0">
-          <a:noAutofit/>
-        </a:bodyPr>
-        <a:lstStyle/>
-        <a:p>
-          <a:pPr marL="171450" lvl="1" indent="-171450" algn="ctr" defTabSz="800100">
-            <a:lnSpc>
-              <a:spcPct val="90000"/>
-            </a:lnSpc>
-            <a:spcBef>
-              <a:spcPct val="0"/>
-            </a:spcBef>
-            <a:spcAft>
-              <a:spcPct val="15000"/>
-            </a:spcAft>
-            <a:buNone/>
-          </a:pPr>
-          <a:r>
-            <a:rPr lang="fr-FR" sz="1800" b="1" kern="1200" dirty="0" err="1">
-              <a:latin typeface="+mn-lt"/>
-              <a:ea typeface="Calibri" pitchFamily="34" charset="-122"/>
-              <a:cs typeface="Calibri" pitchFamily="34" charset="-120"/>
-            </a:rPr>
-            <a:t>read_one_document</a:t>
-          </a:r>
-          <a:r>
-            <a:rPr lang="fr-FR" sz="1800" b="1" kern="1200" dirty="0">
-              <a:latin typeface="+mn-lt"/>
-              <a:ea typeface="Calibri" pitchFamily="34" charset="-122"/>
-              <a:cs typeface="Calibri" pitchFamily="34" charset="-120"/>
-            </a:rPr>
-            <a:t>()
-</a:t>
-          </a:r>
-          <a:r>
-            <a:rPr lang="fr-FR" sz="1800" b="1" kern="1200" dirty="0" err="1">
-              <a:latin typeface="+mn-lt"/>
-              <a:ea typeface="Calibri" pitchFamily="34" charset="-122"/>
-              <a:cs typeface="Calibri" pitchFamily="34" charset="-120"/>
-            </a:rPr>
-            <a:t>read_documents</a:t>
-          </a:r>
-          <a:r>
-            <a:rPr lang="fr-FR" sz="1800" b="1" kern="1200" dirty="0">
-              <a:latin typeface="+mn-lt"/>
-              <a:ea typeface="Calibri" pitchFamily="34" charset="-122"/>
-              <a:cs typeface="Calibri" pitchFamily="34" charset="-120"/>
-            </a:rPr>
-            <a:t>()</a:t>
-          </a:r>
-          <a:endParaRPr lang="fr-FR" sz="1800" kern="1200" dirty="0">
-            <a:latin typeface="+mn-lt"/>
-          </a:endParaRPr>
-        </a:p>
-        <a:p>
-          <a:pPr marL="171450" lvl="1" indent="-171450" algn="ctr" defTabSz="800100">
-            <a:lnSpc>
-              <a:spcPct val="90000"/>
-            </a:lnSpc>
-            <a:spcBef>
-              <a:spcPct val="0"/>
-            </a:spcBef>
-            <a:spcAft>
-              <a:spcPct val="15000"/>
-            </a:spcAft>
-            <a:buNone/>
-          </a:pPr>
-          <a:r>
-            <a:rPr lang="fr-FR" sz="1800" b="1" kern="1200" dirty="0">
-              <a:latin typeface="+mn-lt"/>
-              <a:ea typeface="Calibri" pitchFamily="34" charset="-122"/>
-              <a:cs typeface="Calibri" pitchFamily="34" charset="-120"/>
-            </a:rPr>
-            <a:t>
-Lecture avec filtres, champs et limite</a:t>
-          </a:r>
-          <a:endParaRPr lang="fr-FR" sz="1800" kern="1200" dirty="0">
-            <a:latin typeface="+mn-lt"/>
-          </a:endParaRPr>
-        </a:p>
-        <a:p>
-          <a:pPr marL="171450" lvl="1" indent="-171450" algn="l" defTabSz="800100">
-            <a:lnSpc>
-              <a:spcPct val="90000"/>
-            </a:lnSpc>
-            <a:spcBef>
-              <a:spcPct val="0"/>
-            </a:spcBef>
-            <a:spcAft>
-              <a:spcPct val="15000"/>
-            </a:spcAft>
-            <a:buChar char="•"/>
-          </a:pPr>
-          <a:endParaRPr lang="fr-FR" sz="1800" b="1" kern="1200" dirty="0">
-            <a:latin typeface="+mn-lt"/>
-            <a:ea typeface="Calibri" pitchFamily="34" charset="-122"/>
-            <a:cs typeface="Calibri" pitchFamily="34" charset="-120"/>
-          </a:endParaRPr>
-        </a:p>
-      </dsp:txBody>
-      <dsp:txXfrm>
-        <a:off x="3083861" y="1990908"/>
-        <a:ext cx="2701200" cy="2034044"/>
-      </dsp:txXfrm>
-    </dsp:sp>
-    <dsp:sp modelId="{249659AD-BC72-4673-AF20-1C17D5591BAB}">
-      <dsp:nvSpPr>
-        <dsp:cNvPr id="0" name=""/>
-        <dsp:cNvSpPr/>
-      </dsp:nvSpPr>
-      <dsp:spPr>
-        <a:xfrm>
-          <a:off x="6163230" y="1393713"/>
-          <a:ext cx="2701200" cy="597195"/>
-        </a:xfrm>
-        <a:prstGeom prst="rect">
-          <a:avLst/>
-        </a:prstGeom>
-        <a:gradFill rotWithShape="0">
-          <a:gsLst>
-            <a:gs pos="0">
-              <a:schemeClr val="accent4">
-                <a:hueOff val="0"/>
-                <a:satOff val="0"/>
-                <a:lumOff val="0"/>
-                <a:alphaOff val="0"/>
-                <a:tint val="98000"/>
-                <a:lumMod val="110000"/>
-              </a:schemeClr>
-            </a:gs>
-            <a:gs pos="84000">
-              <a:schemeClr val="accent4">
-                <a:hueOff val="0"/>
-                <a:satOff val="0"/>
-                <a:lumOff val="0"/>
-                <a:alphaOff val="0"/>
-                <a:shade val="90000"/>
-                <a:lumMod val="88000"/>
-              </a:schemeClr>
-            </a:gs>
-          </a:gsLst>
-          <a:lin ang="5400000" scaled="0"/>
-        </a:gradFill>
-        <a:ln w="12700" cap="rnd" cmpd="sng" algn="ctr">
-          <a:solidFill>
-            <a:schemeClr val="accent4">
-              <a:hueOff val="0"/>
-              <a:satOff val="0"/>
-              <a:lumOff val="0"/>
-              <a:alphaOff val="0"/>
-            </a:schemeClr>
-          </a:solidFill>
-          <a:prstDash val="solid"/>
-        </a:ln>
-        <a:effectLst>
-          <a:outerShdw blurRad="88900" dist="38100" dir="5040000" rotWithShape="0">
-            <a:srgbClr val="000000">
-              <a:alpha val="60000"/>
-            </a:srgbClr>
-          </a:outerShdw>
-        </a:effectLst>
-        <a:scene3d>
-          <a:camera prst="orthographicFront">
-            <a:rot lat="0" lon="0" rev="0"/>
-          </a:camera>
-          <a:lightRig rig="threePt" dir="tl">
-            <a:rot lat="0" lon="0" rev="1200000"/>
-          </a:lightRig>
-        </a:scene3d>
-        <a:sp3d>
-          <a:bevelT w="38100" h="50800"/>
-        </a:sp3d>
-      </dsp:spPr>
-      <dsp:style>
-        <a:lnRef idx="1">
-          <a:scrgbClr r="0" g="0" b="0"/>
-        </a:lnRef>
-        <a:fillRef idx="3">
-          <a:scrgbClr r="0" g="0" b="0"/>
-        </a:fillRef>
-        <a:effectRef idx="3">
-          <a:scrgbClr r="0" g="0" b="0"/>
-        </a:effectRef>
-        <a:fontRef idx="minor">
-          <a:schemeClr val="lt1"/>
-        </a:fontRef>
-      </dsp:style>
-      <dsp:txBody>
-        <a:bodyPr spcFirstLastPara="0" vert="horz" wrap="square" lIns="199136" tIns="113792" rIns="199136" bIns="113792" numCol="1" spcCol="1270" anchor="ctr" anchorCtr="0">
-          <a:noAutofit/>
-        </a:bodyPr>
-        <a:lstStyle/>
-        <a:p>
-          <a:pPr marL="0" lvl="0" indent="0" algn="ctr" defTabSz="1244600">
-            <a:lnSpc>
-              <a:spcPct val="90000"/>
-            </a:lnSpc>
-            <a:spcBef>
-              <a:spcPct val="0"/>
-            </a:spcBef>
-            <a:spcAft>
-              <a:spcPct val="35000"/>
-            </a:spcAft>
-            <a:buNone/>
-          </a:pPr>
-          <a:r>
-            <a:rPr lang="fr-FR" sz="2800" b="1" kern="1200"/>
-            <a:t>UPDATE</a:t>
-          </a:r>
-          <a:endParaRPr lang="fr-FR" sz="2800" b="1" kern="1200" dirty="0"/>
-        </a:p>
-      </dsp:txBody>
-      <dsp:txXfrm>
-        <a:off x="6163230" y="1393713"/>
-        <a:ext cx="2701200" cy="597195"/>
-      </dsp:txXfrm>
-    </dsp:sp>
-    <dsp:sp modelId="{F46CA606-2E3E-48EA-AE41-8449EE4FB6B7}">
-      <dsp:nvSpPr>
-        <dsp:cNvPr id="0" name=""/>
-        <dsp:cNvSpPr/>
-      </dsp:nvSpPr>
-      <dsp:spPr>
-        <a:xfrm>
-          <a:off x="6163230" y="1990908"/>
-          <a:ext cx="2701200" cy="2034044"/>
-        </a:xfrm>
-        <a:prstGeom prst="rect">
-          <a:avLst/>
-        </a:prstGeom>
-        <a:solidFill>
-          <a:schemeClr val="accent4">
-            <a:tint val="40000"/>
-            <a:alpha val="90000"/>
-            <a:hueOff val="0"/>
-            <a:satOff val="0"/>
-            <a:lumOff val="0"/>
-            <a:alphaOff val="0"/>
-          </a:schemeClr>
-        </a:solidFill>
-        <a:ln w="12700" cap="rnd" cmpd="sng" algn="ctr">
-          <a:solidFill>
-            <a:schemeClr val="accent4">
-              <a:tint val="40000"/>
-              <a:alpha val="90000"/>
-              <a:hueOff val="0"/>
-              <a:satOff val="0"/>
-              <a:lumOff val="0"/>
-              <a:alphaOff val="0"/>
-            </a:schemeClr>
-          </a:solidFill>
-          <a:prstDash val="solid"/>
-        </a:ln>
-        <a:effectLst>
-          <a:outerShdw blurRad="38100" dist="25400" dir="5400000" rotWithShape="0">
-            <a:srgbClr val="000000">
-              <a:alpha val="55000"/>
-            </a:srgbClr>
-          </a:outerShdw>
-        </a:effectLst>
-      </dsp:spPr>
-      <dsp:style>
-        <a:lnRef idx="1">
-          <a:scrgbClr r="0" g="0" b="0"/>
-        </a:lnRef>
-        <a:fillRef idx="1">
-          <a:scrgbClr r="0" g="0" b="0"/>
-        </a:fillRef>
-        <a:effectRef idx="2">
-          <a:scrgbClr r="0" g="0" b="0"/>
-        </a:effectRef>
-        <a:fontRef idx="minor"/>
-      </dsp:style>
-      <dsp:txBody>
-        <a:bodyPr spcFirstLastPara="0" vert="horz" wrap="square" lIns="96012" tIns="96012" rIns="128016" bIns="144018" numCol="1" spcCol="1270" anchor="t" anchorCtr="0">
-          <a:noAutofit/>
-        </a:bodyPr>
-        <a:lstStyle/>
-        <a:p>
-          <a:pPr marL="171450" lvl="1" indent="-171450" algn="ctr" defTabSz="800100">
-            <a:lnSpc>
-              <a:spcPct val="90000"/>
-            </a:lnSpc>
-            <a:spcBef>
-              <a:spcPct val="0"/>
-            </a:spcBef>
-            <a:spcAft>
-              <a:spcPct val="15000"/>
-            </a:spcAft>
-            <a:buNone/>
-          </a:pPr>
-          <a:r>
-            <a:rPr lang="fr-FR" sz="1800" b="1" kern="1200" dirty="0" err="1">
-              <a:latin typeface="Franklin Gothic Book" panose="020B0502020104020203"/>
-              <a:ea typeface="+mn-ea"/>
-              <a:cs typeface="+mn-cs"/>
-            </a:rPr>
-            <a:t>update_one_document</a:t>
-          </a:r>
-          <a:r>
-            <a:rPr lang="fr-FR" sz="1800" b="1" kern="1200" dirty="0">
-              <a:latin typeface="Franklin Gothic Book" panose="020B0502020104020203"/>
-              <a:ea typeface="+mn-ea"/>
-              <a:cs typeface="+mn-cs"/>
-            </a:rPr>
-            <a:t>()
-</a:t>
-          </a:r>
-          <a:r>
-            <a:rPr lang="fr-FR" sz="1800" b="1" kern="1200" dirty="0" err="1">
-              <a:latin typeface="Franklin Gothic Book" panose="020B0502020104020203"/>
-              <a:ea typeface="+mn-ea"/>
-              <a:cs typeface="+mn-cs"/>
-            </a:rPr>
-            <a:t>update_documents</a:t>
-          </a:r>
-          <a:r>
-            <a:rPr lang="fr-FR" sz="1800" b="1" kern="1200" dirty="0">
-              <a:latin typeface="Franklin Gothic Book" panose="020B0502020104020203"/>
-              <a:ea typeface="+mn-ea"/>
-              <a:cs typeface="+mn-cs"/>
-            </a:rPr>
-            <a:t>()
-Mise à jour d'un ou plusieurs documents</a:t>
-          </a:r>
-        </a:p>
-        <a:p>
-          <a:pPr marL="171450" lvl="1" indent="-171450" algn="l" defTabSz="800100">
-            <a:lnSpc>
-              <a:spcPct val="90000"/>
-            </a:lnSpc>
-            <a:spcBef>
-              <a:spcPct val="0"/>
-            </a:spcBef>
-            <a:spcAft>
-              <a:spcPct val="15000"/>
-            </a:spcAft>
-            <a:buChar char="•"/>
-          </a:pPr>
-          <a:endParaRPr lang="fr-FR" sz="1800" b="1" kern="1200" dirty="0">
-            <a:latin typeface="Franklin Gothic Book" panose="020B0502020104020203"/>
-            <a:ea typeface="+mn-ea"/>
-            <a:cs typeface="+mn-cs"/>
-          </a:endParaRPr>
-        </a:p>
-      </dsp:txBody>
-      <dsp:txXfrm>
-        <a:off x="6163230" y="1990908"/>
-        <a:ext cx="2701200" cy="2034044"/>
-      </dsp:txXfrm>
-    </dsp:sp>
-    <dsp:sp modelId="{F2494731-0318-4D19-A1A8-09C210E1E33B}">
-      <dsp:nvSpPr>
-        <dsp:cNvPr id="0" name=""/>
-        <dsp:cNvSpPr/>
-      </dsp:nvSpPr>
-      <dsp:spPr>
-        <a:xfrm>
-          <a:off x="9242598" y="1393713"/>
-          <a:ext cx="2701200" cy="597195"/>
-        </a:xfrm>
-        <a:prstGeom prst="rect">
-          <a:avLst/>
-        </a:prstGeom>
-        <a:gradFill rotWithShape="0">
-          <a:gsLst>
-            <a:gs pos="0">
-              <a:schemeClr val="accent5">
-                <a:hueOff val="0"/>
-                <a:satOff val="0"/>
-                <a:lumOff val="0"/>
-                <a:alphaOff val="0"/>
-                <a:tint val="98000"/>
-                <a:lumMod val="110000"/>
-              </a:schemeClr>
-            </a:gs>
-            <a:gs pos="84000">
-              <a:schemeClr val="accent5">
-                <a:hueOff val="0"/>
-                <a:satOff val="0"/>
-                <a:lumOff val="0"/>
-                <a:alphaOff val="0"/>
-                <a:shade val="90000"/>
-                <a:lumMod val="88000"/>
-              </a:schemeClr>
-            </a:gs>
-          </a:gsLst>
-          <a:lin ang="5400000" scaled="0"/>
-        </a:gradFill>
-        <a:ln w="12700" cap="rnd" cmpd="sng" algn="ctr">
-          <a:solidFill>
-            <a:schemeClr val="accent5">
-              <a:hueOff val="0"/>
-              <a:satOff val="0"/>
-              <a:lumOff val="0"/>
-              <a:alphaOff val="0"/>
-            </a:schemeClr>
-          </a:solidFill>
-          <a:prstDash val="solid"/>
-        </a:ln>
-        <a:effectLst>
-          <a:outerShdw blurRad="88900" dist="38100" dir="5040000" rotWithShape="0">
-            <a:srgbClr val="000000">
-              <a:alpha val="60000"/>
-            </a:srgbClr>
-          </a:outerShdw>
-        </a:effectLst>
-        <a:scene3d>
-          <a:camera prst="orthographicFront">
-            <a:rot lat="0" lon="0" rev="0"/>
-          </a:camera>
-          <a:lightRig rig="threePt" dir="tl">
-            <a:rot lat="0" lon="0" rev="1200000"/>
-          </a:lightRig>
-        </a:scene3d>
-        <a:sp3d>
-          <a:bevelT w="38100" h="50800"/>
-        </a:sp3d>
-      </dsp:spPr>
-      <dsp:style>
-        <a:lnRef idx="1">
-          <a:scrgbClr r="0" g="0" b="0"/>
-        </a:lnRef>
-        <a:fillRef idx="3">
-          <a:scrgbClr r="0" g="0" b="0"/>
-        </a:fillRef>
-        <a:effectRef idx="3">
-          <a:scrgbClr r="0" g="0" b="0"/>
-        </a:effectRef>
-        <a:fontRef idx="minor">
-          <a:schemeClr val="lt1"/>
-        </a:fontRef>
-      </dsp:style>
-      <dsp:txBody>
-        <a:bodyPr spcFirstLastPara="0" vert="horz" wrap="square" lIns="199136" tIns="113792" rIns="199136" bIns="113792" numCol="1" spcCol="1270" anchor="ctr" anchorCtr="0">
-          <a:noAutofit/>
-        </a:bodyPr>
-        <a:lstStyle/>
-        <a:p>
-          <a:pPr marL="0" lvl="0" indent="0" algn="ctr" defTabSz="1244600">
-            <a:lnSpc>
-              <a:spcPct val="90000"/>
-            </a:lnSpc>
-            <a:spcBef>
-              <a:spcPct val="0"/>
-            </a:spcBef>
-            <a:spcAft>
-              <a:spcPct val="35000"/>
-            </a:spcAft>
-            <a:buFontTx/>
-            <a:buNone/>
-          </a:pPr>
-          <a:r>
-            <a:rPr lang="fr-FR" sz="2800" b="1" kern="1200">
-              <a:latin typeface="Franklin Gothic Book" panose="020B0502020104020203"/>
-              <a:ea typeface="+mn-ea"/>
-              <a:cs typeface="+mn-cs"/>
-            </a:rPr>
-            <a:t>DELETE</a:t>
-          </a:r>
-          <a:endParaRPr lang="fr-FR" sz="2800" b="1" kern="1200" dirty="0">
-            <a:latin typeface="Franklin Gothic Book" panose="020B0502020104020203"/>
-            <a:ea typeface="+mn-ea"/>
-            <a:cs typeface="+mn-cs"/>
-          </a:endParaRPr>
-        </a:p>
-      </dsp:txBody>
-      <dsp:txXfrm>
-        <a:off x="9242598" y="1393713"/>
-        <a:ext cx="2701200" cy="597195"/>
-      </dsp:txXfrm>
-    </dsp:sp>
-    <dsp:sp modelId="{68C50029-C252-412E-ADA9-57A106DCDCAF}">
-      <dsp:nvSpPr>
-        <dsp:cNvPr id="0" name=""/>
-        <dsp:cNvSpPr/>
-      </dsp:nvSpPr>
-      <dsp:spPr>
-        <a:xfrm>
-          <a:off x="9242598" y="1990908"/>
-          <a:ext cx="2701200" cy="2034044"/>
-        </a:xfrm>
-        <a:prstGeom prst="rect">
-          <a:avLst/>
-        </a:prstGeom>
-        <a:solidFill>
-          <a:schemeClr val="accent5">
-            <a:tint val="40000"/>
-            <a:alpha val="90000"/>
-            <a:hueOff val="0"/>
-            <a:satOff val="0"/>
-            <a:lumOff val="0"/>
-            <a:alphaOff val="0"/>
-          </a:schemeClr>
-        </a:solidFill>
-        <a:ln w="12700" cap="rnd" cmpd="sng" algn="ctr">
-          <a:solidFill>
-            <a:schemeClr val="accent5">
-              <a:tint val="40000"/>
-              <a:alpha val="90000"/>
-              <a:hueOff val="0"/>
-              <a:satOff val="0"/>
-              <a:lumOff val="0"/>
-              <a:alphaOff val="0"/>
-            </a:schemeClr>
-          </a:solidFill>
-          <a:prstDash val="solid"/>
-        </a:ln>
-        <a:effectLst>
-          <a:outerShdw blurRad="38100" dist="25400" dir="5400000" rotWithShape="0">
-            <a:srgbClr val="000000">
-              <a:alpha val="55000"/>
-            </a:srgbClr>
-          </a:outerShdw>
-        </a:effectLst>
-      </dsp:spPr>
-      <dsp:style>
-        <a:lnRef idx="1">
-          <a:scrgbClr r="0" g="0" b="0"/>
-        </a:lnRef>
-        <a:fillRef idx="1">
-          <a:scrgbClr r="0" g="0" b="0"/>
-        </a:fillRef>
-        <a:effectRef idx="2">
-          <a:scrgbClr r="0" g="0" b="0"/>
-        </a:effectRef>
-        <a:fontRef idx="minor"/>
-      </dsp:style>
-      <dsp:txBody>
-        <a:bodyPr spcFirstLastPara="0" vert="horz" wrap="square" lIns="101346" tIns="101346" rIns="135128" bIns="152019" numCol="1" spcCol="1270" anchor="t" anchorCtr="0">
-          <a:noAutofit/>
-        </a:bodyPr>
-        <a:lstStyle/>
-        <a:p>
-          <a:pPr marL="171450" lvl="1" indent="-171450" algn="ctr" defTabSz="844550">
-            <a:lnSpc>
-              <a:spcPct val="90000"/>
-            </a:lnSpc>
-            <a:spcBef>
-              <a:spcPct val="0"/>
-            </a:spcBef>
-            <a:spcAft>
-              <a:spcPct val="15000"/>
-            </a:spcAft>
-            <a:buNone/>
-          </a:pPr>
-          <a:r>
-            <a:rPr lang="fr-FR" sz="1900" b="1" kern="1200" dirty="0" err="1"/>
-            <a:t>delete_one_document</a:t>
-          </a:r>
-          <a:r>
-            <a:rPr lang="fr-FR" sz="1900" b="1" kern="1200" dirty="0"/>
-            <a:t>()
-</a:t>
-          </a:r>
-          <a:r>
-            <a:rPr lang="fr-FR" sz="1900" b="1" kern="1200" dirty="0" err="1"/>
-            <a:t>delete_documents</a:t>
-          </a:r>
-          <a:r>
-            <a:rPr lang="fr-FR" sz="1900" b="1" kern="1200" dirty="0"/>
-            <a:t>()
-</a:t>
-          </a:r>
-          <a:r>
-            <a:rPr lang="fr-FR" sz="1900" b="1" kern="1200" dirty="0" err="1"/>
-            <a:t>delete_collection</a:t>
-          </a:r>
-          <a:r>
-            <a:rPr lang="fr-FR" sz="1900" b="1" kern="1200" dirty="0"/>
-            <a:t>()
-Suppression ciblée</a:t>
-          </a:r>
-        </a:p>
-        <a:p>
-          <a:pPr marL="171450" lvl="1" indent="-171450" algn="l" defTabSz="844550">
-            <a:lnSpc>
-              <a:spcPct val="90000"/>
-            </a:lnSpc>
-            <a:spcBef>
-              <a:spcPct val="0"/>
-            </a:spcBef>
-            <a:spcAft>
-              <a:spcPct val="15000"/>
-            </a:spcAft>
-            <a:buChar char="•"/>
-          </a:pPr>
-          <a:endParaRPr lang="fr-FR" sz="1900" kern="1200"/>
-        </a:p>
-      </dsp:txBody>
-      <dsp:txXfrm>
-        <a:off x="9242598" y="1990908"/>
-        <a:ext cx="2701200" cy="2034044"/>
-      </dsp:txXfrm>
-    </dsp:sp>
   </dsp:spTree>
 </dsp:drawing>
 </file>
@@ -27442,300 +23723,6 @@
 </file>
 
 <file path=ppt/diagrams/layout10.xml><?xml version="1.0" encoding="utf-8"?>
-<dgm:layoutDef xmlns:dgm="http://schemas.openxmlformats.org/drawingml/2006/diagram" xmlns:a="http://schemas.openxmlformats.org/drawingml/2006/main" uniqueId="urn:microsoft.com/office/officeart/2005/8/layout/default">
-  <dgm:title val=""/>
-  <dgm:desc val=""/>
-  <dgm:catLst>
-    <dgm:cat type="list" pri="400"/>
-  </dgm:catLst>
-  <dgm:sampData>
-    <dgm:dataModel>
-      <dgm:ptLst>
-        <dgm:pt modelId="0" type="doc"/>
-        <dgm:pt modelId="1">
-          <dgm:prSet phldr="1"/>
-        </dgm:pt>
-        <dgm:pt modelId="2">
-          <dgm:prSet phldr="1"/>
-        </dgm:pt>
-        <dgm:pt modelId="3">
-          <dgm:prSet phldr="1"/>
-        </dgm:pt>
-        <dgm:pt modelId="4">
-          <dgm:prSet phldr="1"/>
-        </dgm:pt>
-        <dgm:pt modelId="5">
-          <dgm:prSet phldr="1"/>
-        </dgm:pt>
-      </dgm:ptLst>
-      <dgm:cxnLst>
-        <dgm:cxn modelId="6" srcId="0" destId="1" srcOrd="0" destOrd="0"/>
-        <dgm:cxn modelId="7" srcId="0" destId="2" srcOrd="1" destOrd="0"/>
-        <dgm:cxn modelId="8" srcId="0" destId="3" srcOrd="2" destOrd="0"/>
-        <dgm:cxn modelId="9" srcId="0" destId="4" srcOrd="3" destOrd="0"/>
-        <dgm:cxn modelId="10" srcId="0" destId="5" srcOrd="4" destOrd="0"/>
-      </dgm:cxnLst>
-      <dgm:bg/>
-      <dgm:whole/>
-    </dgm:dataModel>
-  </dgm:sampData>
-  <dgm:styleData>
-    <dgm:dataModel>
-      <dgm:ptLst>
-        <dgm:pt modelId="0" type="doc"/>
-        <dgm:pt modelId="1"/>
-        <dgm:pt modelId="2"/>
-      </dgm:ptLst>
-      <dgm:cxnLst>
-        <dgm:cxn modelId="3" srcId="0" destId="1" srcOrd="0" destOrd="0"/>
-        <dgm:cxn modelId="4" srcId="0" destId="2" srcOrd="1" destOrd="0"/>
-      </dgm:cxnLst>
-      <dgm:bg/>
-      <dgm:whole/>
-    </dgm:dataModel>
-  </dgm:styleData>
-  <dgm:clrData>
-    <dgm:dataModel>
-      <dgm:ptLst>
-        <dgm:pt modelId="0" type="doc"/>
-        <dgm:pt modelId="1"/>
-        <dgm:pt modelId="2"/>
-        <dgm:pt modelId="3"/>
-        <dgm:pt modelId="4"/>
-        <dgm:pt modelId="5"/>
-        <dgm:pt modelId="6"/>
-      </dgm:ptLst>
-      <dgm:cxnLst>
-        <dgm:cxn modelId="7" srcId="0" destId="1" srcOrd="0" destOrd="0"/>
-        <dgm:cxn modelId="8" srcId="0" destId="2" srcOrd="1" destOrd="0"/>
-        <dgm:cxn modelId="9" srcId="0" destId="3" srcOrd="2" destOrd="0"/>
-        <dgm:cxn modelId="10" srcId="0" destId="4" srcOrd="3" destOrd="0"/>
-        <dgm:cxn modelId="11" srcId="0" destId="5" srcOrd="4" destOrd="0"/>
-        <dgm:cxn modelId="12" srcId="0" destId="6" srcOrd="5" destOrd="0"/>
-      </dgm:cxnLst>
-      <dgm:bg/>
-      <dgm:whole/>
-    </dgm:dataModel>
-  </dgm:clrData>
-  <dgm:layoutNode name="diagram">
-    <dgm:varLst>
-      <dgm:dir/>
-      <dgm:resizeHandles val="exact"/>
-    </dgm:varLst>
-    <dgm:choose name="Name0">
-      <dgm:if name="Name1" func="var" arg="dir" op="equ" val="norm">
-        <dgm:alg type="snake">
-          <dgm:param type="grDir" val="tL"/>
-          <dgm:param type="flowDir" val="row"/>
-          <dgm:param type="contDir" val="sameDir"/>
-          <dgm:param type="off" val="ctr"/>
-        </dgm:alg>
-      </dgm:if>
-      <dgm:else name="Name2">
-        <dgm:alg type="snake">
-          <dgm:param type="grDir" val="tR"/>
-          <dgm:param type="flowDir" val="row"/>
-          <dgm:param type="contDir" val="sameDir"/>
-          <dgm:param type="off" val="ctr"/>
-        </dgm:alg>
-      </dgm:else>
-    </dgm:choose>
-    <dgm:shape xmlns:r="http://schemas.openxmlformats.org/officeDocument/2006/relationships" r:blip="">
-      <dgm:adjLst/>
-    </dgm:shape>
-    <dgm:presOf/>
-    <dgm:constrLst>
-      <dgm:constr type="w" for="ch" forName="node" refType="w"/>
-      <dgm:constr type="h" for="ch" forName="node" refType="w" refFor="ch" refForName="node" fact="0.6"/>
-      <dgm:constr type="w" for="ch" forName="sibTrans" refType="w" refFor="ch" refForName="node" fact="0.1"/>
-      <dgm:constr type="sp" refType="w" refFor="ch" refForName="sibTrans"/>
-      <dgm:constr type="primFontSz" for="ch" forName="node" op="equ" val="65"/>
-    </dgm:constrLst>
-    <dgm:ruleLst/>
-    <dgm:forEach name="Name3" axis="ch" ptType="node">
-      <dgm:layoutNode name="node">
-        <dgm:varLst>
-          <dgm:bulletEnabled val="1"/>
-        </dgm:varLst>
-        <dgm:alg type="tx"/>
-        <dgm:shape xmlns:r="http://schemas.openxmlformats.org/officeDocument/2006/relationships" type="rect" r:blip="">
-          <dgm:adjLst/>
-        </dgm:shape>
-        <dgm:presOf axis="desOrSelf" ptType="node"/>
-        <dgm:constrLst>
-          <dgm:constr type="lMarg" refType="primFontSz" fact="0.3"/>
-          <dgm:constr type="rMarg" refType="primFontSz" fact="0.3"/>
-          <dgm:constr type="tMarg" refType="primFontSz" fact="0.3"/>
-          <dgm:constr type="bMarg" refType="primFontSz" fact="0.3"/>
-        </dgm:constrLst>
-        <dgm:ruleLst>
-          <dgm:rule type="primFontSz" val="5" fact="NaN" max="NaN"/>
-        </dgm:ruleLst>
-      </dgm:layoutNode>
-      <dgm:forEach name="Name4" axis="followSib" ptType="sibTrans" cnt="1">
-        <dgm:layoutNode name="sibTrans">
-          <dgm:alg type="sp"/>
-          <dgm:shape xmlns:r="http://schemas.openxmlformats.org/officeDocument/2006/relationships" r:blip="">
-            <dgm:adjLst/>
-          </dgm:shape>
-          <dgm:presOf/>
-          <dgm:constrLst/>
-          <dgm:ruleLst/>
-        </dgm:layoutNode>
-      </dgm:forEach>
-    </dgm:forEach>
-  </dgm:layoutNode>
-</dgm:layoutDef>
-</file>
-
-<file path=ppt/diagrams/layout11.xml><?xml version="1.0" encoding="utf-8"?>
-<dgm:layoutDef xmlns:dgm="http://schemas.openxmlformats.org/drawingml/2006/diagram" xmlns:a="http://schemas.openxmlformats.org/drawingml/2006/main" uniqueId="urn:microsoft.com/office/officeart/2005/8/layout/default">
-  <dgm:title val=""/>
-  <dgm:desc val=""/>
-  <dgm:catLst>
-    <dgm:cat type="list" pri="400"/>
-  </dgm:catLst>
-  <dgm:sampData>
-    <dgm:dataModel>
-      <dgm:ptLst>
-        <dgm:pt modelId="0" type="doc"/>
-        <dgm:pt modelId="1">
-          <dgm:prSet phldr="1"/>
-        </dgm:pt>
-        <dgm:pt modelId="2">
-          <dgm:prSet phldr="1"/>
-        </dgm:pt>
-        <dgm:pt modelId="3">
-          <dgm:prSet phldr="1"/>
-        </dgm:pt>
-        <dgm:pt modelId="4">
-          <dgm:prSet phldr="1"/>
-        </dgm:pt>
-        <dgm:pt modelId="5">
-          <dgm:prSet phldr="1"/>
-        </dgm:pt>
-      </dgm:ptLst>
-      <dgm:cxnLst>
-        <dgm:cxn modelId="6" srcId="0" destId="1" srcOrd="0" destOrd="0"/>
-        <dgm:cxn modelId="7" srcId="0" destId="2" srcOrd="1" destOrd="0"/>
-        <dgm:cxn modelId="8" srcId="0" destId="3" srcOrd="2" destOrd="0"/>
-        <dgm:cxn modelId="9" srcId="0" destId="4" srcOrd="3" destOrd="0"/>
-        <dgm:cxn modelId="10" srcId="0" destId="5" srcOrd="4" destOrd="0"/>
-      </dgm:cxnLst>
-      <dgm:bg/>
-      <dgm:whole/>
-    </dgm:dataModel>
-  </dgm:sampData>
-  <dgm:styleData>
-    <dgm:dataModel>
-      <dgm:ptLst>
-        <dgm:pt modelId="0" type="doc"/>
-        <dgm:pt modelId="1"/>
-        <dgm:pt modelId="2"/>
-      </dgm:ptLst>
-      <dgm:cxnLst>
-        <dgm:cxn modelId="3" srcId="0" destId="1" srcOrd="0" destOrd="0"/>
-        <dgm:cxn modelId="4" srcId="0" destId="2" srcOrd="1" destOrd="0"/>
-      </dgm:cxnLst>
-      <dgm:bg/>
-      <dgm:whole/>
-    </dgm:dataModel>
-  </dgm:styleData>
-  <dgm:clrData>
-    <dgm:dataModel>
-      <dgm:ptLst>
-        <dgm:pt modelId="0" type="doc"/>
-        <dgm:pt modelId="1"/>
-        <dgm:pt modelId="2"/>
-        <dgm:pt modelId="3"/>
-        <dgm:pt modelId="4"/>
-        <dgm:pt modelId="5"/>
-        <dgm:pt modelId="6"/>
-      </dgm:ptLst>
-      <dgm:cxnLst>
-        <dgm:cxn modelId="7" srcId="0" destId="1" srcOrd="0" destOrd="0"/>
-        <dgm:cxn modelId="8" srcId="0" destId="2" srcOrd="1" destOrd="0"/>
-        <dgm:cxn modelId="9" srcId="0" destId="3" srcOrd="2" destOrd="0"/>
-        <dgm:cxn modelId="10" srcId="0" destId="4" srcOrd="3" destOrd="0"/>
-        <dgm:cxn modelId="11" srcId="0" destId="5" srcOrd="4" destOrd="0"/>
-        <dgm:cxn modelId="12" srcId="0" destId="6" srcOrd="5" destOrd="0"/>
-      </dgm:cxnLst>
-      <dgm:bg/>
-      <dgm:whole/>
-    </dgm:dataModel>
-  </dgm:clrData>
-  <dgm:layoutNode name="diagram">
-    <dgm:varLst>
-      <dgm:dir/>
-      <dgm:resizeHandles val="exact"/>
-    </dgm:varLst>
-    <dgm:choose name="Name0">
-      <dgm:if name="Name1" func="var" arg="dir" op="equ" val="norm">
-        <dgm:alg type="snake">
-          <dgm:param type="grDir" val="tL"/>
-          <dgm:param type="flowDir" val="row"/>
-          <dgm:param type="contDir" val="sameDir"/>
-          <dgm:param type="off" val="ctr"/>
-        </dgm:alg>
-      </dgm:if>
-      <dgm:else name="Name2">
-        <dgm:alg type="snake">
-          <dgm:param type="grDir" val="tR"/>
-          <dgm:param type="flowDir" val="row"/>
-          <dgm:param type="contDir" val="sameDir"/>
-          <dgm:param type="off" val="ctr"/>
-        </dgm:alg>
-      </dgm:else>
-    </dgm:choose>
-    <dgm:shape xmlns:r="http://schemas.openxmlformats.org/officeDocument/2006/relationships" r:blip="">
-      <dgm:adjLst/>
-    </dgm:shape>
-    <dgm:presOf/>
-    <dgm:constrLst>
-      <dgm:constr type="w" for="ch" forName="node" refType="w"/>
-      <dgm:constr type="h" for="ch" forName="node" refType="w" refFor="ch" refForName="node" fact="0.6"/>
-      <dgm:constr type="w" for="ch" forName="sibTrans" refType="w" refFor="ch" refForName="node" fact="0.1"/>
-      <dgm:constr type="sp" refType="w" refFor="ch" refForName="sibTrans"/>
-      <dgm:constr type="primFontSz" for="ch" forName="node" op="equ" val="65"/>
-    </dgm:constrLst>
-    <dgm:ruleLst/>
-    <dgm:forEach name="Name3" axis="ch" ptType="node">
-      <dgm:layoutNode name="node">
-        <dgm:varLst>
-          <dgm:bulletEnabled val="1"/>
-        </dgm:varLst>
-        <dgm:alg type="tx"/>
-        <dgm:shape xmlns:r="http://schemas.openxmlformats.org/officeDocument/2006/relationships" type="rect" r:blip="">
-          <dgm:adjLst/>
-        </dgm:shape>
-        <dgm:presOf axis="desOrSelf" ptType="node"/>
-        <dgm:constrLst>
-          <dgm:constr type="lMarg" refType="primFontSz" fact="0.3"/>
-          <dgm:constr type="rMarg" refType="primFontSz" fact="0.3"/>
-          <dgm:constr type="tMarg" refType="primFontSz" fact="0.3"/>
-          <dgm:constr type="bMarg" refType="primFontSz" fact="0.3"/>
-        </dgm:constrLst>
-        <dgm:ruleLst>
-          <dgm:rule type="primFontSz" val="5" fact="NaN" max="NaN"/>
-        </dgm:ruleLst>
-      </dgm:layoutNode>
-      <dgm:forEach name="Name4" axis="followSib" ptType="sibTrans" cnt="1">
-        <dgm:layoutNode name="sibTrans">
-          <dgm:alg type="sp"/>
-          <dgm:shape xmlns:r="http://schemas.openxmlformats.org/officeDocument/2006/relationships" r:blip="">
-            <dgm:adjLst/>
-          </dgm:shape>
-          <dgm:presOf/>
-          <dgm:constrLst/>
-          <dgm:ruleLst/>
-        </dgm:layoutNode>
-      </dgm:forEach>
-    </dgm:forEach>
-  </dgm:layoutNode>
-</dgm:layoutDef>
-</file>
-
-<file path=ppt/diagrams/layout12.xml><?xml version="1.0" encoding="utf-8"?>
 <dgm:layoutDef xmlns:dgm="http://schemas.openxmlformats.org/drawingml/2006/diagram" xmlns:a="http://schemas.openxmlformats.org/drawingml/2006/main" uniqueId="urn:microsoft.com/office/officeart/2005/8/layout/bList2">
   <dgm:title val=""/>
   <dgm:desc val=""/>
@@ -29837,80 +25824,13 @@
 </file>
 
 <file path=ppt/diagrams/layout9.xml><?xml version="1.0" encoding="utf-8"?>
-<dgm:layoutDef xmlns:dgm="http://schemas.openxmlformats.org/drawingml/2006/diagram" xmlns:a="http://schemas.openxmlformats.org/drawingml/2006/main" uniqueId="urn:microsoft.com/office/officeart/2005/8/layout/hList1">
+<dgm:layoutDef xmlns:dgm="http://schemas.openxmlformats.org/drawingml/2006/diagram" xmlns:a="http://schemas.openxmlformats.org/drawingml/2006/main" uniqueId="urn:microsoft.com/office/officeart/2005/8/layout/default">
   <dgm:title val=""/>
   <dgm:desc val=""/>
   <dgm:catLst>
-    <dgm:cat type="list" pri="5000"/>
-    <dgm:cat type="convert" pri="5000"/>
+    <dgm:cat type="list" pri="400"/>
   </dgm:catLst>
   <dgm:sampData>
-    <dgm:dataModel>
-      <dgm:ptLst>
-        <dgm:pt modelId="0" type="doc"/>
-        <dgm:pt modelId="1">
-          <dgm:prSet phldr="1"/>
-        </dgm:pt>
-        <dgm:pt modelId="11">
-          <dgm:prSet phldr="1"/>
-        </dgm:pt>
-        <dgm:pt modelId="12">
-          <dgm:prSet phldr="1"/>
-        </dgm:pt>
-        <dgm:pt modelId="2">
-          <dgm:prSet phldr="1"/>
-        </dgm:pt>
-        <dgm:pt modelId="21">
-          <dgm:prSet phldr="1"/>
-        </dgm:pt>
-        <dgm:pt modelId="22">
-          <dgm:prSet phldr="1"/>
-        </dgm:pt>
-        <dgm:pt modelId="3">
-          <dgm:prSet phldr="1"/>
-        </dgm:pt>
-        <dgm:pt modelId="31">
-          <dgm:prSet phldr="1"/>
-        </dgm:pt>
-        <dgm:pt modelId="32">
-          <dgm:prSet phldr="1"/>
-        </dgm:pt>
-      </dgm:ptLst>
-      <dgm:cxnLst>
-        <dgm:cxn modelId="4" srcId="0" destId="1" srcOrd="0" destOrd="0"/>
-        <dgm:cxn modelId="5" srcId="0" destId="2" srcOrd="1" destOrd="0"/>
-        <dgm:cxn modelId="6" srcId="0" destId="3" srcOrd="2" destOrd="0"/>
-        <dgm:cxn modelId="13" srcId="1" destId="11" srcOrd="0" destOrd="0"/>
-        <dgm:cxn modelId="14" srcId="1" destId="12" srcOrd="1" destOrd="0"/>
-        <dgm:cxn modelId="23" srcId="2" destId="21" srcOrd="0" destOrd="0"/>
-        <dgm:cxn modelId="24" srcId="2" destId="22" srcOrd="1" destOrd="0"/>
-        <dgm:cxn modelId="33" srcId="3" destId="31" srcOrd="0" destOrd="0"/>
-        <dgm:cxn modelId="34" srcId="3" destId="32" srcOrd="1" destOrd="0"/>
-      </dgm:cxnLst>
-      <dgm:bg/>
-      <dgm:whole/>
-    </dgm:dataModel>
-  </dgm:sampData>
-  <dgm:styleData>
-    <dgm:dataModel>
-      <dgm:ptLst>
-        <dgm:pt modelId="0" type="doc"/>
-        <dgm:pt modelId="1">
-          <dgm:prSet phldr="1"/>
-        </dgm:pt>
-        <dgm:pt modelId="2">
-          <dgm:prSet phldr="1"/>
-        </dgm:pt>
-      </dgm:ptLst>
-      <dgm:cxnLst>
-        <dgm:cxn modelId="3" srcId="0" destId="1" srcOrd="0" destOrd="0"/>
-        <dgm:cxn modelId="4" srcId="0" destId="2" srcOrd="1" destOrd="0"/>
-      </dgm:cxnLst>
-      <dgm:bg/>
-      <dgm:whole/>
-    </dgm:dataModel>
-  </dgm:styleData>
-  <dgm:clrData>
     <dgm:dataModel>
       <dgm:ptLst>
         <dgm:pt modelId="0" type="doc"/>
@@ -29926,30 +25846,79 @@
         <dgm:pt modelId="4">
           <dgm:prSet phldr="1"/>
         </dgm:pt>
+        <dgm:pt modelId="5">
+          <dgm:prSet phldr="1"/>
+        </dgm:pt>
       </dgm:ptLst>
       <dgm:cxnLst>
-        <dgm:cxn modelId="5" srcId="0" destId="1" srcOrd="0" destOrd="0"/>
-        <dgm:cxn modelId="6" srcId="0" destId="2" srcOrd="1" destOrd="0"/>
-        <dgm:cxn modelId="7" srcId="0" destId="3" srcOrd="2" destOrd="0"/>
-        <dgm:cxn modelId="8" srcId="0" destId="4" srcOrd="3" destOrd="0"/>
+        <dgm:cxn modelId="6" srcId="0" destId="1" srcOrd="0" destOrd="0"/>
+        <dgm:cxn modelId="7" srcId="0" destId="2" srcOrd="1" destOrd="0"/>
+        <dgm:cxn modelId="8" srcId="0" destId="3" srcOrd="2" destOrd="0"/>
+        <dgm:cxn modelId="9" srcId="0" destId="4" srcOrd="3" destOrd="0"/>
+        <dgm:cxn modelId="10" srcId="0" destId="5" srcOrd="4" destOrd="0"/>
+      </dgm:cxnLst>
+      <dgm:bg/>
+      <dgm:whole/>
+    </dgm:dataModel>
+  </dgm:sampData>
+  <dgm:styleData>
+    <dgm:dataModel>
+      <dgm:ptLst>
+        <dgm:pt modelId="0" type="doc"/>
+        <dgm:pt modelId="1"/>
+        <dgm:pt modelId="2"/>
+      </dgm:ptLst>
+      <dgm:cxnLst>
+        <dgm:cxn modelId="3" srcId="0" destId="1" srcOrd="0" destOrd="0"/>
+        <dgm:cxn modelId="4" srcId="0" destId="2" srcOrd="1" destOrd="0"/>
+      </dgm:cxnLst>
+      <dgm:bg/>
+      <dgm:whole/>
+    </dgm:dataModel>
+  </dgm:styleData>
+  <dgm:clrData>
+    <dgm:dataModel>
+      <dgm:ptLst>
+        <dgm:pt modelId="0" type="doc"/>
+        <dgm:pt modelId="1"/>
+        <dgm:pt modelId="2"/>
+        <dgm:pt modelId="3"/>
+        <dgm:pt modelId="4"/>
+        <dgm:pt modelId="5"/>
+        <dgm:pt modelId="6"/>
+      </dgm:ptLst>
+      <dgm:cxnLst>
+        <dgm:cxn modelId="7" srcId="0" destId="1" srcOrd="0" destOrd="0"/>
+        <dgm:cxn modelId="8" srcId="0" destId="2" srcOrd="1" destOrd="0"/>
+        <dgm:cxn modelId="9" srcId="0" destId="3" srcOrd="2" destOrd="0"/>
+        <dgm:cxn modelId="10" srcId="0" destId="4" srcOrd="3" destOrd="0"/>
+        <dgm:cxn modelId="11" srcId="0" destId="5" srcOrd="4" destOrd="0"/>
+        <dgm:cxn modelId="12" srcId="0" destId="6" srcOrd="5" destOrd="0"/>
       </dgm:cxnLst>
       <dgm:bg/>
       <dgm:whole/>
     </dgm:dataModel>
   </dgm:clrData>
-  <dgm:layoutNode name="Name0">
+  <dgm:layoutNode name="diagram">
     <dgm:varLst>
       <dgm:dir/>
-      <dgm:animLvl val="lvl"/>
       <dgm:resizeHandles val="exact"/>
     </dgm:varLst>
-    <dgm:choose name="Name1">
-      <dgm:if name="Name2" func="var" arg="dir" op="equ" val="norm">
-        <dgm:alg type="lin"/>
+    <dgm:choose name="Name0">
+      <dgm:if name="Name1" func="var" arg="dir" op="equ" val="norm">
+        <dgm:alg type="snake">
+          <dgm:param type="grDir" val="tL"/>
+          <dgm:param type="flowDir" val="row"/>
+          <dgm:param type="contDir" val="sameDir"/>
+          <dgm:param type="off" val="ctr"/>
+        </dgm:alg>
       </dgm:if>
-      <dgm:else name="Name3">
-        <dgm:alg type="lin">
-          <dgm:param type="linDir" val="fromR"/>
+      <dgm:else name="Name2">
+        <dgm:alg type="snake">
+          <dgm:param type="grDir" val="tR"/>
+          <dgm:param type="flowDir" val="row"/>
+          <dgm:param type="contDir" val="sameDir"/>
+          <dgm:param type="off" val="ctr"/>
         </dgm:alg>
       </dgm:else>
     </dgm:choose>
@@ -29958,87 +25927,35 @@
     </dgm:shape>
     <dgm:presOf/>
     <dgm:constrLst>
-      <dgm:constr type="h" for="ch" forName="composite" refType="h"/>
-      <dgm:constr type="w" for="ch" forName="composite" refType="w"/>
-      <dgm:constr type="w" for="des" forName="parTx"/>
-      <dgm:constr type="h" for="des" forName="parTx" op="equ"/>
-      <dgm:constr type="w" for="des" forName="desTx"/>
-      <dgm:constr type="h" for="des" forName="desTx" op="equ"/>
-      <dgm:constr type="primFontSz" for="des" forName="parTx" val="65"/>
-      <dgm:constr type="secFontSz" for="des" forName="desTx" refType="primFontSz" refFor="des" refForName="parTx" op="equ"/>
-      <dgm:constr type="h" for="des" forName="parTx" refType="primFontSz" refFor="des" refForName="parTx" fact="0.8"/>
-      <dgm:constr type="h" for="des" forName="desTx" refType="primFontSz" refFor="des" refForName="parTx" fact="1.22"/>
-      <dgm:constr type="w" for="ch" forName="space" refType="w" refFor="ch" refForName="composite" op="equ" fact="0.14"/>
+      <dgm:constr type="w" for="ch" forName="node" refType="w"/>
+      <dgm:constr type="h" for="ch" forName="node" refType="w" refFor="ch" refForName="node" fact="0.6"/>
+      <dgm:constr type="w" for="ch" forName="sibTrans" refType="w" refFor="ch" refForName="node" fact="0.1"/>
+      <dgm:constr type="sp" refType="w" refFor="ch" refForName="sibTrans"/>
+      <dgm:constr type="primFontSz" for="ch" forName="node" op="equ" val="65"/>
     </dgm:constrLst>
-    <dgm:ruleLst>
-      <dgm:rule type="w" for="ch" forName="composite" val="0" fact="NaN" max="NaN"/>
-      <dgm:rule type="primFontSz" for="des" forName="parTx" val="5" fact="NaN" max="NaN"/>
-    </dgm:ruleLst>
-    <dgm:forEach name="Name4" axis="ch" ptType="node">
-      <dgm:layoutNode name="composite">
-        <dgm:alg type="composite"/>
-        <dgm:shape xmlns:r="http://schemas.openxmlformats.org/officeDocument/2006/relationships" r:blip="">
+    <dgm:ruleLst/>
+    <dgm:forEach name="Name3" axis="ch" ptType="node">
+      <dgm:layoutNode name="node">
+        <dgm:varLst>
+          <dgm:bulletEnabled val="1"/>
+        </dgm:varLst>
+        <dgm:alg type="tx"/>
+        <dgm:shape xmlns:r="http://schemas.openxmlformats.org/officeDocument/2006/relationships" type="rect" r:blip="">
           <dgm:adjLst/>
         </dgm:shape>
-        <dgm:presOf/>
+        <dgm:presOf axis="desOrSelf" ptType="node"/>
         <dgm:constrLst>
-          <dgm:constr type="l" for="ch" forName="parTx"/>
-          <dgm:constr type="w" for="ch" forName="parTx" refType="w"/>
-          <dgm:constr type="t" for="ch" forName="parTx"/>
-          <dgm:constr type="l" for="ch" forName="desTx"/>
-          <dgm:constr type="w" for="ch" forName="desTx" refType="w" refFor="ch" refForName="parTx"/>
-          <dgm:constr type="t" for="ch" forName="desTx" refType="h" refFor="ch" refForName="parTx"/>
+          <dgm:constr type="lMarg" refType="primFontSz" fact="0.3"/>
+          <dgm:constr type="rMarg" refType="primFontSz" fact="0.3"/>
+          <dgm:constr type="tMarg" refType="primFontSz" fact="0.3"/>
+          <dgm:constr type="bMarg" refType="primFontSz" fact="0.3"/>
         </dgm:constrLst>
         <dgm:ruleLst>
-          <dgm:rule type="h" val="INF" fact="NaN" max="NaN"/>
+          <dgm:rule type="primFontSz" val="5" fact="NaN" max="NaN"/>
         </dgm:ruleLst>
-        <dgm:layoutNode name="parTx" styleLbl="alignNode1">
-          <dgm:varLst>
-            <dgm:chMax val="0"/>
-            <dgm:chPref val="0"/>
-            <dgm:bulletEnabled val="1"/>
-          </dgm:varLst>
-          <dgm:alg type="tx"/>
-          <dgm:shape xmlns:r="http://schemas.openxmlformats.org/officeDocument/2006/relationships" type="rect" r:blip="">
-            <dgm:adjLst/>
-          </dgm:shape>
-          <dgm:presOf axis="self" ptType="node"/>
-          <dgm:constrLst>
-            <dgm:constr type="h" refType="w" op="lte" fact="0.4"/>
-            <dgm:constr type="h"/>
-            <dgm:constr type="tMarg" refType="primFontSz" fact="0.32"/>
-            <dgm:constr type="bMarg" refType="primFontSz" fact="0.32"/>
-          </dgm:constrLst>
-          <dgm:ruleLst>
-            <dgm:rule type="h" val="INF" fact="NaN" max="NaN"/>
-          </dgm:ruleLst>
-        </dgm:layoutNode>
-        <dgm:layoutNode name="desTx" styleLbl="alignAccFollowNode1">
-          <dgm:varLst>
-            <dgm:bulletEnabled val="1"/>
-          </dgm:varLst>
-          <dgm:alg type="tx">
-            <dgm:param type="stBulletLvl" val="1"/>
-          </dgm:alg>
-          <dgm:shape xmlns:r="http://schemas.openxmlformats.org/officeDocument/2006/relationships" type="rect" r:blip="">
-            <dgm:adjLst/>
-          </dgm:shape>
-          <dgm:presOf axis="des" ptType="node"/>
-          <dgm:constrLst>
-            <dgm:constr type="secFontSz" val="65"/>
-            <dgm:constr type="primFontSz" refType="secFontSz"/>
-            <dgm:constr type="h"/>
-            <dgm:constr type="lMarg" refType="primFontSz" fact="0.42"/>
-            <dgm:constr type="tMarg" refType="primFontSz" fact="0.42"/>
-            <dgm:constr type="bMarg" refType="primFontSz" fact="0.63"/>
-          </dgm:constrLst>
-          <dgm:ruleLst>
-            <dgm:rule type="h" val="INF" fact="NaN" max="NaN"/>
-          </dgm:ruleLst>
-        </dgm:layoutNode>
       </dgm:layoutNode>
-      <dgm:forEach name="Name5" axis="followSib" ptType="sibTrans" cnt="1">
-        <dgm:layoutNode name="space">
+      <dgm:forEach name="Name4" axis="followSib" ptType="sibTrans" cnt="1">
+        <dgm:layoutNode name="sibTrans">
           <dgm:alg type="sp"/>
           <dgm:shape xmlns:r="http://schemas.openxmlformats.org/officeDocument/2006/relationships" r:blip="">
             <dgm:adjLst/>
@@ -32121,2074 +28038,6 @@
 </dgm:styleDef>
 </file>
 
-<file path=ppt/diagrams/quickStyle11.xml><?xml version="1.0" encoding="utf-8"?>
-<dgm:styleDef xmlns:dgm="http://schemas.openxmlformats.org/drawingml/2006/diagram" xmlns:a="http://schemas.openxmlformats.org/drawingml/2006/main" uniqueId="urn:microsoft.com/office/officeart/2005/8/quickstyle/simple4">
-  <dgm:title val=""/>
-  <dgm:desc val=""/>
-  <dgm:catLst>
-    <dgm:cat type="simple" pri="10400"/>
-  </dgm:catLst>
-  <dgm:scene3d>
-    <a:camera prst="orthographicFront"/>
-    <a:lightRig rig="threePt" dir="t"/>
-  </dgm:scene3d>
-  <dgm:styleLbl name="node0">
-    <dgm:scene3d>
-      <a:camera prst="orthographicFront"/>
-      <a:lightRig rig="threePt" dir="t"/>
-    </dgm:scene3d>
-    <dgm:sp3d/>
-    <dgm:txPr/>
-    <dgm:style>
-      <a:lnRef idx="0">
-        <a:scrgbClr r="0" g="0" b="0"/>
-      </a:lnRef>
-      <a:fillRef idx="3">
-        <a:scrgbClr r="0" g="0" b="0"/>
-      </a:fillRef>
-      <a:effectRef idx="2">
-        <a:scrgbClr r="0" g="0" b="0"/>
-      </a:effectRef>
-      <a:fontRef idx="minor">
-        <a:schemeClr val="lt1"/>
-      </a:fontRef>
-    </dgm:style>
-  </dgm:styleLbl>
-  <dgm:styleLbl name="lnNode1">
-    <dgm:scene3d>
-      <a:camera prst="orthographicFront"/>
-      <a:lightRig rig="threePt" dir="t"/>
-    </dgm:scene3d>
-    <dgm:sp3d/>
-    <dgm:txPr/>
-    <dgm:style>
-      <a:lnRef idx="1">
-        <a:scrgbClr r="0" g="0" b="0"/>
-      </a:lnRef>
-      <a:fillRef idx="3">
-        <a:scrgbClr r="0" g="0" b="0"/>
-      </a:fillRef>
-      <a:effectRef idx="2">
-        <a:scrgbClr r="0" g="0" b="0"/>
-      </a:effectRef>
-      <a:fontRef idx="minor">
-        <a:schemeClr val="lt1"/>
-      </a:fontRef>
-    </dgm:style>
-  </dgm:styleLbl>
-  <dgm:styleLbl name="vennNode1">
-    <dgm:scene3d>
-      <a:camera prst="orthographicFront"/>
-      <a:lightRig rig="threePt" dir="t"/>
-    </dgm:scene3d>
-    <dgm:sp3d/>
-    <dgm:txPr/>
-    <dgm:style>
-      <a:lnRef idx="0">
-        <a:scrgbClr r="0" g="0" b="0"/>
-      </a:lnRef>
-      <a:fillRef idx="3">
-        <a:scrgbClr r="0" g="0" b="0"/>
-      </a:fillRef>
-      <a:effectRef idx="0">
-        <a:scrgbClr r="0" g="0" b="0"/>
-      </a:effectRef>
-      <a:fontRef idx="minor">
-        <a:schemeClr val="tx1"/>
-      </a:fontRef>
-    </dgm:style>
-  </dgm:styleLbl>
-  <dgm:styleLbl name="alignNode1">
-    <dgm:scene3d>
-      <a:camera prst="orthographicFront"/>
-      <a:lightRig rig="threePt" dir="t"/>
-    </dgm:scene3d>
-    <dgm:sp3d/>
-    <dgm:txPr/>
-    <dgm:style>
-      <a:lnRef idx="1">
-        <a:scrgbClr r="0" g="0" b="0"/>
-      </a:lnRef>
-      <a:fillRef idx="3">
-        <a:scrgbClr r="0" g="0" b="0"/>
-      </a:fillRef>
-      <a:effectRef idx="2">
-        <a:scrgbClr r="0" g="0" b="0"/>
-      </a:effectRef>
-      <a:fontRef idx="minor">
-        <a:schemeClr val="lt1"/>
-      </a:fontRef>
-    </dgm:style>
-  </dgm:styleLbl>
-  <dgm:styleLbl name="node1">
-    <dgm:scene3d>
-      <a:camera prst="orthographicFront"/>
-      <a:lightRig rig="threePt" dir="t"/>
-    </dgm:scene3d>
-    <dgm:sp3d/>
-    <dgm:txPr/>
-    <dgm:style>
-      <a:lnRef idx="0">
-        <a:scrgbClr r="0" g="0" b="0"/>
-      </a:lnRef>
-      <a:fillRef idx="3">
-        <a:scrgbClr r="0" g="0" b="0"/>
-      </a:fillRef>
-      <a:effectRef idx="2">
-        <a:scrgbClr r="0" g="0" b="0"/>
-      </a:effectRef>
-      <a:fontRef idx="minor">
-        <a:schemeClr val="lt1"/>
-      </a:fontRef>
-    </dgm:style>
-  </dgm:styleLbl>
-  <dgm:styleLbl name="node2">
-    <dgm:scene3d>
-      <a:camera prst="orthographicFront"/>
-      <a:lightRig rig="threePt" dir="t"/>
-    </dgm:scene3d>
-    <dgm:sp3d/>
-    <dgm:txPr/>
-    <dgm:style>
-      <a:lnRef idx="0">
-        <a:scrgbClr r="0" g="0" b="0"/>
-      </a:lnRef>
-      <a:fillRef idx="3">
-        <a:scrgbClr r="0" g="0" b="0"/>
-      </a:fillRef>
-      <a:effectRef idx="2">
-        <a:scrgbClr r="0" g="0" b="0"/>
-      </a:effectRef>
-      <a:fontRef idx="minor">
-        <a:schemeClr val="lt1"/>
-      </a:fontRef>
-    </dgm:style>
-  </dgm:styleLbl>
-  <dgm:styleLbl name="node3">
-    <dgm:scene3d>
-      <a:camera prst="orthographicFront"/>
-      <a:lightRig rig="threePt" dir="t"/>
-    </dgm:scene3d>
-    <dgm:sp3d/>
-    <dgm:txPr/>
-    <dgm:style>
-      <a:lnRef idx="0">
-        <a:scrgbClr r="0" g="0" b="0"/>
-      </a:lnRef>
-      <a:fillRef idx="3">
-        <a:scrgbClr r="0" g="0" b="0"/>
-      </a:fillRef>
-      <a:effectRef idx="2">
-        <a:scrgbClr r="0" g="0" b="0"/>
-      </a:effectRef>
-      <a:fontRef idx="minor">
-        <a:schemeClr val="lt1"/>
-      </a:fontRef>
-    </dgm:style>
-  </dgm:styleLbl>
-  <dgm:styleLbl name="node4">
-    <dgm:scene3d>
-      <a:camera prst="orthographicFront"/>
-      <a:lightRig rig="threePt" dir="t"/>
-    </dgm:scene3d>
-    <dgm:sp3d/>
-    <dgm:txPr/>
-    <dgm:style>
-      <a:lnRef idx="0">
-        <a:scrgbClr r="0" g="0" b="0"/>
-      </a:lnRef>
-      <a:fillRef idx="3">
-        <a:scrgbClr r="0" g="0" b="0"/>
-      </a:fillRef>
-      <a:effectRef idx="2">
-        <a:scrgbClr r="0" g="0" b="0"/>
-      </a:effectRef>
-      <a:fontRef idx="minor">
-        <a:schemeClr val="lt1"/>
-      </a:fontRef>
-    </dgm:style>
-  </dgm:styleLbl>
-  <dgm:styleLbl name="fgImgPlace1">
-    <dgm:scene3d>
-      <a:camera prst="orthographicFront"/>
-      <a:lightRig rig="threePt" dir="t"/>
-    </dgm:scene3d>
-    <dgm:sp3d/>
-    <dgm:txPr/>
-    <dgm:style>
-      <a:lnRef idx="0">
-        <a:scrgbClr r="0" g="0" b="0"/>
-      </a:lnRef>
-      <a:fillRef idx="1">
-        <a:scrgbClr r="0" g="0" b="0"/>
-      </a:fillRef>
-      <a:effectRef idx="2">
-        <a:scrgbClr r="0" g="0" b="0"/>
-      </a:effectRef>
-      <a:fontRef idx="minor"/>
-    </dgm:style>
-  </dgm:styleLbl>
-  <dgm:styleLbl name="alignImgPlace1">
-    <dgm:scene3d>
-      <a:camera prst="orthographicFront"/>
-      <a:lightRig rig="threePt" dir="t"/>
-    </dgm:scene3d>
-    <dgm:sp3d/>
-    <dgm:txPr/>
-    <dgm:style>
-      <a:lnRef idx="0">
-        <a:scrgbClr r="0" g="0" b="0"/>
-      </a:lnRef>
-      <a:fillRef idx="1">
-        <a:scrgbClr r="0" g="0" b="0"/>
-      </a:fillRef>
-      <a:effectRef idx="2">
-        <a:scrgbClr r="0" g="0" b="0"/>
-      </a:effectRef>
-      <a:fontRef idx="minor"/>
-    </dgm:style>
-  </dgm:styleLbl>
-  <dgm:styleLbl name="bgImgPlace1">
-    <dgm:scene3d>
-      <a:camera prst="orthographicFront"/>
-      <a:lightRig rig="threePt" dir="t"/>
-    </dgm:scene3d>
-    <dgm:sp3d/>
-    <dgm:txPr/>
-    <dgm:style>
-      <a:lnRef idx="0">
-        <a:scrgbClr r="0" g="0" b="0"/>
-      </a:lnRef>
-      <a:fillRef idx="1">
-        <a:scrgbClr r="0" g="0" b="0"/>
-      </a:fillRef>
-      <a:effectRef idx="2">
-        <a:scrgbClr r="0" g="0" b="0"/>
-      </a:effectRef>
-      <a:fontRef idx="minor"/>
-    </dgm:style>
-  </dgm:styleLbl>
-  <dgm:styleLbl name="sibTrans2D1">
-    <dgm:scene3d>
-      <a:camera prst="orthographicFront"/>
-      <a:lightRig rig="threePt" dir="t"/>
-    </dgm:scene3d>
-    <dgm:sp3d/>
-    <dgm:txPr/>
-    <dgm:style>
-      <a:lnRef idx="0">
-        <a:scrgbClr r="0" g="0" b="0"/>
-      </a:lnRef>
-      <a:fillRef idx="3">
-        <a:scrgbClr r="0" g="0" b="0"/>
-      </a:fillRef>
-      <a:effectRef idx="2">
-        <a:scrgbClr r="0" g="0" b="0"/>
-      </a:effectRef>
-      <a:fontRef idx="minor">
-        <a:schemeClr val="lt1"/>
-      </a:fontRef>
-    </dgm:style>
-  </dgm:styleLbl>
-  <dgm:styleLbl name="fgSibTrans2D1">
-    <dgm:scene3d>
-      <a:camera prst="orthographicFront"/>
-      <a:lightRig rig="threePt" dir="t"/>
-    </dgm:scene3d>
-    <dgm:sp3d/>
-    <dgm:txPr/>
-    <dgm:style>
-      <a:lnRef idx="0">
-        <a:scrgbClr r="0" g="0" b="0"/>
-      </a:lnRef>
-      <a:fillRef idx="3">
-        <a:scrgbClr r="0" g="0" b="0"/>
-      </a:fillRef>
-      <a:effectRef idx="2">
-        <a:scrgbClr r="0" g="0" b="0"/>
-      </a:effectRef>
-      <a:fontRef idx="minor">
-        <a:schemeClr val="lt1"/>
-      </a:fontRef>
-    </dgm:style>
-  </dgm:styleLbl>
-  <dgm:styleLbl name="bgSibTrans2D1">
-    <dgm:scene3d>
-      <a:camera prst="orthographicFront"/>
-      <a:lightRig rig="threePt" dir="t"/>
-    </dgm:scene3d>
-    <dgm:sp3d/>
-    <dgm:txPr/>
-    <dgm:style>
-      <a:lnRef idx="0">
-        <a:scrgbClr r="0" g="0" b="0"/>
-      </a:lnRef>
-      <a:fillRef idx="3">
-        <a:scrgbClr r="0" g="0" b="0"/>
-      </a:fillRef>
-      <a:effectRef idx="2">
-        <a:scrgbClr r="0" g="0" b="0"/>
-      </a:effectRef>
-      <a:fontRef idx="minor">
-        <a:schemeClr val="lt1"/>
-      </a:fontRef>
-    </dgm:style>
-  </dgm:styleLbl>
-  <dgm:styleLbl name="sibTrans1D1">
-    <dgm:scene3d>
-      <a:camera prst="orthographicFront"/>
-      <a:lightRig rig="threePt" dir="t"/>
-    </dgm:scene3d>
-    <dgm:sp3d/>
-    <dgm:txPr/>
-    <dgm:style>
-      <a:lnRef idx="1">
-        <a:scrgbClr r="0" g="0" b="0"/>
-      </a:lnRef>
-      <a:fillRef idx="0">
-        <a:scrgbClr r="0" g="0" b="0"/>
-      </a:fillRef>
-      <a:effectRef idx="0">
-        <a:scrgbClr r="0" g="0" b="0"/>
-      </a:effectRef>
-      <a:fontRef idx="minor"/>
-    </dgm:style>
-  </dgm:styleLbl>
-  <dgm:styleLbl name="callout">
-    <dgm:scene3d>
-      <a:camera prst="orthographicFront"/>
-      <a:lightRig rig="threePt" dir="t"/>
-    </dgm:scene3d>
-    <dgm:sp3d/>
-    <dgm:txPr/>
-    <dgm:style>
-      <a:lnRef idx="2">
-        <a:scrgbClr r="0" g="0" b="0"/>
-      </a:lnRef>
-      <a:fillRef idx="1">
-        <a:scrgbClr r="0" g="0" b="0"/>
-      </a:fillRef>
-      <a:effectRef idx="1">
-        <a:scrgbClr r="0" g="0" b="0"/>
-      </a:effectRef>
-      <a:fontRef idx="minor"/>
-    </dgm:style>
-  </dgm:styleLbl>
-  <dgm:styleLbl name="asst0">
-    <dgm:scene3d>
-      <a:camera prst="orthographicFront"/>
-      <a:lightRig rig="threePt" dir="t"/>
-    </dgm:scene3d>
-    <dgm:sp3d/>
-    <dgm:txPr/>
-    <dgm:style>
-      <a:lnRef idx="0">
-        <a:scrgbClr r="0" g="0" b="0"/>
-      </a:lnRef>
-      <a:fillRef idx="3">
-        <a:scrgbClr r="0" g="0" b="0"/>
-      </a:fillRef>
-      <a:effectRef idx="2">
-        <a:scrgbClr r="0" g="0" b="0"/>
-      </a:effectRef>
-      <a:fontRef idx="minor">
-        <a:schemeClr val="lt1"/>
-      </a:fontRef>
-    </dgm:style>
-  </dgm:styleLbl>
-  <dgm:styleLbl name="asst1">
-    <dgm:scene3d>
-      <a:camera prst="orthographicFront"/>
-      <a:lightRig rig="threePt" dir="t"/>
-    </dgm:scene3d>
-    <dgm:sp3d/>
-    <dgm:txPr/>
-    <dgm:style>
-      <a:lnRef idx="0">
-        <a:scrgbClr r="0" g="0" b="0"/>
-      </a:lnRef>
-      <a:fillRef idx="3">
-        <a:scrgbClr r="0" g="0" b="0"/>
-      </a:fillRef>
-      <a:effectRef idx="2">
-        <a:scrgbClr r="0" g="0" b="0"/>
-      </a:effectRef>
-      <a:fontRef idx="minor">
-        <a:schemeClr val="lt1"/>
-      </a:fontRef>
-    </dgm:style>
-  </dgm:styleLbl>
-  <dgm:styleLbl name="asst2">
-    <dgm:scene3d>
-      <a:camera prst="orthographicFront"/>
-      <a:lightRig rig="threePt" dir="t"/>
-    </dgm:scene3d>
-    <dgm:sp3d/>
-    <dgm:txPr/>
-    <dgm:style>
-      <a:lnRef idx="0">
-        <a:scrgbClr r="0" g="0" b="0"/>
-      </a:lnRef>
-      <a:fillRef idx="3">
-        <a:scrgbClr r="0" g="0" b="0"/>
-      </a:fillRef>
-      <a:effectRef idx="2">
-        <a:scrgbClr r="0" g="0" b="0"/>
-      </a:effectRef>
-      <a:fontRef idx="minor">
-        <a:schemeClr val="lt1"/>
-      </a:fontRef>
-    </dgm:style>
-  </dgm:styleLbl>
-  <dgm:styleLbl name="asst3">
-    <dgm:scene3d>
-      <a:camera prst="orthographicFront"/>
-      <a:lightRig rig="threePt" dir="t"/>
-    </dgm:scene3d>
-    <dgm:sp3d/>
-    <dgm:txPr/>
-    <dgm:style>
-      <a:lnRef idx="0">
-        <a:scrgbClr r="0" g="0" b="0"/>
-      </a:lnRef>
-      <a:fillRef idx="3">
-        <a:scrgbClr r="0" g="0" b="0"/>
-      </a:fillRef>
-      <a:effectRef idx="2">
-        <a:scrgbClr r="0" g="0" b="0"/>
-      </a:effectRef>
-      <a:fontRef idx="minor">
-        <a:schemeClr val="lt1"/>
-      </a:fontRef>
-    </dgm:style>
-  </dgm:styleLbl>
-  <dgm:styleLbl name="asst4">
-    <dgm:scene3d>
-      <a:camera prst="orthographicFront"/>
-      <a:lightRig rig="threePt" dir="t"/>
-    </dgm:scene3d>
-    <dgm:sp3d/>
-    <dgm:txPr/>
-    <dgm:style>
-      <a:lnRef idx="0">
-        <a:scrgbClr r="0" g="0" b="0"/>
-      </a:lnRef>
-      <a:fillRef idx="3">
-        <a:scrgbClr r="0" g="0" b="0"/>
-      </a:fillRef>
-      <a:effectRef idx="2">
-        <a:scrgbClr r="0" g="0" b="0"/>
-      </a:effectRef>
-      <a:fontRef idx="minor">
-        <a:schemeClr val="lt1"/>
-      </a:fontRef>
-    </dgm:style>
-  </dgm:styleLbl>
-  <dgm:styleLbl name="parChTrans2D1">
-    <dgm:scene3d>
-      <a:camera prst="orthographicFront"/>
-      <a:lightRig rig="threePt" dir="t"/>
-    </dgm:scene3d>
-    <dgm:sp3d/>
-    <dgm:txPr/>
-    <dgm:style>
-      <a:lnRef idx="0">
-        <a:scrgbClr r="0" g="0" b="0"/>
-      </a:lnRef>
-      <a:fillRef idx="3">
-        <a:scrgbClr r="0" g="0" b="0"/>
-      </a:fillRef>
-      <a:effectRef idx="2">
-        <a:scrgbClr r="0" g="0" b="0"/>
-      </a:effectRef>
-      <a:fontRef idx="minor">
-        <a:schemeClr val="lt1"/>
-      </a:fontRef>
-    </dgm:style>
-  </dgm:styleLbl>
-  <dgm:styleLbl name="parChTrans2D2">
-    <dgm:scene3d>
-      <a:camera prst="orthographicFront"/>
-      <a:lightRig rig="threePt" dir="t"/>
-    </dgm:scene3d>
-    <dgm:sp3d/>
-    <dgm:txPr/>
-    <dgm:style>
-      <a:lnRef idx="0">
-        <a:scrgbClr r="0" g="0" b="0"/>
-      </a:lnRef>
-      <a:fillRef idx="3">
-        <a:scrgbClr r="0" g="0" b="0"/>
-      </a:fillRef>
-      <a:effectRef idx="2">
-        <a:scrgbClr r="0" g="0" b="0"/>
-      </a:effectRef>
-      <a:fontRef idx="minor">
-        <a:schemeClr val="lt1"/>
-      </a:fontRef>
-    </dgm:style>
-  </dgm:styleLbl>
-  <dgm:styleLbl name="parChTrans2D3">
-    <dgm:scene3d>
-      <a:camera prst="orthographicFront"/>
-      <a:lightRig rig="threePt" dir="t"/>
-    </dgm:scene3d>
-    <dgm:sp3d/>
-    <dgm:txPr/>
-    <dgm:style>
-      <a:lnRef idx="1">
-        <a:scrgbClr r="0" g="0" b="0"/>
-      </a:lnRef>
-      <a:fillRef idx="3">
-        <a:scrgbClr r="0" g="0" b="0"/>
-      </a:fillRef>
-      <a:effectRef idx="2">
-        <a:scrgbClr r="0" g="0" b="0"/>
-      </a:effectRef>
-      <a:fontRef idx="minor">
-        <a:schemeClr val="lt1"/>
-      </a:fontRef>
-    </dgm:style>
-  </dgm:styleLbl>
-  <dgm:styleLbl name="parChTrans2D4">
-    <dgm:scene3d>
-      <a:camera prst="orthographicFront"/>
-      <a:lightRig rig="threePt" dir="t"/>
-    </dgm:scene3d>
-    <dgm:sp3d/>
-    <dgm:txPr/>
-    <dgm:style>
-      <a:lnRef idx="1">
-        <a:scrgbClr r="0" g="0" b="0"/>
-      </a:lnRef>
-      <a:fillRef idx="3">
-        <a:scrgbClr r="0" g="0" b="0"/>
-      </a:fillRef>
-      <a:effectRef idx="2">
-        <a:scrgbClr r="0" g="0" b="0"/>
-      </a:effectRef>
-      <a:fontRef idx="minor">
-        <a:schemeClr val="lt1"/>
-      </a:fontRef>
-    </dgm:style>
-  </dgm:styleLbl>
-  <dgm:styleLbl name="parChTrans1D1">
-    <dgm:scene3d>
-      <a:camera prst="orthographicFront"/>
-      <a:lightRig rig="threePt" dir="t"/>
-    </dgm:scene3d>
-    <dgm:sp3d/>
-    <dgm:txPr/>
-    <dgm:style>
-      <a:lnRef idx="1">
-        <a:scrgbClr r="0" g="0" b="0"/>
-      </a:lnRef>
-      <a:fillRef idx="0">
-        <a:scrgbClr r="0" g="0" b="0"/>
-      </a:fillRef>
-      <a:effectRef idx="0">
-        <a:scrgbClr r="0" g="0" b="0"/>
-      </a:effectRef>
-      <a:fontRef idx="minor"/>
-    </dgm:style>
-  </dgm:styleLbl>
-  <dgm:styleLbl name="parChTrans1D2">
-    <dgm:scene3d>
-      <a:camera prst="orthographicFront"/>
-      <a:lightRig rig="threePt" dir="t"/>
-    </dgm:scene3d>
-    <dgm:sp3d/>
-    <dgm:txPr/>
-    <dgm:style>
-      <a:lnRef idx="1">
-        <a:scrgbClr r="0" g="0" b="0"/>
-      </a:lnRef>
-      <a:fillRef idx="0">
-        <a:scrgbClr r="0" g="0" b="0"/>
-      </a:fillRef>
-      <a:effectRef idx="0">
-        <a:scrgbClr r="0" g="0" b="0"/>
-      </a:effectRef>
-      <a:fontRef idx="minor"/>
-    </dgm:style>
-  </dgm:styleLbl>
-  <dgm:styleLbl name="parChTrans1D3">
-    <dgm:scene3d>
-      <a:camera prst="orthographicFront"/>
-      <a:lightRig rig="threePt" dir="t"/>
-    </dgm:scene3d>
-    <dgm:sp3d/>
-    <dgm:txPr/>
-    <dgm:style>
-      <a:lnRef idx="1">
-        <a:scrgbClr r="0" g="0" b="0"/>
-      </a:lnRef>
-      <a:fillRef idx="0">
-        <a:scrgbClr r="0" g="0" b="0"/>
-      </a:fillRef>
-      <a:effectRef idx="0">
-        <a:scrgbClr r="0" g="0" b="0"/>
-      </a:effectRef>
-      <a:fontRef idx="minor"/>
-    </dgm:style>
-  </dgm:styleLbl>
-  <dgm:styleLbl name="parChTrans1D4">
-    <dgm:scene3d>
-      <a:camera prst="orthographicFront"/>
-      <a:lightRig rig="threePt" dir="t"/>
-    </dgm:scene3d>
-    <dgm:sp3d/>
-    <dgm:txPr/>
-    <dgm:style>
-      <a:lnRef idx="1">
-        <a:scrgbClr r="0" g="0" b="0"/>
-      </a:lnRef>
-      <a:fillRef idx="0">
-        <a:scrgbClr r="0" g="0" b="0"/>
-      </a:fillRef>
-      <a:effectRef idx="0">
-        <a:scrgbClr r="0" g="0" b="0"/>
-      </a:effectRef>
-      <a:fontRef idx="minor"/>
-    </dgm:style>
-  </dgm:styleLbl>
-  <dgm:styleLbl name="fgAcc1">
-    <dgm:scene3d>
-      <a:camera prst="orthographicFront"/>
-      <a:lightRig rig="threePt" dir="t"/>
-    </dgm:scene3d>
-    <dgm:sp3d/>
-    <dgm:txPr/>
-    <dgm:style>
-      <a:lnRef idx="1">
-        <a:scrgbClr r="0" g="0" b="0"/>
-      </a:lnRef>
-      <a:fillRef idx="1">
-        <a:scrgbClr r="0" g="0" b="0"/>
-      </a:fillRef>
-      <a:effectRef idx="0">
-        <a:scrgbClr r="0" g="0" b="0"/>
-      </a:effectRef>
-      <a:fontRef idx="minor"/>
-    </dgm:style>
-  </dgm:styleLbl>
-  <dgm:styleLbl name="conFgAcc1">
-    <dgm:scene3d>
-      <a:camera prst="orthographicFront"/>
-      <a:lightRig rig="threePt" dir="t"/>
-    </dgm:scene3d>
-    <dgm:sp3d/>
-    <dgm:txPr/>
-    <dgm:style>
-      <a:lnRef idx="1">
-        <a:scrgbClr r="0" g="0" b="0"/>
-      </a:lnRef>
-      <a:fillRef idx="1">
-        <a:scrgbClr r="0" g="0" b="0"/>
-      </a:fillRef>
-      <a:effectRef idx="0">
-        <a:scrgbClr r="0" g="0" b="0"/>
-      </a:effectRef>
-      <a:fontRef idx="minor"/>
-    </dgm:style>
-  </dgm:styleLbl>
-  <dgm:styleLbl name="alignAcc1">
-    <dgm:scene3d>
-      <a:camera prst="orthographicFront"/>
-      <a:lightRig rig="threePt" dir="t"/>
-    </dgm:scene3d>
-    <dgm:sp3d/>
-    <dgm:txPr/>
-    <dgm:style>
-      <a:lnRef idx="1">
-        <a:scrgbClr r="0" g="0" b="0"/>
-      </a:lnRef>
-      <a:fillRef idx="1">
-        <a:scrgbClr r="0" g="0" b="0"/>
-      </a:fillRef>
-      <a:effectRef idx="0">
-        <a:scrgbClr r="0" g="0" b="0"/>
-      </a:effectRef>
-      <a:fontRef idx="minor"/>
-    </dgm:style>
-  </dgm:styleLbl>
-  <dgm:styleLbl name="trAlignAcc1">
-    <dgm:scene3d>
-      <a:camera prst="orthographicFront"/>
-      <a:lightRig rig="threePt" dir="t"/>
-    </dgm:scene3d>
-    <dgm:sp3d/>
-    <dgm:txPr/>
-    <dgm:style>
-      <a:lnRef idx="1">
-        <a:scrgbClr r="0" g="0" b="0"/>
-      </a:lnRef>
-      <a:fillRef idx="1">
-        <a:scrgbClr r="0" g="0" b="0"/>
-      </a:fillRef>
-      <a:effectRef idx="0">
-        <a:scrgbClr r="0" g="0" b="0"/>
-      </a:effectRef>
-      <a:fontRef idx="minor"/>
-    </dgm:style>
-  </dgm:styleLbl>
-  <dgm:styleLbl name="bgAcc1">
-    <dgm:scene3d>
-      <a:camera prst="orthographicFront"/>
-      <a:lightRig rig="threePt" dir="t"/>
-    </dgm:scene3d>
-    <dgm:sp3d/>
-    <dgm:txPr/>
-    <dgm:style>
-      <a:lnRef idx="1">
-        <a:scrgbClr r="0" g="0" b="0"/>
-      </a:lnRef>
-      <a:fillRef idx="1">
-        <a:scrgbClr r="0" g="0" b="0"/>
-      </a:fillRef>
-      <a:effectRef idx="0">
-        <a:scrgbClr r="0" g="0" b="0"/>
-      </a:effectRef>
-      <a:fontRef idx="minor"/>
-    </dgm:style>
-  </dgm:styleLbl>
-  <dgm:styleLbl name="solidFgAcc1">
-    <dgm:scene3d>
-      <a:camera prst="orthographicFront"/>
-      <a:lightRig rig="threePt" dir="t"/>
-    </dgm:scene3d>
-    <dgm:sp3d/>
-    <dgm:txPr/>
-    <dgm:style>
-      <a:lnRef idx="1">
-        <a:scrgbClr r="0" g="0" b="0"/>
-      </a:lnRef>
-      <a:fillRef idx="1">
-        <a:scrgbClr r="0" g="0" b="0"/>
-      </a:fillRef>
-      <a:effectRef idx="0">
-        <a:scrgbClr r="0" g="0" b="0"/>
-      </a:effectRef>
-      <a:fontRef idx="minor"/>
-    </dgm:style>
-  </dgm:styleLbl>
-  <dgm:styleLbl name="solidAlignAcc1">
-    <dgm:scene3d>
-      <a:camera prst="orthographicFront"/>
-      <a:lightRig rig="threePt" dir="t"/>
-    </dgm:scene3d>
-    <dgm:sp3d/>
-    <dgm:txPr/>
-    <dgm:style>
-      <a:lnRef idx="1">
-        <a:scrgbClr r="0" g="0" b="0"/>
-      </a:lnRef>
-      <a:fillRef idx="1">
-        <a:scrgbClr r="0" g="0" b="0"/>
-      </a:fillRef>
-      <a:effectRef idx="0">
-        <a:scrgbClr r="0" g="0" b="0"/>
-      </a:effectRef>
-      <a:fontRef idx="minor"/>
-    </dgm:style>
-  </dgm:styleLbl>
-  <dgm:styleLbl name="solidBgAcc1">
-    <dgm:scene3d>
-      <a:camera prst="orthographicFront"/>
-      <a:lightRig rig="threePt" dir="t"/>
-    </dgm:scene3d>
-    <dgm:sp3d/>
-    <dgm:txPr/>
-    <dgm:style>
-      <a:lnRef idx="1">
-        <a:scrgbClr r="0" g="0" b="0"/>
-      </a:lnRef>
-      <a:fillRef idx="1">
-        <a:scrgbClr r="0" g="0" b="0"/>
-      </a:fillRef>
-      <a:effectRef idx="0">
-        <a:scrgbClr r="0" g="0" b="0"/>
-      </a:effectRef>
-      <a:fontRef idx="minor"/>
-    </dgm:style>
-  </dgm:styleLbl>
-  <dgm:styleLbl name="fgAccFollowNode1">
-    <dgm:scene3d>
-      <a:camera prst="orthographicFront"/>
-      <a:lightRig rig="threePt" dir="t"/>
-    </dgm:scene3d>
-    <dgm:sp3d/>
-    <dgm:txPr/>
-    <dgm:style>
-      <a:lnRef idx="1">
-        <a:scrgbClr r="0" g="0" b="0"/>
-      </a:lnRef>
-      <a:fillRef idx="1">
-        <a:scrgbClr r="0" g="0" b="0"/>
-      </a:fillRef>
-      <a:effectRef idx="0">
-        <a:scrgbClr r="0" g="0" b="0"/>
-      </a:effectRef>
-      <a:fontRef idx="minor"/>
-    </dgm:style>
-  </dgm:styleLbl>
-  <dgm:styleLbl name="alignAccFollowNode1">
-    <dgm:scene3d>
-      <a:camera prst="orthographicFront"/>
-      <a:lightRig rig="threePt" dir="t"/>
-    </dgm:scene3d>
-    <dgm:sp3d/>
-    <dgm:txPr/>
-    <dgm:style>
-      <a:lnRef idx="1">
-        <a:scrgbClr r="0" g="0" b="0"/>
-      </a:lnRef>
-      <a:fillRef idx="1">
-        <a:scrgbClr r="0" g="0" b="0"/>
-      </a:fillRef>
-      <a:effectRef idx="0">
-        <a:scrgbClr r="0" g="0" b="0"/>
-      </a:effectRef>
-      <a:fontRef idx="minor"/>
-    </dgm:style>
-  </dgm:styleLbl>
-  <dgm:styleLbl name="bgAccFollowNode1">
-    <dgm:scene3d>
-      <a:camera prst="orthographicFront"/>
-      <a:lightRig rig="threePt" dir="t"/>
-    </dgm:scene3d>
-    <dgm:sp3d/>
-    <dgm:txPr/>
-    <dgm:style>
-      <a:lnRef idx="1">
-        <a:scrgbClr r="0" g="0" b="0"/>
-      </a:lnRef>
-      <a:fillRef idx="1">
-        <a:scrgbClr r="0" g="0" b="0"/>
-      </a:fillRef>
-      <a:effectRef idx="0">
-        <a:scrgbClr r="0" g="0" b="0"/>
-      </a:effectRef>
-      <a:fontRef idx="minor"/>
-    </dgm:style>
-  </dgm:styleLbl>
-  <dgm:styleLbl name="fgAcc0">
-    <dgm:scene3d>
-      <a:camera prst="orthographicFront"/>
-      <a:lightRig rig="threePt" dir="t"/>
-    </dgm:scene3d>
-    <dgm:sp3d/>
-    <dgm:txPr/>
-    <dgm:style>
-      <a:lnRef idx="1">
-        <a:scrgbClr r="0" g="0" b="0"/>
-      </a:lnRef>
-      <a:fillRef idx="1">
-        <a:scrgbClr r="0" g="0" b="0"/>
-      </a:fillRef>
-      <a:effectRef idx="0">
-        <a:scrgbClr r="0" g="0" b="0"/>
-      </a:effectRef>
-      <a:fontRef idx="minor"/>
-    </dgm:style>
-  </dgm:styleLbl>
-  <dgm:styleLbl name="fgAcc2">
-    <dgm:scene3d>
-      <a:camera prst="orthographicFront"/>
-      <a:lightRig rig="threePt" dir="t"/>
-    </dgm:scene3d>
-    <dgm:sp3d/>
-    <dgm:txPr/>
-    <dgm:style>
-      <a:lnRef idx="1">
-        <a:scrgbClr r="0" g="0" b="0"/>
-      </a:lnRef>
-      <a:fillRef idx="1">
-        <a:scrgbClr r="0" g="0" b="0"/>
-      </a:fillRef>
-      <a:effectRef idx="0">
-        <a:scrgbClr r="0" g="0" b="0"/>
-      </a:effectRef>
-      <a:fontRef idx="minor"/>
-    </dgm:style>
-  </dgm:styleLbl>
-  <dgm:styleLbl name="fgAcc3">
-    <dgm:scene3d>
-      <a:camera prst="orthographicFront"/>
-      <a:lightRig rig="threePt" dir="t"/>
-    </dgm:scene3d>
-    <dgm:sp3d/>
-    <dgm:txPr/>
-    <dgm:style>
-      <a:lnRef idx="1">
-        <a:scrgbClr r="0" g="0" b="0"/>
-      </a:lnRef>
-      <a:fillRef idx="1">
-        <a:scrgbClr r="0" g="0" b="0"/>
-      </a:fillRef>
-      <a:effectRef idx="0">
-        <a:scrgbClr r="0" g="0" b="0"/>
-      </a:effectRef>
-      <a:fontRef idx="minor"/>
-    </dgm:style>
-  </dgm:styleLbl>
-  <dgm:styleLbl name="fgAcc4">
-    <dgm:scene3d>
-      <a:camera prst="orthographicFront"/>
-      <a:lightRig rig="threePt" dir="t"/>
-    </dgm:scene3d>
-    <dgm:sp3d/>
-    <dgm:txPr/>
-    <dgm:style>
-      <a:lnRef idx="1">
-        <a:scrgbClr r="0" g="0" b="0"/>
-      </a:lnRef>
-      <a:fillRef idx="1">
-        <a:scrgbClr r="0" g="0" b="0"/>
-      </a:fillRef>
-      <a:effectRef idx="0">
-        <a:scrgbClr r="0" g="0" b="0"/>
-      </a:effectRef>
-      <a:fontRef idx="minor"/>
-    </dgm:style>
-  </dgm:styleLbl>
-  <dgm:styleLbl name="bgShp">
-    <dgm:scene3d>
-      <a:camera prst="orthographicFront"/>
-      <a:lightRig rig="threePt" dir="t"/>
-    </dgm:scene3d>
-    <dgm:sp3d/>
-    <dgm:txPr/>
-    <dgm:style>
-      <a:lnRef idx="0">
-        <a:scrgbClr r="0" g="0" b="0"/>
-      </a:lnRef>
-      <a:fillRef idx="1">
-        <a:scrgbClr r="0" g="0" b="0"/>
-      </a:fillRef>
-      <a:effectRef idx="2">
-        <a:scrgbClr r="0" g="0" b="0"/>
-      </a:effectRef>
-      <a:fontRef idx="minor"/>
-    </dgm:style>
-  </dgm:styleLbl>
-  <dgm:styleLbl name="dkBgShp">
-    <dgm:scene3d>
-      <a:camera prst="orthographicFront"/>
-      <a:lightRig rig="threePt" dir="t"/>
-    </dgm:scene3d>
-    <dgm:sp3d/>
-    <dgm:txPr/>
-    <dgm:style>
-      <a:lnRef idx="0">
-        <a:scrgbClr r="0" g="0" b="0"/>
-      </a:lnRef>
-      <a:fillRef idx="1">
-        <a:scrgbClr r="0" g="0" b="0"/>
-      </a:fillRef>
-      <a:effectRef idx="2">
-        <a:scrgbClr r="0" g="0" b="0"/>
-      </a:effectRef>
-      <a:fontRef idx="minor"/>
-    </dgm:style>
-  </dgm:styleLbl>
-  <dgm:styleLbl name="trBgShp">
-    <dgm:scene3d>
-      <a:camera prst="orthographicFront"/>
-      <a:lightRig rig="threePt" dir="t"/>
-    </dgm:scene3d>
-    <dgm:sp3d/>
-    <dgm:txPr/>
-    <dgm:style>
-      <a:lnRef idx="0">
-        <a:scrgbClr r="0" g="0" b="0"/>
-      </a:lnRef>
-      <a:fillRef idx="1">
-        <a:scrgbClr r="0" g="0" b="0"/>
-      </a:fillRef>
-      <a:effectRef idx="0">
-        <a:scrgbClr r="0" g="0" b="0"/>
-      </a:effectRef>
-      <a:fontRef idx="minor"/>
-    </dgm:style>
-  </dgm:styleLbl>
-  <dgm:styleLbl name="fgShp">
-    <dgm:scene3d>
-      <a:camera prst="orthographicFront"/>
-      <a:lightRig rig="threePt" dir="t"/>
-    </dgm:scene3d>
-    <dgm:sp3d/>
-    <dgm:txPr/>
-    <dgm:style>
-      <a:lnRef idx="0">
-        <a:scrgbClr r="0" g="0" b="0"/>
-      </a:lnRef>
-      <a:fillRef idx="3">
-        <a:scrgbClr r="0" g="0" b="0"/>
-      </a:fillRef>
-      <a:effectRef idx="2">
-        <a:scrgbClr r="0" g="0" b="0"/>
-      </a:effectRef>
-      <a:fontRef idx="minor"/>
-    </dgm:style>
-  </dgm:styleLbl>
-  <dgm:styleLbl name="revTx">
-    <dgm:scene3d>
-      <a:camera prst="orthographicFront"/>
-      <a:lightRig rig="threePt" dir="t"/>
-    </dgm:scene3d>
-    <dgm:sp3d/>
-    <dgm:txPr/>
-    <dgm:style>
-      <a:lnRef idx="0">
-        <a:scrgbClr r="0" g="0" b="0"/>
-      </a:lnRef>
-      <a:fillRef idx="0">
-        <a:scrgbClr r="0" g="0" b="0"/>
-      </a:fillRef>
-      <a:effectRef idx="0">
-        <a:scrgbClr r="0" g="0" b="0"/>
-      </a:effectRef>
-      <a:fontRef idx="minor"/>
-    </dgm:style>
-  </dgm:styleLbl>
-</dgm:styleDef>
-</file>
-
-<file path=ppt/diagrams/quickStyle12.xml><?xml version="1.0" encoding="utf-8"?>
-<dgm:styleDef xmlns:dgm="http://schemas.openxmlformats.org/drawingml/2006/diagram" xmlns:a="http://schemas.openxmlformats.org/drawingml/2006/main" uniqueId="urn:microsoft.com/office/officeart/2005/8/quickstyle/simple4">
-  <dgm:title val=""/>
-  <dgm:desc val=""/>
-  <dgm:catLst>
-    <dgm:cat type="simple" pri="10400"/>
-  </dgm:catLst>
-  <dgm:scene3d>
-    <a:camera prst="orthographicFront"/>
-    <a:lightRig rig="threePt" dir="t"/>
-  </dgm:scene3d>
-  <dgm:styleLbl name="node0">
-    <dgm:scene3d>
-      <a:camera prst="orthographicFront"/>
-      <a:lightRig rig="threePt" dir="t"/>
-    </dgm:scene3d>
-    <dgm:sp3d/>
-    <dgm:txPr/>
-    <dgm:style>
-      <a:lnRef idx="0">
-        <a:scrgbClr r="0" g="0" b="0"/>
-      </a:lnRef>
-      <a:fillRef idx="3">
-        <a:scrgbClr r="0" g="0" b="0"/>
-      </a:fillRef>
-      <a:effectRef idx="2">
-        <a:scrgbClr r="0" g="0" b="0"/>
-      </a:effectRef>
-      <a:fontRef idx="minor">
-        <a:schemeClr val="lt1"/>
-      </a:fontRef>
-    </dgm:style>
-  </dgm:styleLbl>
-  <dgm:styleLbl name="lnNode1">
-    <dgm:scene3d>
-      <a:camera prst="orthographicFront"/>
-      <a:lightRig rig="threePt" dir="t"/>
-    </dgm:scene3d>
-    <dgm:sp3d/>
-    <dgm:txPr/>
-    <dgm:style>
-      <a:lnRef idx="1">
-        <a:scrgbClr r="0" g="0" b="0"/>
-      </a:lnRef>
-      <a:fillRef idx="3">
-        <a:scrgbClr r="0" g="0" b="0"/>
-      </a:fillRef>
-      <a:effectRef idx="2">
-        <a:scrgbClr r="0" g="0" b="0"/>
-      </a:effectRef>
-      <a:fontRef idx="minor">
-        <a:schemeClr val="lt1"/>
-      </a:fontRef>
-    </dgm:style>
-  </dgm:styleLbl>
-  <dgm:styleLbl name="vennNode1">
-    <dgm:scene3d>
-      <a:camera prst="orthographicFront"/>
-      <a:lightRig rig="threePt" dir="t"/>
-    </dgm:scene3d>
-    <dgm:sp3d/>
-    <dgm:txPr/>
-    <dgm:style>
-      <a:lnRef idx="0">
-        <a:scrgbClr r="0" g="0" b="0"/>
-      </a:lnRef>
-      <a:fillRef idx="3">
-        <a:scrgbClr r="0" g="0" b="0"/>
-      </a:fillRef>
-      <a:effectRef idx="0">
-        <a:scrgbClr r="0" g="0" b="0"/>
-      </a:effectRef>
-      <a:fontRef idx="minor">
-        <a:schemeClr val="tx1"/>
-      </a:fontRef>
-    </dgm:style>
-  </dgm:styleLbl>
-  <dgm:styleLbl name="alignNode1">
-    <dgm:scene3d>
-      <a:camera prst="orthographicFront"/>
-      <a:lightRig rig="threePt" dir="t"/>
-    </dgm:scene3d>
-    <dgm:sp3d/>
-    <dgm:txPr/>
-    <dgm:style>
-      <a:lnRef idx="1">
-        <a:scrgbClr r="0" g="0" b="0"/>
-      </a:lnRef>
-      <a:fillRef idx="3">
-        <a:scrgbClr r="0" g="0" b="0"/>
-      </a:fillRef>
-      <a:effectRef idx="2">
-        <a:scrgbClr r="0" g="0" b="0"/>
-      </a:effectRef>
-      <a:fontRef idx="minor">
-        <a:schemeClr val="lt1"/>
-      </a:fontRef>
-    </dgm:style>
-  </dgm:styleLbl>
-  <dgm:styleLbl name="node1">
-    <dgm:scene3d>
-      <a:camera prst="orthographicFront"/>
-      <a:lightRig rig="threePt" dir="t"/>
-    </dgm:scene3d>
-    <dgm:sp3d/>
-    <dgm:txPr/>
-    <dgm:style>
-      <a:lnRef idx="0">
-        <a:scrgbClr r="0" g="0" b="0"/>
-      </a:lnRef>
-      <a:fillRef idx="3">
-        <a:scrgbClr r="0" g="0" b="0"/>
-      </a:fillRef>
-      <a:effectRef idx="2">
-        <a:scrgbClr r="0" g="0" b="0"/>
-      </a:effectRef>
-      <a:fontRef idx="minor">
-        <a:schemeClr val="lt1"/>
-      </a:fontRef>
-    </dgm:style>
-  </dgm:styleLbl>
-  <dgm:styleLbl name="node2">
-    <dgm:scene3d>
-      <a:camera prst="orthographicFront"/>
-      <a:lightRig rig="threePt" dir="t"/>
-    </dgm:scene3d>
-    <dgm:sp3d/>
-    <dgm:txPr/>
-    <dgm:style>
-      <a:lnRef idx="0">
-        <a:scrgbClr r="0" g="0" b="0"/>
-      </a:lnRef>
-      <a:fillRef idx="3">
-        <a:scrgbClr r="0" g="0" b="0"/>
-      </a:fillRef>
-      <a:effectRef idx="2">
-        <a:scrgbClr r="0" g="0" b="0"/>
-      </a:effectRef>
-      <a:fontRef idx="minor">
-        <a:schemeClr val="lt1"/>
-      </a:fontRef>
-    </dgm:style>
-  </dgm:styleLbl>
-  <dgm:styleLbl name="node3">
-    <dgm:scene3d>
-      <a:camera prst="orthographicFront"/>
-      <a:lightRig rig="threePt" dir="t"/>
-    </dgm:scene3d>
-    <dgm:sp3d/>
-    <dgm:txPr/>
-    <dgm:style>
-      <a:lnRef idx="0">
-        <a:scrgbClr r="0" g="0" b="0"/>
-      </a:lnRef>
-      <a:fillRef idx="3">
-        <a:scrgbClr r="0" g="0" b="0"/>
-      </a:fillRef>
-      <a:effectRef idx="2">
-        <a:scrgbClr r="0" g="0" b="0"/>
-      </a:effectRef>
-      <a:fontRef idx="minor">
-        <a:schemeClr val="lt1"/>
-      </a:fontRef>
-    </dgm:style>
-  </dgm:styleLbl>
-  <dgm:styleLbl name="node4">
-    <dgm:scene3d>
-      <a:camera prst="orthographicFront"/>
-      <a:lightRig rig="threePt" dir="t"/>
-    </dgm:scene3d>
-    <dgm:sp3d/>
-    <dgm:txPr/>
-    <dgm:style>
-      <a:lnRef idx="0">
-        <a:scrgbClr r="0" g="0" b="0"/>
-      </a:lnRef>
-      <a:fillRef idx="3">
-        <a:scrgbClr r="0" g="0" b="0"/>
-      </a:fillRef>
-      <a:effectRef idx="2">
-        <a:scrgbClr r="0" g="0" b="0"/>
-      </a:effectRef>
-      <a:fontRef idx="minor">
-        <a:schemeClr val="lt1"/>
-      </a:fontRef>
-    </dgm:style>
-  </dgm:styleLbl>
-  <dgm:styleLbl name="fgImgPlace1">
-    <dgm:scene3d>
-      <a:camera prst="orthographicFront"/>
-      <a:lightRig rig="threePt" dir="t"/>
-    </dgm:scene3d>
-    <dgm:sp3d/>
-    <dgm:txPr/>
-    <dgm:style>
-      <a:lnRef idx="0">
-        <a:scrgbClr r="0" g="0" b="0"/>
-      </a:lnRef>
-      <a:fillRef idx="1">
-        <a:scrgbClr r="0" g="0" b="0"/>
-      </a:fillRef>
-      <a:effectRef idx="2">
-        <a:scrgbClr r="0" g="0" b="0"/>
-      </a:effectRef>
-      <a:fontRef idx="minor"/>
-    </dgm:style>
-  </dgm:styleLbl>
-  <dgm:styleLbl name="alignImgPlace1">
-    <dgm:scene3d>
-      <a:camera prst="orthographicFront"/>
-      <a:lightRig rig="threePt" dir="t"/>
-    </dgm:scene3d>
-    <dgm:sp3d/>
-    <dgm:txPr/>
-    <dgm:style>
-      <a:lnRef idx="0">
-        <a:scrgbClr r="0" g="0" b="0"/>
-      </a:lnRef>
-      <a:fillRef idx="1">
-        <a:scrgbClr r="0" g="0" b="0"/>
-      </a:fillRef>
-      <a:effectRef idx="2">
-        <a:scrgbClr r="0" g="0" b="0"/>
-      </a:effectRef>
-      <a:fontRef idx="minor"/>
-    </dgm:style>
-  </dgm:styleLbl>
-  <dgm:styleLbl name="bgImgPlace1">
-    <dgm:scene3d>
-      <a:camera prst="orthographicFront"/>
-      <a:lightRig rig="threePt" dir="t"/>
-    </dgm:scene3d>
-    <dgm:sp3d/>
-    <dgm:txPr/>
-    <dgm:style>
-      <a:lnRef idx="0">
-        <a:scrgbClr r="0" g="0" b="0"/>
-      </a:lnRef>
-      <a:fillRef idx="1">
-        <a:scrgbClr r="0" g="0" b="0"/>
-      </a:fillRef>
-      <a:effectRef idx="2">
-        <a:scrgbClr r="0" g="0" b="0"/>
-      </a:effectRef>
-      <a:fontRef idx="minor"/>
-    </dgm:style>
-  </dgm:styleLbl>
-  <dgm:styleLbl name="sibTrans2D1">
-    <dgm:scene3d>
-      <a:camera prst="orthographicFront"/>
-      <a:lightRig rig="threePt" dir="t"/>
-    </dgm:scene3d>
-    <dgm:sp3d/>
-    <dgm:txPr/>
-    <dgm:style>
-      <a:lnRef idx="0">
-        <a:scrgbClr r="0" g="0" b="0"/>
-      </a:lnRef>
-      <a:fillRef idx="3">
-        <a:scrgbClr r="0" g="0" b="0"/>
-      </a:fillRef>
-      <a:effectRef idx="2">
-        <a:scrgbClr r="0" g="0" b="0"/>
-      </a:effectRef>
-      <a:fontRef idx="minor">
-        <a:schemeClr val="lt1"/>
-      </a:fontRef>
-    </dgm:style>
-  </dgm:styleLbl>
-  <dgm:styleLbl name="fgSibTrans2D1">
-    <dgm:scene3d>
-      <a:camera prst="orthographicFront"/>
-      <a:lightRig rig="threePt" dir="t"/>
-    </dgm:scene3d>
-    <dgm:sp3d/>
-    <dgm:txPr/>
-    <dgm:style>
-      <a:lnRef idx="0">
-        <a:scrgbClr r="0" g="0" b="0"/>
-      </a:lnRef>
-      <a:fillRef idx="3">
-        <a:scrgbClr r="0" g="0" b="0"/>
-      </a:fillRef>
-      <a:effectRef idx="2">
-        <a:scrgbClr r="0" g="0" b="0"/>
-      </a:effectRef>
-      <a:fontRef idx="minor">
-        <a:schemeClr val="lt1"/>
-      </a:fontRef>
-    </dgm:style>
-  </dgm:styleLbl>
-  <dgm:styleLbl name="bgSibTrans2D1">
-    <dgm:scene3d>
-      <a:camera prst="orthographicFront"/>
-      <a:lightRig rig="threePt" dir="t"/>
-    </dgm:scene3d>
-    <dgm:sp3d/>
-    <dgm:txPr/>
-    <dgm:style>
-      <a:lnRef idx="0">
-        <a:scrgbClr r="0" g="0" b="0"/>
-      </a:lnRef>
-      <a:fillRef idx="3">
-        <a:scrgbClr r="0" g="0" b="0"/>
-      </a:fillRef>
-      <a:effectRef idx="2">
-        <a:scrgbClr r="0" g="0" b="0"/>
-      </a:effectRef>
-      <a:fontRef idx="minor">
-        <a:schemeClr val="lt1"/>
-      </a:fontRef>
-    </dgm:style>
-  </dgm:styleLbl>
-  <dgm:styleLbl name="sibTrans1D1">
-    <dgm:scene3d>
-      <a:camera prst="orthographicFront"/>
-      <a:lightRig rig="threePt" dir="t"/>
-    </dgm:scene3d>
-    <dgm:sp3d/>
-    <dgm:txPr/>
-    <dgm:style>
-      <a:lnRef idx="1">
-        <a:scrgbClr r="0" g="0" b="0"/>
-      </a:lnRef>
-      <a:fillRef idx="0">
-        <a:scrgbClr r="0" g="0" b="0"/>
-      </a:fillRef>
-      <a:effectRef idx="0">
-        <a:scrgbClr r="0" g="0" b="0"/>
-      </a:effectRef>
-      <a:fontRef idx="minor"/>
-    </dgm:style>
-  </dgm:styleLbl>
-  <dgm:styleLbl name="callout">
-    <dgm:scene3d>
-      <a:camera prst="orthographicFront"/>
-      <a:lightRig rig="threePt" dir="t"/>
-    </dgm:scene3d>
-    <dgm:sp3d/>
-    <dgm:txPr/>
-    <dgm:style>
-      <a:lnRef idx="2">
-        <a:scrgbClr r="0" g="0" b="0"/>
-      </a:lnRef>
-      <a:fillRef idx="1">
-        <a:scrgbClr r="0" g="0" b="0"/>
-      </a:fillRef>
-      <a:effectRef idx="1">
-        <a:scrgbClr r="0" g="0" b="0"/>
-      </a:effectRef>
-      <a:fontRef idx="minor"/>
-    </dgm:style>
-  </dgm:styleLbl>
-  <dgm:styleLbl name="asst0">
-    <dgm:scene3d>
-      <a:camera prst="orthographicFront"/>
-      <a:lightRig rig="threePt" dir="t"/>
-    </dgm:scene3d>
-    <dgm:sp3d/>
-    <dgm:txPr/>
-    <dgm:style>
-      <a:lnRef idx="0">
-        <a:scrgbClr r="0" g="0" b="0"/>
-      </a:lnRef>
-      <a:fillRef idx="3">
-        <a:scrgbClr r="0" g="0" b="0"/>
-      </a:fillRef>
-      <a:effectRef idx="2">
-        <a:scrgbClr r="0" g="0" b="0"/>
-      </a:effectRef>
-      <a:fontRef idx="minor">
-        <a:schemeClr val="lt1"/>
-      </a:fontRef>
-    </dgm:style>
-  </dgm:styleLbl>
-  <dgm:styleLbl name="asst1">
-    <dgm:scene3d>
-      <a:camera prst="orthographicFront"/>
-      <a:lightRig rig="threePt" dir="t"/>
-    </dgm:scene3d>
-    <dgm:sp3d/>
-    <dgm:txPr/>
-    <dgm:style>
-      <a:lnRef idx="0">
-        <a:scrgbClr r="0" g="0" b="0"/>
-      </a:lnRef>
-      <a:fillRef idx="3">
-        <a:scrgbClr r="0" g="0" b="0"/>
-      </a:fillRef>
-      <a:effectRef idx="2">
-        <a:scrgbClr r="0" g="0" b="0"/>
-      </a:effectRef>
-      <a:fontRef idx="minor">
-        <a:schemeClr val="lt1"/>
-      </a:fontRef>
-    </dgm:style>
-  </dgm:styleLbl>
-  <dgm:styleLbl name="asst2">
-    <dgm:scene3d>
-      <a:camera prst="orthographicFront"/>
-      <a:lightRig rig="threePt" dir="t"/>
-    </dgm:scene3d>
-    <dgm:sp3d/>
-    <dgm:txPr/>
-    <dgm:style>
-      <a:lnRef idx="0">
-        <a:scrgbClr r="0" g="0" b="0"/>
-      </a:lnRef>
-      <a:fillRef idx="3">
-        <a:scrgbClr r="0" g="0" b="0"/>
-      </a:fillRef>
-      <a:effectRef idx="2">
-        <a:scrgbClr r="0" g="0" b="0"/>
-      </a:effectRef>
-      <a:fontRef idx="minor">
-        <a:schemeClr val="lt1"/>
-      </a:fontRef>
-    </dgm:style>
-  </dgm:styleLbl>
-  <dgm:styleLbl name="asst3">
-    <dgm:scene3d>
-      <a:camera prst="orthographicFront"/>
-      <a:lightRig rig="threePt" dir="t"/>
-    </dgm:scene3d>
-    <dgm:sp3d/>
-    <dgm:txPr/>
-    <dgm:style>
-      <a:lnRef idx="0">
-        <a:scrgbClr r="0" g="0" b="0"/>
-      </a:lnRef>
-      <a:fillRef idx="3">
-        <a:scrgbClr r="0" g="0" b="0"/>
-      </a:fillRef>
-      <a:effectRef idx="2">
-        <a:scrgbClr r="0" g="0" b="0"/>
-      </a:effectRef>
-      <a:fontRef idx="minor">
-        <a:schemeClr val="lt1"/>
-      </a:fontRef>
-    </dgm:style>
-  </dgm:styleLbl>
-  <dgm:styleLbl name="asst4">
-    <dgm:scene3d>
-      <a:camera prst="orthographicFront"/>
-      <a:lightRig rig="threePt" dir="t"/>
-    </dgm:scene3d>
-    <dgm:sp3d/>
-    <dgm:txPr/>
-    <dgm:style>
-      <a:lnRef idx="0">
-        <a:scrgbClr r="0" g="0" b="0"/>
-      </a:lnRef>
-      <a:fillRef idx="3">
-        <a:scrgbClr r="0" g="0" b="0"/>
-      </a:fillRef>
-      <a:effectRef idx="2">
-        <a:scrgbClr r="0" g="0" b="0"/>
-      </a:effectRef>
-      <a:fontRef idx="minor">
-        <a:schemeClr val="lt1"/>
-      </a:fontRef>
-    </dgm:style>
-  </dgm:styleLbl>
-  <dgm:styleLbl name="parChTrans2D1">
-    <dgm:scene3d>
-      <a:camera prst="orthographicFront"/>
-      <a:lightRig rig="threePt" dir="t"/>
-    </dgm:scene3d>
-    <dgm:sp3d/>
-    <dgm:txPr/>
-    <dgm:style>
-      <a:lnRef idx="0">
-        <a:scrgbClr r="0" g="0" b="0"/>
-      </a:lnRef>
-      <a:fillRef idx="3">
-        <a:scrgbClr r="0" g="0" b="0"/>
-      </a:fillRef>
-      <a:effectRef idx="2">
-        <a:scrgbClr r="0" g="0" b="0"/>
-      </a:effectRef>
-      <a:fontRef idx="minor">
-        <a:schemeClr val="lt1"/>
-      </a:fontRef>
-    </dgm:style>
-  </dgm:styleLbl>
-  <dgm:styleLbl name="parChTrans2D2">
-    <dgm:scene3d>
-      <a:camera prst="orthographicFront"/>
-      <a:lightRig rig="threePt" dir="t"/>
-    </dgm:scene3d>
-    <dgm:sp3d/>
-    <dgm:txPr/>
-    <dgm:style>
-      <a:lnRef idx="0">
-        <a:scrgbClr r="0" g="0" b="0"/>
-      </a:lnRef>
-      <a:fillRef idx="3">
-        <a:scrgbClr r="0" g="0" b="0"/>
-      </a:fillRef>
-      <a:effectRef idx="2">
-        <a:scrgbClr r="0" g="0" b="0"/>
-      </a:effectRef>
-      <a:fontRef idx="minor">
-        <a:schemeClr val="lt1"/>
-      </a:fontRef>
-    </dgm:style>
-  </dgm:styleLbl>
-  <dgm:styleLbl name="parChTrans2D3">
-    <dgm:scene3d>
-      <a:camera prst="orthographicFront"/>
-      <a:lightRig rig="threePt" dir="t"/>
-    </dgm:scene3d>
-    <dgm:sp3d/>
-    <dgm:txPr/>
-    <dgm:style>
-      <a:lnRef idx="1">
-        <a:scrgbClr r="0" g="0" b="0"/>
-      </a:lnRef>
-      <a:fillRef idx="3">
-        <a:scrgbClr r="0" g="0" b="0"/>
-      </a:fillRef>
-      <a:effectRef idx="2">
-        <a:scrgbClr r="0" g="0" b="0"/>
-      </a:effectRef>
-      <a:fontRef idx="minor">
-        <a:schemeClr val="lt1"/>
-      </a:fontRef>
-    </dgm:style>
-  </dgm:styleLbl>
-  <dgm:styleLbl name="parChTrans2D4">
-    <dgm:scene3d>
-      <a:camera prst="orthographicFront"/>
-      <a:lightRig rig="threePt" dir="t"/>
-    </dgm:scene3d>
-    <dgm:sp3d/>
-    <dgm:txPr/>
-    <dgm:style>
-      <a:lnRef idx="1">
-        <a:scrgbClr r="0" g="0" b="0"/>
-      </a:lnRef>
-      <a:fillRef idx="3">
-        <a:scrgbClr r="0" g="0" b="0"/>
-      </a:fillRef>
-      <a:effectRef idx="2">
-        <a:scrgbClr r="0" g="0" b="0"/>
-      </a:effectRef>
-      <a:fontRef idx="minor">
-        <a:schemeClr val="lt1"/>
-      </a:fontRef>
-    </dgm:style>
-  </dgm:styleLbl>
-  <dgm:styleLbl name="parChTrans1D1">
-    <dgm:scene3d>
-      <a:camera prst="orthographicFront"/>
-      <a:lightRig rig="threePt" dir="t"/>
-    </dgm:scene3d>
-    <dgm:sp3d/>
-    <dgm:txPr/>
-    <dgm:style>
-      <a:lnRef idx="1">
-        <a:scrgbClr r="0" g="0" b="0"/>
-      </a:lnRef>
-      <a:fillRef idx="0">
-        <a:scrgbClr r="0" g="0" b="0"/>
-      </a:fillRef>
-      <a:effectRef idx="0">
-        <a:scrgbClr r="0" g="0" b="0"/>
-      </a:effectRef>
-      <a:fontRef idx="minor"/>
-    </dgm:style>
-  </dgm:styleLbl>
-  <dgm:styleLbl name="parChTrans1D2">
-    <dgm:scene3d>
-      <a:camera prst="orthographicFront"/>
-      <a:lightRig rig="threePt" dir="t"/>
-    </dgm:scene3d>
-    <dgm:sp3d/>
-    <dgm:txPr/>
-    <dgm:style>
-      <a:lnRef idx="1">
-        <a:scrgbClr r="0" g="0" b="0"/>
-      </a:lnRef>
-      <a:fillRef idx="0">
-        <a:scrgbClr r="0" g="0" b="0"/>
-      </a:fillRef>
-      <a:effectRef idx="0">
-        <a:scrgbClr r="0" g="0" b="0"/>
-      </a:effectRef>
-      <a:fontRef idx="minor"/>
-    </dgm:style>
-  </dgm:styleLbl>
-  <dgm:styleLbl name="parChTrans1D3">
-    <dgm:scene3d>
-      <a:camera prst="orthographicFront"/>
-      <a:lightRig rig="threePt" dir="t"/>
-    </dgm:scene3d>
-    <dgm:sp3d/>
-    <dgm:txPr/>
-    <dgm:style>
-      <a:lnRef idx="1">
-        <a:scrgbClr r="0" g="0" b="0"/>
-      </a:lnRef>
-      <a:fillRef idx="0">
-        <a:scrgbClr r="0" g="0" b="0"/>
-      </a:fillRef>
-      <a:effectRef idx="0">
-        <a:scrgbClr r="0" g="0" b="0"/>
-      </a:effectRef>
-      <a:fontRef idx="minor"/>
-    </dgm:style>
-  </dgm:styleLbl>
-  <dgm:styleLbl name="parChTrans1D4">
-    <dgm:scene3d>
-      <a:camera prst="orthographicFront"/>
-      <a:lightRig rig="threePt" dir="t"/>
-    </dgm:scene3d>
-    <dgm:sp3d/>
-    <dgm:txPr/>
-    <dgm:style>
-      <a:lnRef idx="1">
-        <a:scrgbClr r="0" g="0" b="0"/>
-      </a:lnRef>
-      <a:fillRef idx="0">
-        <a:scrgbClr r="0" g="0" b="0"/>
-      </a:fillRef>
-      <a:effectRef idx="0">
-        <a:scrgbClr r="0" g="0" b="0"/>
-      </a:effectRef>
-      <a:fontRef idx="minor"/>
-    </dgm:style>
-  </dgm:styleLbl>
-  <dgm:styleLbl name="fgAcc1">
-    <dgm:scene3d>
-      <a:camera prst="orthographicFront"/>
-      <a:lightRig rig="threePt" dir="t"/>
-    </dgm:scene3d>
-    <dgm:sp3d/>
-    <dgm:txPr/>
-    <dgm:style>
-      <a:lnRef idx="1">
-        <a:scrgbClr r="0" g="0" b="0"/>
-      </a:lnRef>
-      <a:fillRef idx="1">
-        <a:scrgbClr r="0" g="0" b="0"/>
-      </a:fillRef>
-      <a:effectRef idx="0">
-        <a:scrgbClr r="0" g="0" b="0"/>
-      </a:effectRef>
-      <a:fontRef idx="minor"/>
-    </dgm:style>
-  </dgm:styleLbl>
-  <dgm:styleLbl name="conFgAcc1">
-    <dgm:scene3d>
-      <a:camera prst="orthographicFront"/>
-      <a:lightRig rig="threePt" dir="t"/>
-    </dgm:scene3d>
-    <dgm:sp3d/>
-    <dgm:txPr/>
-    <dgm:style>
-      <a:lnRef idx="1">
-        <a:scrgbClr r="0" g="0" b="0"/>
-      </a:lnRef>
-      <a:fillRef idx="1">
-        <a:scrgbClr r="0" g="0" b="0"/>
-      </a:fillRef>
-      <a:effectRef idx="0">
-        <a:scrgbClr r="0" g="0" b="0"/>
-      </a:effectRef>
-      <a:fontRef idx="minor"/>
-    </dgm:style>
-  </dgm:styleLbl>
-  <dgm:styleLbl name="alignAcc1">
-    <dgm:scene3d>
-      <a:camera prst="orthographicFront"/>
-      <a:lightRig rig="threePt" dir="t"/>
-    </dgm:scene3d>
-    <dgm:sp3d/>
-    <dgm:txPr/>
-    <dgm:style>
-      <a:lnRef idx="1">
-        <a:scrgbClr r="0" g="0" b="0"/>
-      </a:lnRef>
-      <a:fillRef idx="1">
-        <a:scrgbClr r="0" g="0" b="0"/>
-      </a:fillRef>
-      <a:effectRef idx="0">
-        <a:scrgbClr r="0" g="0" b="0"/>
-      </a:effectRef>
-      <a:fontRef idx="minor"/>
-    </dgm:style>
-  </dgm:styleLbl>
-  <dgm:styleLbl name="trAlignAcc1">
-    <dgm:scene3d>
-      <a:camera prst="orthographicFront"/>
-      <a:lightRig rig="threePt" dir="t"/>
-    </dgm:scene3d>
-    <dgm:sp3d/>
-    <dgm:txPr/>
-    <dgm:style>
-      <a:lnRef idx="1">
-        <a:scrgbClr r="0" g="0" b="0"/>
-      </a:lnRef>
-      <a:fillRef idx="1">
-        <a:scrgbClr r="0" g="0" b="0"/>
-      </a:fillRef>
-      <a:effectRef idx="0">
-        <a:scrgbClr r="0" g="0" b="0"/>
-      </a:effectRef>
-      <a:fontRef idx="minor"/>
-    </dgm:style>
-  </dgm:styleLbl>
-  <dgm:styleLbl name="bgAcc1">
-    <dgm:scene3d>
-      <a:camera prst="orthographicFront"/>
-      <a:lightRig rig="threePt" dir="t"/>
-    </dgm:scene3d>
-    <dgm:sp3d/>
-    <dgm:txPr/>
-    <dgm:style>
-      <a:lnRef idx="1">
-        <a:scrgbClr r="0" g="0" b="0"/>
-      </a:lnRef>
-      <a:fillRef idx="1">
-        <a:scrgbClr r="0" g="0" b="0"/>
-      </a:fillRef>
-      <a:effectRef idx="0">
-        <a:scrgbClr r="0" g="0" b="0"/>
-      </a:effectRef>
-      <a:fontRef idx="minor"/>
-    </dgm:style>
-  </dgm:styleLbl>
-  <dgm:styleLbl name="solidFgAcc1">
-    <dgm:scene3d>
-      <a:camera prst="orthographicFront"/>
-      <a:lightRig rig="threePt" dir="t"/>
-    </dgm:scene3d>
-    <dgm:sp3d/>
-    <dgm:txPr/>
-    <dgm:style>
-      <a:lnRef idx="1">
-        <a:scrgbClr r="0" g="0" b="0"/>
-      </a:lnRef>
-      <a:fillRef idx="1">
-        <a:scrgbClr r="0" g="0" b="0"/>
-      </a:fillRef>
-      <a:effectRef idx="0">
-        <a:scrgbClr r="0" g="0" b="0"/>
-      </a:effectRef>
-      <a:fontRef idx="minor"/>
-    </dgm:style>
-  </dgm:styleLbl>
-  <dgm:styleLbl name="solidAlignAcc1">
-    <dgm:scene3d>
-      <a:camera prst="orthographicFront"/>
-      <a:lightRig rig="threePt" dir="t"/>
-    </dgm:scene3d>
-    <dgm:sp3d/>
-    <dgm:txPr/>
-    <dgm:style>
-      <a:lnRef idx="1">
-        <a:scrgbClr r="0" g="0" b="0"/>
-      </a:lnRef>
-      <a:fillRef idx="1">
-        <a:scrgbClr r="0" g="0" b="0"/>
-      </a:fillRef>
-      <a:effectRef idx="0">
-        <a:scrgbClr r="0" g="0" b="0"/>
-      </a:effectRef>
-      <a:fontRef idx="minor"/>
-    </dgm:style>
-  </dgm:styleLbl>
-  <dgm:styleLbl name="solidBgAcc1">
-    <dgm:scene3d>
-      <a:camera prst="orthographicFront"/>
-      <a:lightRig rig="threePt" dir="t"/>
-    </dgm:scene3d>
-    <dgm:sp3d/>
-    <dgm:txPr/>
-    <dgm:style>
-      <a:lnRef idx="1">
-        <a:scrgbClr r="0" g="0" b="0"/>
-      </a:lnRef>
-      <a:fillRef idx="1">
-        <a:scrgbClr r="0" g="0" b="0"/>
-      </a:fillRef>
-      <a:effectRef idx="0">
-        <a:scrgbClr r="0" g="0" b="0"/>
-      </a:effectRef>
-      <a:fontRef idx="minor"/>
-    </dgm:style>
-  </dgm:styleLbl>
-  <dgm:styleLbl name="fgAccFollowNode1">
-    <dgm:scene3d>
-      <a:camera prst="orthographicFront"/>
-      <a:lightRig rig="threePt" dir="t"/>
-    </dgm:scene3d>
-    <dgm:sp3d/>
-    <dgm:txPr/>
-    <dgm:style>
-      <a:lnRef idx="1">
-        <a:scrgbClr r="0" g="0" b="0"/>
-      </a:lnRef>
-      <a:fillRef idx="1">
-        <a:scrgbClr r="0" g="0" b="0"/>
-      </a:fillRef>
-      <a:effectRef idx="0">
-        <a:scrgbClr r="0" g="0" b="0"/>
-      </a:effectRef>
-      <a:fontRef idx="minor"/>
-    </dgm:style>
-  </dgm:styleLbl>
-  <dgm:styleLbl name="alignAccFollowNode1">
-    <dgm:scene3d>
-      <a:camera prst="orthographicFront"/>
-      <a:lightRig rig="threePt" dir="t"/>
-    </dgm:scene3d>
-    <dgm:sp3d/>
-    <dgm:txPr/>
-    <dgm:style>
-      <a:lnRef idx="1">
-        <a:scrgbClr r="0" g="0" b="0"/>
-      </a:lnRef>
-      <a:fillRef idx="1">
-        <a:scrgbClr r="0" g="0" b="0"/>
-      </a:fillRef>
-      <a:effectRef idx="0">
-        <a:scrgbClr r="0" g="0" b="0"/>
-      </a:effectRef>
-      <a:fontRef idx="minor"/>
-    </dgm:style>
-  </dgm:styleLbl>
-  <dgm:styleLbl name="bgAccFollowNode1">
-    <dgm:scene3d>
-      <a:camera prst="orthographicFront"/>
-      <a:lightRig rig="threePt" dir="t"/>
-    </dgm:scene3d>
-    <dgm:sp3d/>
-    <dgm:txPr/>
-    <dgm:style>
-      <a:lnRef idx="1">
-        <a:scrgbClr r="0" g="0" b="0"/>
-      </a:lnRef>
-      <a:fillRef idx="1">
-        <a:scrgbClr r="0" g="0" b="0"/>
-      </a:fillRef>
-      <a:effectRef idx="0">
-        <a:scrgbClr r="0" g="0" b="0"/>
-      </a:effectRef>
-      <a:fontRef idx="minor"/>
-    </dgm:style>
-  </dgm:styleLbl>
-  <dgm:styleLbl name="fgAcc0">
-    <dgm:scene3d>
-      <a:camera prst="orthographicFront"/>
-      <a:lightRig rig="threePt" dir="t"/>
-    </dgm:scene3d>
-    <dgm:sp3d/>
-    <dgm:txPr/>
-    <dgm:style>
-      <a:lnRef idx="1">
-        <a:scrgbClr r="0" g="0" b="0"/>
-      </a:lnRef>
-      <a:fillRef idx="1">
-        <a:scrgbClr r="0" g="0" b="0"/>
-      </a:fillRef>
-      <a:effectRef idx="0">
-        <a:scrgbClr r="0" g="0" b="0"/>
-      </a:effectRef>
-      <a:fontRef idx="minor"/>
-    </dgm:style>
-  </dgm:styleLbl>
-  <dgm:styleLbl name="fgAcc2">
-    <dgm:scene3d>
-      <a:camera prst="orthographicFront"/>
-      <a:lightRig rig="threePt" dir="t"/>
-    </dgm:scene3d>
-    <dgm:sp3d/>
-    <dgm:txPr/>
-    <dgm:style>
-      <a:lnRef idx="1">
-        <a:scrgbClr r="0" g="0" b="0"/>
-      </a:lnRef>
-      <a:fillRef idx="1">
-        <a:scrgbClr r="0" g="0" b="0"/>
-      </a:fillRef>
-      <a:effectRef idx="0">
-        <a:scrgbClr r="0" g="0" b="0"/>
-      </a:effectRef>
-      <a:fontRef idx="minor"/>
-    </dgm:style>
-  </dgm:styleLbl>
-  <dgm:styleLbl name="fgAcc3">
-    <dgm:scene3d>
-      <a:camera prst="orthographicFront"/>
-      <a:lightRig rig="threePt" dir="t"/>
-    </dgm:scene3d>
-    <dgm:sp3d/>
-    <dgm:txPr/>
-    <dgm:style>
-      <a:lnRef idx="1">
-        <a:scrgbClr r="0" g="0" b="0"/>
-      </a:lnRef>
-      <a:fillRef idx="1">
-        <a:scrgbClr r="0" g="0" b="0"/>
-      </a:fillRef>
-      <a:effectRef idx="0">
-        <a:scrgbClr r="0" g="0" b="0"/>
-      </a:effectRef>
-      <a:fontRef idx="minor"/>
-    </dgm:style>
-  </dgm:styleLbl>
-  <dgm:styleLbl name="fgAcc4">
-    <dgm:scene3d>
-      <a:camera prst="orthographicFront"/>
-      <a:lightRig rig="threePt" dir="t"/>
-    </dgm:scene3d>
-    <dgm:sp3d/>
-    <dgm:txPr/>
-    <dgm:style>
-      <a:lnRef idx="1">
-        <a:scrgbClr r="0" g="0" b="0"/>
-      </a:lnRef>
-      <a:fillRef idx="1">
-        <a:scrgbClr r="0" g="0" b="0"/>
-      </a:fillRef>
-      <a:effectRef idx="0">
-        <a:scrgbClr r="0" g="0" b="0"/>
-      </a:effectRef>
-      <a:fontRef idx="minor"/>
-    </dgm:style>
-  </dgm:styleLbl>
-  <dgm:styleLbl name="bgShp">
-    <dgm:scene3d>
-      <a:camera prst="orthographicFront"/>
-      <a:lightRig rig="threePt" dir="t"/>
-    </dgm:scene3d>
-    <dgm:sp3d/>
-    <dgm:txPr/>
-    <dgm:style>
-      <a:lnRef idx="0">
-        <a:scrgbClr r="0" g="0" b="0"/>
-      </a:lnRef>
-      <a:fillRef idx="1">
-        <a:scrgbClr r="0" g="0" b="0"/>
-      </a:fillRef>
-      <a:effectRef idx="2">
-        <a:scrgbClr r="0" g="0" b="0"/>
-      </a:effectRef>
-      <a:fontRef idx="minor"/>
-    </dgm:style>
-  </dgm:styleLbl>
-  <dgm:styleLbl name="dkBgShp">
-    <dgm:scene3d>
-      <a:camera prst="orthographicFront"/>
-      <a:lightRig rig="threePt" dir="t"/>
-    </dgm:scene3d>
-    <dgm:sp3d/>
-    <dgm:txPr/>
-    <dgm:style>
-      <a:lnRef idx="0">
-        <a:scrgbClr r="0" g="0" b="0"/>
-      </a:lnRef>
-      <a:fillRef idx="1">
-        <a:scrgbClr r="0" g="0" b="0"/>
-      </a:fillRef>
-      <a:effectRef idx="2">
-        <a:scrgbClr r="0" g="0" b="0"/>
-      </a:effectRef>
-      <a:fontRef idx="minor"/>
-    </dgm:style>
-  </dgm:styleLbl>
-  <dgm:styleLbl name="trBgShp">
-    <dgm:scene3d>
-      <a:camera prst="orthographicFront"/>
-      <a:lightRig rig="threePt" dir="t"/>
-    </dgm:scene3d>
-    <dgm:sp3d/>
-    <dgm:txPr/>
-    <dgm:style>
-      <a:lnRef idx="0">
-        <a:scrgbClr r="0" g="0" b="0"/>
-      </a:lnRef>
-      <a:fillRef idx="1">
-        <a:scrgbClr r="0" g="0" b="0"/>
-      </a:fillRef>
-      <a:effectRef idx="0">
-        <a:scrgbClr r="0" g="0" b="0"/>
-      </a:effectRef>
-      <a:fontRef idx="minor"/>
-    </dgm:style>
-  </dgm:styleLbl>
-  <dgm:styleLbl name="fgShp">
-    <dgm:scene3d>
-      <a:camera prst="orthographicFront"/>
-      <a:lightRig rig="threePt" dir="t"/>
-    </dgm:scene3d>
-    <dgm:sp3d/>
-    <dgm:txPr/>
-    <dgm:style>
-      <a:lnRef idx="0">
-        <a:scrgbClr r="0" g="0" b="0"/>
-      </a:lnRef>
-      <a:fillRef idx="3">
-        <a:scrgbClr r="0" g="0" b="0"/>
-      </a:fillRef>
-      <a:effectRef idx="2">
-        <a:scrgbClr r="0" g="0" b="0"/>
-      </a:effectRef>
-      <a:fontRef idx="minor"/>
-    </dgm:style>
-  </dgm:styleLbl>
-  <dgm:styleLbl name="revTx">
-    <dgm:scene3d>
-      <a:camera prst="orthographicFront"/>
-      <a:lightRig rig="threePt" dir="t"/>
-    </dgm:scene3d>
-    <dgm:sp3d/>
-    <dgm:txPr/>
-    <dgm:style>
-      <a:lnRef idx="0">
-        <a:scrgbClr r="0" g="0" b="0"/>
-      </a:lnRef>
-      <a:fillRef idx="0">
-        <a:scrgbClr r="0" g="0" b="0"/>
-      </a:fillRef>
-      <a:effectRef idx="0">
-        <a:scrgbClr r="0" g="0" b="0"/>
-      </a:effectRef>
-      <a:fontRef idx="minor"/>
-    </dgm:style>
-  </dgm:styleLbl>
-</dgm:styleDef>
-</file>
-
 <file path=ppt/diagrams/quickStyle2.xml><?xml version="1.0" encoding="utf-8"?>
 <dgm:styleDef xmlns:dgm="http://schemas.openxmlformats.org/drawingml/2006/diagram" xmlns:a="http://schemas.openxmlformats.org/drawingml/2006/main" uniqueId="urn:microsoft.com/office/officeart/2005/8/quickstyle/simple5">
   <dgm:title val=""/>
@@ -41428,11 +35277,11 @@
 </file>
 
 <file path=ppt/diagrams/quickStyle9.xml><?xml version="1.0" encoding="utf-8"?>
-<dgm:styleDef xmlns:dgm="http://schemas.openxmlformats.org/drawingml/2006/diagram" xmlns:a="http://schemas.openxmlformats.org/drawingml/2006/main" uniqueId="urn:microsoft.com/office/officeart/2005/8/quickstyle/simple5">
+<dgm:styleDef xmlns:dgm="http://schemas.openxmlformats.org/drawingml/2006/diagram" xmlns:a="http://schemas.openxmlformats.org/drawingml/2006/main" uniqueId="urn:microsoft.com/office/officeart/2005/8/quickstyle/simple4">
   <dgm:title val=""/>
   <dgm:desc val=""/>
   <dgm:catLst>
-    <dgm:cat type="simple" pri="10500"/>
+    <dgm:cat type="simple" pri="10400"/>
   </dgm:catLst>
   <dgm:scene3d>
     <a:camera prst="orthographicFront"/>
@@ -41452,7 +35301,7 @@
       <a:fillRef idx="3">
         <a:scrgbClr r="0" g="0" b="0"/>
       </a:fillRef>
-      <a:effectRef idx="3">
+      <a:effectRef idx="2">
         <a:scrgbClr r="0" g="0" b="0"/>
       </a:effectRef>
       <a:fontRef idx="minor">
@@ -41468,13 +35317,13 @@
     <dgm:sp3d/>
     <dgm:txPr/>
     <dgm:style>
-      <a:lnRef idx="0">
+      <a:lnRef idx="1">
         <a:scrgbClr r="0" g="0" b="0"/>
       </a:lnRef>
       <a:fillRef idx="3">
         <a:scrgbClr r="0" g="0" b="0"/>
       </a:fillRef>
-      <a:effectRef idx="3">
+      <a:effectRef idx="2">
         <a:scrgbClr r="0" g="0" b="0"/>
       </a:effectRef>
       <a:fontRef idx="minor">
@@ -41496,7 +35345,7 @@
       <a:fillRef idx="3">
         <a:scrgbClr r="0" g="0" b="0"/>
       </a:fillRef>
-      <a:effectRef idx="3">
+      <a:effectRef idx="0">
         <a:scrgbClr r="0" g="0" b="0"/>
       </a:effectRef>
       <a:fontRef idx="minor">
@@ -41518,7 +35367,7 @@
       <a:fillRef idx="3">
         <a:scrgbClr r="0" g="0" b="0"/>
       </a:fillRef>
-      <a:effectRef idx="3">
+      <a:effectRef idx="2">
         <a:scrgbClr r="0" g="0" b="0"/>
       </a:effectRef>
       <a:fontRef idx="minor">
@@ -41540,7 +35389,7 @@
       <a:fillRef idx="3">
         <a:scrgbClr r="0" g="0" b="0"/>
       </a:fillRef>
-      <a:effectRef idx="3">
+      <a:effectRef idx="2">
         <a:scrgbClr r="0" g="0" b="0"/>
       </a:effectRef>
       <a:fontRef idx="minor">
@@ -41562,7 +35411,7 @@
       <a:fillRef idx="3">
         <a:scrgbClr r="0" g="0" b="0"/>
       </a:fillRef>
-      <a:effectRef idx="3">
+      <a:effectRef idx="2">
         <a:scrgbClr r="0" g="0" b="0"/>
       </a:effectRef>
       <a:fontRef idx="minor">
@@ -41584,7 +35433,7 @@
       <a:fillRef idx="3">
         <a:scrgbClr r="0" g="0" b="0"/>
       </a:fillRef>
-      <a:effectRef idx="3">
+      <a:effectRef idx="2">
         <a:scrgbClr r="0" g="0" b="0"/>
       </a:effectRef>
       <a:fontRef idx="minor">
@@ -41606,7 +35455,7 @@
       <a:fillRef idx="3">
         <a:scrgbClr r="0" g="0" b="0"/>
       </a:fillRef>
-      <a:effectRef idx="3">
+      <a:effectRef idx="2">
         <a:scrgbClr r="0" g="0" b="0"/>
       </a:effectRef>
       <a:fontRef idx="minor">
@@ -41628,7 +35477,7 @@
       <a:fillRef idx="1">
         <a:scrgbClr r="0" g="0" b="0"/>
       </a:fillRef>
-      <a:effectRef idx="3">
+      <a:effectRef idx="2">
         <a:scrgbClr r="0" g="0" b="0"/>
       </a:effectRef>
       <a:fontRef idx="minor"/>
@@ -41648,7 +35497,7 @@
       <a:fillRef idx="1">
         <a:scrgbClr r="0" g="0" b="0"/>
       </a:fillRef>
-      <a:effectRef idx="3">
+      <a:effectRef idx="2">
         <a:scrgbClr r="0" g="0" b="0"/>
       </a:effectRef>
       <a:fontRef idx="minor"/>
@@ -41668,7 +35517,7 @@
       <a:fillRef idx="1">
         <a:scrgbClr r="0" g="0" b="0"/>
       </a:fillRef>
-      <a:effectRef idx="3">
+      <a:effectRef idx="2">
         <a:scrgbClr r="0" g="0" b="0"/>
       </a:effectRef>
       <a:fontRef idx="minor"/>
@@ -41688,7 +35537,7 @@
       <a:fillRef idx="3">
         <a:scrgbClr r="0" g="0" b="0"/>
       </a:fillRef>
-      <a:effectRef idx="3">
+      <a:effectRef idx="2">
         <a:scrgbClr r="0" g="0" b="0"/>
       </a:effectRef>
       <a:fontRef idx="minor">
@@ -41710,7 +35559,7 @@
       <a:fillRef idx="3">
         <a:scrgbClr r="0" g="0" b="0"/>
       </a:fillRef>
-      <a:effectRef idx="3">
+      <a:effectRef idx="2">
         <a:scrgbClr r="0" g="0" b="0"/>
       </a:effectRef>
       <a:fontRef idx="minor">
@@ -41732,7 +35581,7 @@
       <a:fillRef idx="3">
         <a:scrgbClr r="0" g="0" b="0"/>
       </a:fillRef>
-      <a:effectRef idx="3">
+      <a:effectRef idx="2">
         <a:scrgbClr r="0" g="0" b="0"/>
       </a:effectRef>
       <a:fontRef idx="minor">
@@ -41768,10 +35617,10 @@
     <dgm:sp3d/>
     <dgm:txPr/>
     <dgm:style>
-      <a:lnRef idx="1">
-        <a:scrgbClr r="0" g="0" b="0"/>
-      </a:lnRef>
-      <a:fillRef idx="0">
+      <a:lnRef idx="2">
+        <a:scrgbClr r="0" g="0" b="0"/>
+      </a:lnRef>
+      <a:fillRef idx="1">
         <a:scrgbClr r="0" g="0" b="0"/>
       </a:fillRef>
       <a:effectRef idx="1">
@@ -41794,7 +35643,7 @@
       <a:fillRef idx="3">
         <a:scrgbClr r="0" g="0" b="0"/>
       </a:fillRef>
-      <a:effectRef idx="3">
+      <a:effectRef idx="2">
         <a:scrgbClr r="0" g="0" b="0"/>
       </a:effectRef>
       <a:fontRef idx="minor">
@@ -41816,7 +35665,7 @@
       <a:fillRef idx="3">
         <a:scrgbClr r="0" g="0" b="0"/>
       </a:fillRef>
-      <a:effectRef idx="3">
+      <a:effectRef idx="2">
         <a:scrgbClr r="0" g="0" b="0"/>
       </a:effectRef>
       <a:fontRef idx="minor">
@@ -41838,7 +35687,7 @@
       <a:fillRef idx="3">
         <a:scrgbClr r="0" g="0" b="0"/>
       </a:fillRef>
-      <a:effectRef idx="3">
+      <a:effectRef idx="2">
         <a:scrgbClr r="0" g="0" b="0"/>
       </a:effectRef>
       <a:fontRef idx="minor">
@@ -41860,7 +35709,7 @@
       <a:fillRef idx="3">
         <a:scrgbClr r="0" g="0" b="0"/>
       </a:fillRef>
-      <a:effectRef idx="3">
+      <a:effectRef idx="2">
         <a:scrgbClr r="0" g="0" b="0"/>
       </a:effectRef>
       <a:fontRef idx="minor">
@@ -41882,7 +35731,7 @@
       <a:fillRef idx="3">
         <a:scrgbClr r="0" g="0" b="0"/>
       </a:fillRef>
-      <a:effectRef idx="3">
+      <a:effectRef idx="2">
         <a:scrgbClr r="0" g="0" b="0"/>
       </a:effectRef>
       <a:fontRef idx="minor">
@@ -41904,7 +35753,7 @@
       <a:fillRef idx="3">
         <a:scrgbClr r="0" g="0" b="0"/>
       </a:fillRef>
-      <a:effectRef idx="3">
+      <a:effectRef idx="2">
         <a:scrgbClr r="0" g="0" b="0"/>
       </a:effectRef>
       <a:fontRef idx="minor">
@@ -41926,7 +35775,7 @@
       <a:fillRef idx="3">
         <a:scrgbClr r="0" g="0" b="0"/>
       </a:fillRef>
-      <a:effectRef idx="3">
+      <a:effectRef idx="2">
         <a:scrgbClr r="0" g="0" b="0"/>
       </a:effectRef>
       <a:fontRef idx="minor">
@@ -41942,13 +35791,13 @@
     <dgm:sp3d/>
     <dgm:txPr/>
     <dgm:style>
-      <a:lnRef idx="0">
+      <a:lnRef idx="1">
         <a:scrgbClr r="0" g="0" b="0"/>
       </a:lnRef>
       <a:fillRef idx="3">
         <a:scrgbClr r="0" g="0" b="0"/>
       </a:fillRef>
-      <a:effectRef idx="3">
+      <a:effectRef idx="2">
         <a:scrgbClr r="0" g="0" b="0"/>
       </a:effectRef>
       <a:fontRef idx="minor">
@@ -41964,13 +35813,13 @@
     <dgm:sp3d/>
     <dgm:txPr/>
     <dgm:style>
-      <a:lnRef idx="0">
+      <a:lnRef idx="1">
         <a:scrgbClr r="0" g="0" b="0"/>
       </a:lnRef>
       <a:fillRef idx="3">
         <a:scrgbClr r="0" g="0" b="0"/>
       </a:fillRef>
-      <a:effectRef idx="3">
+      <a:effectRef idx="2">
         <a:scrgbClr r="0" g="0" b="0"/>
       </a:effectRef>
       <a:fontRef idx="minor">
@@ -41986,7 +35835,7 @@
     <dgm:sp3d/>
     <dgm:txPr/>
     <dgm:style>
-      <a:lnRef idx="2">
+      <a:lnRef idx="1">
         <a:scrgbClr r="0" g="0" b="0"/>
       </a:lnRef>
       <a:fillRef idx="0">
@@ -42006,7 +35855,7 @@
     <dgm:sp3d/>
     <dgm:txPr/>
     <dgm:style>
-      <a:lnRef idx="2">
+      <a:lnRef idx="1">
         <a:scrgbClr r="0" g="0" b="0"/>
       </a:lnRef>
       <a:fillRef idx="0">
@@ -42026,7 +35875,7 @@
     <dgm:sp3d/>
     <dgm:txPr/>
     <dgm:style>
-      <a:lnRef idx="2">
+      <a:lnRef idx="1">
         <a:scrgbClr r="0" g="0" b="0"/>
       </a:lnRef>
       <a:fillRef idx="0">
@@ -42046,7 +35895,7 @@
     <dgm:sp3d/>
     <dgm:txPr/>
     <dgm:style>
-      <a:lnRef idx="2">
+      <a:lnRef idx="1">
         <a:scrgbClr r="0" g="0" b="0"/>
       </a:lnRef>
       <a:fillRef idx="0">
@@ -42072,21 +35921,321 @@
       <a:fillRef idx="1">
         <a:scrgbClr r="0" g="0" b="0"/>
       </a:fillRef>
+      <a:effectRef idx="0">
+        <a:scrgbClr r="0" g="0" b="0"/>
+      </a:effectRef>
+      <a:fontRef idx="minor"/>
+    </dgm:style>
+  </dgm:styleLbl>
+  <dgm:styleLbl name="conFgAcc1">
+    <dgm:scene3d>
+      <a:camera prst="orthographicFront"/>
+      <a:lightRig rig="threePt" dir="t"/>
+    </dgm:scene3d>
+    <dgm:sp3d/>
+    <dgm:txPr/>
+    <dgm:style>
+      <a:lnRef idx="1">
+        <a:scrgbClr r="0" g="0" b="0"/>
+      </a:lnRef>
+      <a:fillRef idx="1">
+        <a:scrgbClr r="0" g="0" b="0"/>
+      </a:fillRef>
+      <a:effectRef idx="0">
+        <a:scrgbClr r="0" g="0" b="0"/>
+      </a:effectRef>
+      <a:fontRef idx="minor"/>
+    </dgm:style>
+  </dgm:styleLbl>
+  <dgm:styleLbl name="alignAcc1">
+    <dgm:scene3d>
+      <a:camera prst="orthographicFront"/>
+      <a:lightRig rig="threePt" dir="t"/>
+    </dgm:scene3d>
+    <dgm:sp3d/>
+    <dgm:txPr/>
+    <dgm:style>
+      <a:lnRef idx="1">
+        <a:scrgbClr r="0" g="0" b="0"/>
+      </a:lnRef>
+      <a:fillRef idx="1">
+        <a:scrgbClr r="0" g="0" b="0"/>
+      </a:fillRef>
+      <a:effectRef idx="0">
+        <a:scrgbClr r="0" g="0" b="0"/>
+      </a:effectRef>
+      <a:fontRef idx="minor"/>
+    </dgm:style>
+  </dgm:styleLbl>
+  <dgm:styleLbl name="trAlignAcc1">
+    <dgm:scene3d>
+      <a:camera prst="orthographicFront"/>
+      <a:lightRig rig="threePt" dir="t"/>
+    </dgm:scene3d>
+    <dgm:sp3d/>
+    <dgm:txPr/>
+    <dgm:style>
+      <a:lnRef idx="1">
+        <a:scrgbClr r="0" g="0" b="0"/>
+      </a:lnRef>
+      <a:fillRef idx="1">
+        <a:scrgbClr r="0" g="0" b="0"/>
+      </a:fillRef>
+      <a:effectRef idx="0">
+        <a:scrgbClr r="0" g="0" b="0"/>
+      </a:effectRef>
+      <a:fontRef idx="minor"/>
+    </dgm:style>
+  </dgm:styleLbl>
+  <dgm:styleLbl name="bgAcc1">
+    <dgm:scene3d>
+      <a:camera prst="orthographicFront"/>
+      <a:lightRig rig="threePt" dir="t"/>
+    </dgm:scene3d>
+    <dgm:sp3d/>
+    <dgm:txPr/>
+    <dgm:style>
+      <a:lnRef idx="1">
+        <a:scrgbClr r="0" g="0" b="0"/>
+      </a:lnRef>
+      <a:fillRef idx="1">
+        <a:scrgbClr r="0" g="0" b="0"/>
+      </a:fillRef>
+      <a:effectRef idx="0">
+        <a:scrgbClr r="0" g="0" b="0"/>
+      </a:effectRef>
+      <a:fontRef idx="minor"/>
+    </dgm:style>
+  </dgm:styleLbl>
+  <dgm:styleLbl name="solidFgAcc1">
+    <dgm:scene3d>
+      <a:camera prst="orthographicFront"/>
+      <a:lightRig rig="threePt" dir="t"/>
+    </dgm:scene3d>
+    <dgm:sp3d/>
+    <dgm:txPr/>
+    <dgm:style>
+      <a:lnRef idx="1">
+        <a:scrgbClr r="0" g="0" b="0"/>
+      </a:lnRef>
+      <a:fillRef idx="1">
+        <a:scrgbClr r="0" g="0" b="0"/>
+      </a:fillRef>
+      <a:effectRef idx="0">
+        <a:scrgbClr r="0" g="0" b="0"/>
+      </a:effectRef>
+      <a:fontRef idx="minor"/>
+    </dgm:style>
+  </dgm:styleLbl>
+  <dgm:styleLbl name="solidAlignAcc1">
+    <dgm:scene3d>
+      <a:camera prst="orthographicFront"/>
+      <a:lightRig rig="threePt" dir="t"/>
+    </dgm:scene3d>
+    <dgm:sp3d/>
+    <dgm:txPr/>
+    <dgm:style>
+      <a:lnRef idx="1">
+        <a:scrgbClr r="0" g="0" b="0"/>
+      </a:lnRef>
+      <a:fillRef idx="1">
+        <a:scrgbClr r="0" g="0" b="0"/>
+      </a:fillRef>
+      <a:effectRef idx="0">
+        <a:scrgbClr r="0" g="0" b="0"/>
+      </a:effectRef>
+      <a:fontRef idx="minor"/>
+    </dgm:style>
+  </dgm:styleLbl>
+  <dgm:styleLbl name="solidBgAcc1">
+    <dgm:scene3d>
+      <a:camera prst="orthographicFront"/>
+      <a:lightRig rig="threePt" dir="t"/>
+    </dgm:scene3d>
+    <dgm:sp3d/>
+    <dgm:txPr/>
+    <dgm:style>
+      <a:lnRef idx="1">
+        <a:scrgbClr r="0" g="0" b="0"/>
+      </a:lnRef>
+      <a:fillRef idx="1">
+        <a:scrgbClr r="0" g="0" b="0"/>
+      </a:fillRef>
+      <a:effectRef idx="0">
+        <a:scrgbClr r="0" g="0" b="0"/>
+      </a:effectRef>
+      <a:fontRef idx="minor"/>
+    </dgm:style>
+  </dgm:styleLbl>
+  <dgm:styleLbl name="fgAccFollowNode1">
+    <dgm:scene3d>
+      <a:camera prst="orthographicFront"/>
+      <a:lightRig rig="threePt" dir="t"/>
+    </dgm:scene3d>
+    <dgm:sp3d/>
+    <dgm:txPr/>
+    <dgm:style>
+      <a:lnRef idx="1">
+        <a:scrgbClr r="0" g="0" b="0"/>
+      </a:lnRef>
+      <a:fillRef idx="1">
+        <a:scrgbClr r="0" g="0" b="0"/>
+      </a:fillRef>
+      <a:effectRef idx="0">
+        <a:scrgbClr r="0" g="0" b="0"/>
+      </a:effectRef>
+      <a:fontRef idx="minor"/>
+    </dgm:style>
+  </dgm:styleLbl>
+  <dgm:styleLbl name="alignAccFollowNode1">
+    <dgm:scene3d>
+      <a:camera prst="orthographicFront"/>
+      <a:lightRig rig="threePt" dir="t"/>
+    </dgm:scene3d>
+    <dgm:sp3d/>
+    <dgm:txPr/>
+    <dgm:style>
+      <a:lnRef idx="1">
+        <a:scrgbClr r="0" g="0" b="0"/>
+      </a:lnRef>
+      <a:fillRef idx="1">
+        <a:scrgbClr r="0" g="0" b="0"/>
+      </a:fillRef>
+      <a:effectRef idx="0">
+        <a:scrgbClr r="0" g="0" b="0"/>
+      </a:effectRef>
+      <a:fontRef idx="minor"/>
+    </dgm:style>
+  </dgm:styleLbl>
+  <dgm:styleLbl name="bgAccFollowNode1">
+    <dgm:scene3d>
+      <a:camera prst="orthographicFront"/>
+      <a:lightRig rig="threePt" dir="t"/>
+    </dgm:scene3d>
+    <dgm:sp3d/>
+    <dgm:txPr/>
+    <dgm:style>
+      <a:lnRef idx="1">
+        <a:scrgbClr r="0" g="0" b="0"/>
+      </a:lnRef>
+      <a:fillRef idx="1">
+        <a:scrgbClr r="0" g="0" b="0"/>
+      </a:fillRef>
+      <a:effectRef idx="0">
+        <a:scrgbClr r="0" g="0" b="0"/>
+      </a:effectRef>
+      <a:fontRef idx="minor"/>
+    </dgm:style>
+  </dgm:styleLbl>
+  <dgm:styleLbl name="fgAcc0">
+    <dgm:scene3d>
+      <a:camera prst="orthographicFront"/>
+      <a:lightRig rig="threePt" dir="t"/>
+    </dgm:scene3d>
+    <dgm:sp3d/>
+    <dgm:txPr/>
+    <dgm:style>
+      <a:lnRef idx="1">
+        <a:scrgbClr r="0" g="0" b="0"/>
+      </a:lnRef>
+      <a:fillRef idx="1">
+        <a:scrgbClr r="0" g="0" b="0"/>
+      </a:fillRef>
+      <a:effectRef idx="0">
+        <a:scrgbClr r="0" g="0" b="0"/>
+      </a:effectRef>
+      <a:fontRef idx="minor"/>
+    </dgm:style>
+  </dgm:styleLbl>
+  <dgm:styleLbl name="fgAcc2">
+    <dgm:scene3d>
+      <a:camera prst="orthographicFront"/>
+      <a:lightRig rig="threePt" dir="t"/>
+    </dgm:scene3d>
+    <dgm:sp3d/>
+    <dgm:txPr/>
+    <dgm:style>
+      <a:lnRef idx="1">
+        <a:scrgbClr r="0" g="0" b="0"/>
+      </a:lnRef>
+      <a:fillRef idx="1">
+        <a:scrgbClr r="0" g="0" b="0"/>
+      </a:fillRef>
+      <a:effectRef idx="0">
+        <a:scrgbClr r="0" g="0" b="0"/>
+      </a:effectRef>
+      <a:fontRef idx="minor"/>
+    </dgm:style>
+  </dgm:styleLbl>
+  <dgm:styleLbl name="fgAcc3">
+    <dgm:scene3d>
+      <a:camera prst="orthographicFront"/>
+      <a:lightRig rig="threePt" dir="t"/>
+    </dgm:scene3d>
+    <dgm:sp3d/>
+    <dgm:txPr/>
+    <dgm:style>
+      <a:lnRef idx="1">
+        <a:scrgbClr r="0" g="0" b="0"/>
+      </a:lnRef>
+      <a:fillRef idx="1">
+        <a:scrgbClr r="0" g="0" b="0"/>
+      </a:fillRef>
+      <a:effectRef idx="0">
+        <a:scrgbClr r="0" g="0" b="0"/>
+      </a:effectRef>
+      <a:fontRef idx="minor"/>
+    </dgm:style>
+  </dgm:styleLbl>
+  <dgm:styleLbl name="fgAcc4">
+    <dgm:scene3d>
+      <a:camera prst="orthographicFront"/>
+      <a:lightRig rig="threePt" dir="t"/>
+    </dgm:scene3d>
+    <dgm:sp3d/>
+    <dgm:txPr/>
+    <dgm:style>
+      <a:lnRef idx="1">
+        <a:scrgbClr r="0" g="0" b="0"/>
+      </a:lnRef>
+      <a:fillRef idx="1">
+        <a:scrgbClr r="0" g="0" b="0"/>
+      </a:fillRef>
+      <a:effectRef idx="0">
+        <a:scrgbClr r="0" g="0" b="0"/>
+      </a:effectRef>
+      <a:fontRef idx="minor"/>
+    </dgm:style>
+  </dgm:styleLbl>
+  <dgm:styleLbl name="bgShp">
+    <dgm:scene3d>
+      <a:camera prst="orthographicFront"/>
+      <a:lightRig rig="threePt" dir="t"/>
+    </dgm:scene3d>
+    <dgm:sp3d/>
+    <dgm:txPr/>
+    <dgm:style>
+      <a:lnRef idx="0">
+        <a:scrgbClr r="0" g="0" b="0"/>
+      </a:lnRef>
+      <a:fillRef idx="1">
+        <a:scrgbClr r="0" g="0" b="0"/>
+      </a:fillRef>
       <a:effectRef idx="2">
         <a:scrgbClr r="0" g="0" b="0"/>
       </a:effectRef>
       <a:fontRef idx="minor"/>
     </dgm:style>
   </dgm:styleLbl>
-  <dgm:styleLbl name="conFgAcc1">
-    <dgm:scene3d>
-      <a:camera prst="orthographicFront"/>
-      <a:lightRig rig="threePt" dir="t"/>
-    </dgm:scene3d>
-    <dgm:sp3d/>
-    <dgm:txPr/>
-    <dgm:style>
-      <a:lnRef idx="1">
+  <dgm:styleLbl name="dkBgShp">
+    <dgm:scene3d>
+      <a:camera prst="orthographicFront"/>
+      <a:lightRig rig="threePt" dir="t"/>
+    </dgm:scene3d>
+    <dgm:sp3d/>
+    <dgm:txPr/>
+    <dgm:style>
+      <a:lnRef idx="0">
         <a:scrgbClr r="0" g="0" b="0"/>
       </a:lnRef>
       <a:fillRef idx="1">
@@ -42098,341 +36247,41 @@
       <a:fontRef idx="minor"/>
     </dgm:style>
   </dgm:styleLbl>
-  <dgm:styleLbl name="alignAcc1">
-    <dgm:scene3d>
-      <a:camera prst="orthographicFront"/>
-      <a:lightRig rig="threePt" dir="t"/>
-    </dgm:scene3d>
-    <dgm:sp3d/>
-    <dgm:txPr/>
-    <dgm:style>
-      <a:lnRef idx="1">
+  <dgm:styleLbl name="trBgShp">
+    <dgm:scene3d>
+      <a:camera prst="orthographicFront"/>
+      <a:lightRig rig="threePt" dir="t"/>
+    </dgm:scene3d>
+    <dgm:sp3d/>
+    <dgm:txPr/>
+    <dgm:style>
+      <a:lnRef idx="0">
         <a:scrgbClr r="0" g="0" b="0"/>
       </a:lnRef>
       <a:fillRef idx="1">
         <a:scrgbClr r="0" g="0" b="0"/>
       </a:fillRef>
+      <a:effectRef idx="0">
+        <a:scrgbClr r="0" g="0" b="0"/>
+      </a:effectRef>
+      <a:fontRef idx="minor"/>
+    </dgm:style>
+  </dgm:styleLbl>
+  <dgm:styleLbl name="fgShp">
+    <dgm:scene3d>
+      <a:camera prst="orthographicFront"/>
+      <a:lightRig rig="threePt" dir="t"/>
+    </dgm:scene3d>
+    <dgm:sp3d/>
+    <dgm:txPr/>
+    <dgm:style>
+      <a:lnRef idx="0">
+        <a:scrgbClr r="0" g="0" b="0"/>
+      </a:lnRef>
+      <a:fillRef idx="3">
+        <a:scrgbClr r="0" g="0" b="0"/>
+      </a:fillRef>
       <a:effectRef idx="2">
-        <a:scrgbClr r="0" g="0" b="0"/>
-      </a:effectRef>
-      <a:fontRef idx="minor"/>
-    </dgm:style>
-  </dgm:styleLbl>
-  <dgm:styleLbl name="trAlignAcc1">
-    <dgm:scene3d>
-      <a:camera prst="orthographicFront"/>
-      <a:lightRig rig="threePt" dir="t"/>
-    </dgm:scene3d>
-    <dgm:sp3d/>
-    <dgm:txPr/>
-    <dgm:style>
-      <a:lnRef idx="1">
-        <a:scrgbClr r="0" g="0" b="0"/>
-      </a:lnRef>
-      <a:fillRef idx="1">
-        <a:scrgbClr r="0" g="0" b="0"/>
-      </a:fillRef>
-      <a:effectRef idx="0">
-        <a:scrgbClr r="0" g="0" b="0"/>
-      </a:effectRef>
-      <a:fontRef idx="minor"/>
-    </dgm:style>
-  </dgm:styleLbl>
-  <dgm:styleLbl name="bgAcc1">
-    <dgm:scene3d>
-      <a:camera prst="orthographicFront"/>
-      <a:lightRig rig="threePt" dir="t"/>
-    </dgm:scene3d>
-    <dgm:sp3d/>
-    <dgm:txPr/>
-    <dgm:style>
-      <a:lnRef idx="1">
-        <a:scrgbClr r="0" g="0" b="0"/>
-      </a:lnRef>
-      <a:fillRef idx="1">
-        <a:scrgbClr r="0" g="0" b="0"/>
-      </a:fillRef>
-      <a:effectRef idx="2">
-        <a:scrgbClr r="0" g="0" b="0"/>
-      </a:effectRef>
-      <a:fontRef idx="minor"/>
-    </dgm:style>
-  </dgm:styleLbl>
-  <dgm:styleLbl name="solidFgAcc1">
-    <dgm:scene3d>
-      <a:camera prst="orthographicFront"/>
-      <a:lightRig rig="threePt" dir="t"/>
-    </dgm:scene3d>
-    <dgm:sp3d/>
-    <dgm:txPr/>
-    <dgm:style>
-      <a:lnRef idx="1">
-        <a:scrgbClr r="0" g="0" b="0"/>
-      </a:lnRef>
-      <a:fillRef idx="1">
-        <a:scrgbClr r="0" g="0" b="0"/>
-      </a:fillRef>
-      <a:effectRef idx="2">
-        <a:scrgbClr r="0" g="0" b="0"/>
-      </a:effectRef>
-      <a:fontRef idx="minor"/>
-    </dgm:style>
-  </dgm:styleLbl>
-  <dgm:styleLbl name="solidAlignAcc1">
-    <dgm:scene3d>
-      <a:camera prst="orthographicFront"/>
-      <a:lightRig rig="threePt" dir="t"/>
-    </dgm:scene3d>
-    <dgm:sp3d/>
-    <dgm:txPr/>
-    <dgm:style>
-      <a:lnRef idx="1">
-        <a:scrgbClr r="0" g="0" b="0"/>
-      </a:lnRef>
-      <a:fillRef idx="1">
-        <a:scrgbClr r="0" g="0" b="0"/>
-      </a:fillRef>
-      <a:effectRef idx="3">
-        <a:scrgbClr r="0" g="0" b="0"/>
-      </a:effectRef>
-      <a:fontRef idx="minor"/>
-    </dgm:style>
-  </dgm:styleLbl>
-  <dgm:styleLbl name="solidBgAcc1">
-    <dgm:scene3d>
-      <a:camera prst="orthographicFront"/>
-      <a:lightRig rig="threePt" dir="t"/>
-    </dgm:scene3d>
-    <dgm:sp3d/>
-    <dgm:txPr/>
-    <dgm:style>
-      <a:lnRef idx="1">
-        <a:scrgbClr r="0" g="0" b="0"/>
-      </a:lnRef>
-      <a:fillRef idx="1">
-        <a:scrgbClr r="0" g="0" b="0"/>
-      </a:fillRef>
-      <a:effectRef idx="3">
-        <a:scrgbClr r="0" g="0" b="0"/>
-      </a:effectRef>
-      <a:fontRef idx="minor"/>
-    </dgm:style>
-  </dgm:styleLbl>
-  <dgm:styleLbl name="fgAccFollowNode1">
-    <dgm:scene3d>
-      <a:camera prst="orthographicFront"/>
-      <a:lightRig rig="threePt" dir="t"/>
-    </dgm:scene3d>
-    <dgm:sp3d/>
-    <dgm:txPr/>
-    <dgm:style>
-      <a:lnRef idx="1">
-        <a:scrgbClr r="0" g="0" b="0"/>
-      </a:lnRef>
-      <a:fillRef idx="1">
-        <a:scrgbClr r="0" g="0" b="0"/>
-      </a:fillRef>
-      <a:effectRef idx="2">
-        <a:scrgbClr r="0" g="0" b="0"/>
-      </a:effectRef>
-      <a:fontRef idx="minor"/>
-    </dgm:style>
-  </dgm:styleLbl>
-  <dgm:styleLbl name="alignAccFollowNode1">
-    <dgm:scene3d>
-      <a:camera prst="orthographicFront"/>
-      <a:lightRig rig="threePt" dir="t"/>
-    </dgm:scene3d>
-    <dgm:sp3d/>
-    <dgm:txPr/>
-    <dgm:style>
-      <a:lnRef idx="1">
-        <a:scrgbClr r="0" g="0" b="0"/>
-      </a:lnRef>
-      <a:fillRef idx="1">
-        <a:scrgbClr r="0" g="0" b="0"/>
-      </a:fillRef>
-      <a:effectRef idx="2">
-        <a:scrgbClr r="0" g="0" b="0"/>
-      </a:effectRef>
-      <a:fontRef idx="minor"/>
-    </dgm:style>
-  </dgm:styleLbl>
-  <dgm:styleLbl name="bgAccFollowNode1">
-    <dgm:scene3d>
-      <a:camera prst="orthographicFront"/>
-      <a:lightRig rig="threePt" dir="t"/>
-    </dgm:scene3d>
-    <dgm:sp3d/>
-    <dgm:txPr/>
-    <dgm:style>
-      <a:lnRef idx="1">
-        <a:scrgbClr r="0" g="0" b="0"/>
-      </a:lnRef>
-      <a:fillRef idx="1">
-        <a:scrgbClr r="0" g="0" b="0"/>
-      </a:fillRef>
-      <a:effectRef idx="2">
-        <a:scrgbClr r="0" g="0" b="0"/>
-      </a:effectRef>
-      <a:fontRef idx="minor"/>
-    </dgm:style>
-  </dgm:styleLbl>
-  <dgm:styleLbl name="fgAcc0">
-    <dgm:scene3d>
-      <a:camera prst="orthographicFront"/>
-      <a:lightRig rig="threePt" dir="t"/>
-    </dgm:scene3d>
-    <dgm:sp3d/>
-    <dgm:txPr/>
-    <dgm:style>
-      <a:lnRef idx="1">
-        <a:scrgbClr r="0" g="0" b="0"/>
-      </a:lnRef>
-      <a:fillRef idx="1">
-        <a:scrgbClr r="0" g="0" b="0"/>
-      </a:fillRef>
-      <a:effectRef idx="2">
-        <a:scrgbClr r="0" g="0" b="0"/>
-      </a:effectRef>
-      <a:fontRef idx="minor"/>
-    </dgm:style>
-  </dgm:styleLbl>
-  <dgm:styleLbl name="fgAcc2">
-    <dgm:scene3d>
-      <a:camera prst="orthographicFront"/>
-      <a:lightRig rig="threePt" dir="t"/>
-    </dgm:scene3d>
-    <dgm:sp3d/>
-    <dgm:txPr/>
-    <dgm:style>
-      <a:lnRef idx="1">
-        <a:scrgbClr r="0" g="0" b="0"/>
-      </a:lnRef>
-      <a:fillRef idx="1">
-        <a:scrgbClr r="0" g="0" b="0"/>
-      </a:fillRef>
-      <a:effectRef idx="2">
-        <a:scrgbClr r="0" g="0" b="0"/>
-      </a:effectRef>
-      <a:fontRef idx="minor"/>
-    </dgm:style>
-  </dgm:styleLbl>
-  <dgm:styleLbl name="fgAcc3">
-    <dgm:scene3d>
-      <a:camera prst="orthographicFront"/>
-      <a:lightRig rig="threePt" dir="t"/>
-    </dgm:scene3d>
-    <dgm:sp3d/>
-    <dgm:txPr/>
-    <dgm:style>
-      <a:lnRef idx="1">
-        <a:scrgbClr r="0" g="0" b="0"/>
-      </a:lnRef>
-      <a:fillRef idx="1">
-        <a:scrgbClr r="0" g="0" b="0"/>
-      </a:fillRef>
-      <a:effectRef idx="2">
-        <a:scrgbClr r="0" g="0" b="0"/>
-      </a:effectRef>
-      <a:fontRef idx="minor"/>
-    </dgm:style>
-  </dgm:styleLbl>
-  <dgm:styleLbl name="fgAcc4">
-    <dgm:scene3d>
-      <a:camera prst="orthographicFront"/>
-      <a:lightRig rig="threePt" dir="t"/>
-    </dgm:scene3d>
-    <dgm:sp3d/>
-    <dgm:txPr/>
-    <dgm:style>
-      <a:lnRef idx="1">
-        <a:scrgbClr r="0" g="0" b="0"/>
-      </a:lnRef>
-      <a:fillRef idx="1">
-        <a:scrgbClr r="0" g="0" b="0"/>
-      </a:fillRef>
-      <a:effectRef idx="2">
-        <a:scrgbClr r="0" g="0" b="0"/>
-      </a:effectRef>
-      <a:fontRef idx="minor"/>
-    </dgm:style>
-  </dgm:styleLbl>
-  <dgm:styleLbl name="bgShp">
-    <dgm:scene3d>
-      <a:camera prst="orthographicFront"/>
-      <a:lightRig rig="threePt" dir="t"/>
-    </dgm:scene3d>
-    <dgm:sp3d/>
-    <dgm:txPr/>
-    <dgm:style>
-      <a:lnRef idx="0">
-        <a:scrgbClr r="0" g="0" b="0"/>
-      </a:lnRef>
-      <a:fillRef idx="1">
-        <a:scrgbClr r="0" g="0" b="0"/>
-      </a:fillRef>
-      <a:effectRef idx="2">
-        <a:scrgbClr r="0" g="0" b="0"/>
-      </a:effectRef>
-      <a:fontRef idx="minor"/>
-    </dgm:style>
-  </dgm:styleLbl>
-  <dgm:styleLbl name="dkBgShp">
-    <dgm:scene3d>
-      <a:camera prst="orthographicFront"/>
-      <a:lightRig rig="threePt" dir="t"/>
-    </dgm:scene3d>
-    <dgm:sp3d/>
-    <dgm:txPr/>
-    <dgm:style>
-      <a:lnRef idx="0">
-        <a:scrgbClr r="0" g="0" b="0"/>
-      </a:lnRef>
-      <a:fillRef idx="1">
-        <a:scrgbClr r="0" g="0" b="0"/>
-      </a:fillRef>
-      <a:effectRef idx="3">
-        <a:scrgbClr r="0" g="0" b="0"/>
-      </a:effectRef>
-      <a:fontRef idx="minor"/>
-    </dgm:style>
-  </dgm:styleLbl>
-  <dgm:styleLbl name="trBgShp">
-    <dgm:scene3d>
-      <a:camera prst="orthographicFront"/>
-      <a:lightRig rig="threePt" dir="t"/>
-    </dgm:scene3d>
-    <dgm:sp3d/>
-    <dgm:txPr/>
-    <dgm:style>
-      <a:lnRef idx="0">
-        <a:scrgbClr r="0" g="0" b="0"/>
-      </a:lnRef>
-      <a:fillRef idx="1">
-        <a:scrgbClr r="0" g="0" b="0"/>
-      </a:fillRef>
-      <a:effectRef idx="0">
-        <a:scrgbClr r="0" g="0" b="0"/>
-      </a:effectRef>
-      <a:fontRef idx="minor"/>
-    </dgm:style>
-  </dgm:styleLbl>
-  <dgm:styleLbl name="fgShp">
-    <dgm:scene3d>
-      <a:camera prst="orthographicFront"/>
-      <a:lightRig rig="threePt" dir="t"/>
-    </dgm:scene3d>
-    <dgm:sp3d/>
-    <dgm:txPr/>
-    <dgm:style>
-      <a:lnRef idx="0">
-        <a:scrgbClr r="0" g="0" b="0"/>
-      </a:lnRef>
-      <a:fillRef idx="3">
-        <a:scrgbClr r="0" g="0" b="0"/>
-      </a:fillRef>
-      <a:effectRef idx="3">
         <a:scrgbClr r="0" g="0" b="0"/>
       </a:effectRef>
       <a:fontRef idx="minor"/>
@@ -49464,340 +43313,6 @@
         <p:cNvPr id="1" name="">
           <a:extLst>
             <a:ext uri="{FF2B5EF4-FFF2-40B4-BE49-F238E27FC236}">
-              <a16:creationId xmlns:a16="http://schemas.microsoft.com/office/drawing/2014/main" id="{740AFA33-D793-D5F6-7682-39079E980FD2}"/>
-            </a:ext>
-          </a:extLst>
-        </p:cNvPr>
-        <p:cNvGrpSpPr/>
-        <p:nvPr/>
-      </p:nvGrpSpPr>
-      <p:grpSpPr>
-        <a:xfrm>
-          <a:off x="0" y="0"/>
-          <a:ext cx="0" cy="0"/>
-          <a:chOff x="0" y="0"/>
-          <a:chExt cx="0" cy="0"/>
-        </a:xfrm>
-      </p:grpSpPr>
-      <p:sp>
-        <p:nvSpPr>
-          <p:cNvPr id="5" name="Titre 4">
-            <a:extLst>
-              <a:ext uri="{FF2B5EF4-FFF2-40B4-BE49-F238E27FC236}">
-                <a16:creationId xmlns:a16="http://schemas.microsoft.com/office/drawing/2014/main" id="{D4D98468-30E4-3DEB-B1FE-51A860D01672}"/>
-              </a:ext>
-            </a:extLst>
-          </p:cNvPr>
-          <p:cNvSpPr>
-            <a:spLocks noGrp="1"/>
-          </p:cNvSpPr>
-          <p:nvPr>
-            <p:ph type="title"/>
-          </p:nvPr>
-        </p:nvSpPr>
-        <p:spPr/>
-        <p:txBody>
-          <a:bodyPr/>
-          <a:lstStyle/>
-          <a:p>
-            <a:r>
-              <a:rPr lang="fr-FR" dirty="0"/>
-              <a:t>4- Opérations CRUD sur MongoDB</a:t>
-            </a:r>
-            <a:br>
-              <a:rPr lang="fr-FR" dirty="0"/>
-            </a:br>
-            <a:endParaRPr lang="fr-FR" dirty="0"/>
-          </a:p>
-        </p:txBody>
-      </p:sp>
-      <p:sp>
-        <p:nvSpPr>
-          <p:cNvPr id="6" name="Espace réservé du texte 5">
-            <a:extLst>
-              <a:ext uri="{FF2B5EF4-FFF2-40B4-BE49-F238E27FC236}">
-                <a16:creationId xmlns:a16="http://schemas.microsoft.com/office/drawing/2014/main" id="{F422FE41-0809-C8D5-5E24-9C21503380E6}"/>
-              </a:ext>
-            </a:extLst>
-          </p:cNvPr>
-          <p:cNvSpPr>
-            <a:spLocks noGrp="1"/>
-          </p:cNvSpPr>
-          <p:nvPr>
-            <p:ph type="body" idx="1"/>
-          </p:nvPr>
-        </p:nvSpPr>
-        <p:spPr/>
-        <p:txBody>
-          <a:bodyPr/>
-          <a:lstStyle/>
-          <a:p>
-            <a:r>
-              <a:rPr lang="fr-FR" dirty="0"/>
-              <a:t>Fonctions CRUD</a:t>
-            </a:r>
-          </a:p>
-        </p:txBody>
-      </p:sp>
-      <p:sp>
-        <p:nvSpPr>
-          <p:cNvPr id="4" name="Espace réservé de la date 3">
-            <a:extLst>
-              <a:ext uri="{FF2B5EF4-FFF2-40B4-BE49-F238E27FC236}">
-                <a16:creationId xmlns:a16="http://schemas.microsoft.com/office/drawing/2014/main" id="{05F5D616-74E8-7601-08C3-4B5433D0874A}"/>
-              </a:ext>
-            </a:extLst>
-          </p:cNvPr>
-          <p:cNvSpPr>
-            <a:spLocks noGrp="1"/>
-          </p:cNvSpPr>
-          <p:nvPr>
-            <p:ph type="dt" sz="half" idx="10"/>
-          </p:nvPr>
-        </p:nvSpPr>
-        <p:spPr/>
-        <p:txBody>
-          <a:bodyPr/>
-          <a:lstStyle/>
-          <a:p>
-            <a:pPr rtl="0"/>
-            <a:fld id="{22897033-9A55-4DAC-991D-1FF1921C78B7}" type="datetime1">
-              <a:rPr lang="fr-FR" smtClean="0"/>
-              <a:t>03/06/2026</a:t>
-            </a:fld>
-            <a:endParaRPr lang="en-US" dirty="0"/>
-          </a:p>
-        </p:txBody>
-      </p:sp>
-      <p:pic>
-        <p:nvPicPr>
-          <p:cNvPr id="8" name="Image 2" descr="preencoded.png">
-            <a:extLst>
-              <a:ext uri="{FF2B5EF4-FFF2-40B4-BE49-F238E27FC236}">
-                <a16:creationId xmlns:a16="http://schemas.microsoft.com/office/drawing/2014/main" id="{DF21AE7A-AD32-4DB1-E5D7-ADF342F3E00A}"/>
-              </a:ext>
-            </a:extLst>
-          </p:cNvPr>
-          <p:cNvPicPr>
-            <a:picLocks noChangeAspect="1"/>
-          </p:cNvPicPr>
-          <p:nvPr/>
-        </p:nvPicPr>
-        <p:blipFill>
-          <a:blip r:embed="rId2"/>
-          <a:stretch>
-            <a:fillRect/>
-          </a:stretch>
-        </p:blipFill>
-        <p:spPr>
-          <a:xfrm>
-            <a:off x="1556273" y="5541155"/>
-            <a:ext cx="502920" cy="502920"/>
-          </a:xfrm>
-          <a:prstGeom prst="rect">
-            <a:avLst/>
-          </a:prstGeom>
-        </p:spPr>
-      </p:pic>
-      <p:pic>
-        <p:nvPicPr>
-          <p:cNvPr id="9" name="Image 0" descr="preencoded.png">
-            <a:extLst>
-              <a:ext uri="{FF2B5EF4-FFF2-40B4-BE49-F238E27FC236}">
-                <a16:creationId xmlns:a16="http://schemas.microsoft.com/office/drawing/2014/main" id="{8661C4B3-D33D-FF6C-1CCA-A71303091488}"/>
-              </a:ext>
-            </a:extLst>
-          </p:cNvPr>
-          <p:cNvPicPr>
-            <a:picLocks noChangeAspect="1"/>
-          </p:cNvPicPr>
-          <p:nvPr/>
-        </p:nvPicPr>
-        <p:blipFill>
-          <a:blip r:embed="rId3"/>
-          <a:stretch>
-            <a:fillRect/>
-          </a:stretch>
-        </p:blipFill>
-        <p:spPr>
-          <a:xfrm>
-            <a:off x="785308" y="5531483"/>
-            <a:ext cx="502920" cy="502920"/>
-          </a:xfrm>
-          <a:prstGeom prst="rect">
-            <a:avLst/>
-          </a:prstGeom>
-        </p:spPr>
-      </p:pic>
-    </p:spTree>
-    <p:extLst>
-      <p:ext uri="{BB962C8B-B14F-4D97-AF65-F5344CB8AC3E}">
-        <p14:creationId xmlns:p14="http://schemas.microsoft.com/office/powerpoint/2010/main" val="1349298201"/>
-      </p:ext>
-    </p:extLst>
-  </p:cSld>
-  <p:clrMapOvr>
-    <a:masterClrMapping/>
-  </p:clrMapOvr>
-</p:sld>
-</file>
-
-<file path=ppt/slides/slide12.xml><?xml version="1.0" encoding="utf-8"?>
-<p:sld xmlns:a="http://schemas.openxmlformats.org/drawingml/2006/main" xmlns:r="http://schemas.openxmlformats.org/officeDocument/2006/relationships" xmlns:p="http://schemas.openxmlformats.org/presentationml/2006/main">
-  <p:cSld>
-    <p:spTree>
-      <p:nvGrpSpPr>
-        <p:cNvPr id="1" name="">
-          <a:extLst>
-            <a:ext uri="{FF2B5EF4-FFF2-40B4-BE49-F238E27FC236}">
-              <a16:creationId xmlns:a16="http://schemas.microsoft.com/office/drawing/2014/main" id="{8BA39D90-AB8B-FADA-D5AC-EA67DBF0AB95}"/>
-            </a:ext>
-          </a:extLst>
-        </p:cNvPr>
-        <p:cNvGrpSpPr/>
-        <p:nvPr/>
-      </p:nvGrpSpPr>
-      <p:grpSpPr>
-        <a:xfrm>
-          <a:off x="0" y="0"/>
-          <a:ext cx="0" cy="0"/>
-          <a:chOff x="0" y="0"/>
-          <a:chExt cx="0" cy="0"/>
-        </a:xfrm>
-      </p:grpSpPr>
-      <p:sp>
-        <p:nvSpPr>
-          <p:cNvPr id="2" name="Titre 1">
-            <a:extLst>
-              <a:ext uri="{FF2B5EF4-FFF2-40B4-BE49-F238E27FC236}">
-                <a16:creationId xmlns:a16="http://schemas.microsoft.com/office/drawing/2014/main" id="{5DEE90A3-E3C8-A107-EB45-FD9C96AF0274}"/>
-              </a:ext>
-            </a:extLst>
-          </p:cNvPr>
-          <p:cNvSpPr>
-            <a:spLocks noGrp="1"/>
-          </p:cNvSpPr>
-          <p:nvPr>
-            <p:ph type="title"/>
-          </p:nvPr>
-        </p:nvSpPr>
-        <p:spPr/>
-        <p:txBody>
-          <a:bodyPr/>
-          <a:lstStyle/>
-          <a:p>
-            <a:r>
-              <a:rPr lang="fr-FR" dirty="0"/>
-              <a:t>Opérations CRUD sur MongoDB</a:t>
-            </a:r>
-          </a:p>
-        </p:txBody>
-      </p:sp>
-      <p:graphicFrame>
-        <p:nvGraphicFramePr>
-          <p:cNvPr id="5" name="Espace réservé du contenu 4">
-            <a:extLst>
-              <a:ext uri="{FF2B5EF4-FFF2-40B4-BE49-F238E27FC236}">
-                <a16:creationId xmlns:a16="http://schemas.microsoft.com/office/drawing/2014/main" id="{1653449A-81BA-05E4-2BE8-3ADA672AD345}"/>
-              </a:ext>
-            </a:extLst>
-          </p:cNvPr>
-          <p:cNvGraphicFramePr>
-            <a:graphicFrameLocks noGrp="1"/>
-          </p:cNvGraphicFramePr>
-          <p:nvPr>
-            <p:ph idx="1"/>
-          </p:nvPr>
-        </p:nvGraphicFramePr>
-        <p:xfrm>
-          <a:off x="977451" y="1890876"/>
-          <a:ext cx="10237097" cy="4786630"/>
-        </p:xfrm>
-        <a:graphic>
-          <a:graphicData uri="http://schemas.openxmlformats.org/drawingml/2006/diagram">
-            <dgm:relIds xmlns:dgm="http://schemas.openxmlformats.org/drawingml/2006/diagram" xmlns:r="http://schemas.openxmlformats.org/officeDocument/2006/relationships" r:dm="rId2" r:lo="rId3" r:qs="rId4" r:cs="rId5"/>
-          </a:graphicData>
-        </a:graphic>
-      </p:graphicFrame>
-      <p:sp>
-        <p:nvSpPr>
-          <p:cNvPr id="4" name="Espace réservé de la date 3">
-            <a:extLst>
-              <a:ext uri="{FF2B5EF4-FFF2-40B4-BE49-F238E27FC236}">
-                <a16:creationId xmlns:a16="http://schemas.microsoft.com/office/drawing/2014/main" id="{016DC71D-561B-9967-BEE4-DFE094E8881A}"/>
-              </a:ext>
-            </a:extLst>
-          </p:cNvPr>
-          <p:cNvSpPr>
-            <a:spLocks noGrp="1"/>
-          </p:cNvSpPr>
-          <p:nvPr>
-            <p:ph type="dt" sz="half" idx="10"/>
-          </p:nvPr>
-        </p:nvSpPr>
-        <p:spPr/>
-        <p:txBody>
-          <a:bodyPr/>
-          <a:lstStyle/>
-          <a:p>
-            <a:pPr rtl="0"/>
-            <a:fld id="{22897033-9A55-4DAC-991D-1FF1921C78B7}" type="datetime1">
-              <a:rPr lang="fr-FR" smtClean="0"/>
-              <a:t>03/06/2026</a:t>
-            </a:fld>
-            <a:endParaRPr lang="en-US" dirty="0"/>
-          </a:p>
-        </p:txBody>
-      </p:sp>
-      <p:graphicFrame>
-        <p:nvGraphicFramePr>
-          <p:cNvPr id="7" name="Diagramme 6">
-            <a:extLst>
-              <a:ext uri="{FF2B5EF4-FFF2-40B4-BE49-F238E27FC236}">
-                <a16:creationId xmlns:a16="http://schemas.microsoft.com/office/drawing/2014/main" id="{AE9A8B6E-5F7A-4113-F70E-17A9595CED42}"/>
-              </a:ext>
-            </a:extLst>
-          </p:cNvPr>
-          <p:cNvGraphicFramePr/>
-          <p:nvPr>
-            <p:extLst>
-              <p:ext uri="{D42A27DB-BD31-4B8C-83A1-F6EECF244321}">
-                <p14:modId xmlns:p14="http://schemas.microsoft.com/office/powerpoint/2010/main" val="1837554185"/>
-              </p:ext>
-            </p:extLst>
-          </p:nvPr>
-        </p:nvGraphicFramePr>
-        <p:xfrm>
-          <a:off x="121853" y="1610040"/>
-          <a:ext cx="11948292" cy="5418667"/>
-        </p:xfrm>
-        <a:graphic>
-          <a:graphicData uri="http://schemas.openxmlformats.org/drawingml/2006/diagram">
-            <dgm:relIds xmlns:dgm="http://schemas.openxmlformats.org/drawingml/2006/diagram" xmlns:r="http://schemas.openxmlformats.org/officeDocument/2006/relationships" r:dm="rId7" r:lo="rId8" r:qs="rId9" r:cs="rId10"/>
-          </a:graphicData>
-        </a:graphic>
-      </p:graphicFrame>
-    </p:spTree>
-    <p:extLst>
-      <p:ext uri="{BB962C8B-B14F-4D97-AF65-F5344CB8AC3E}">
-        <p14:creationId xmlns:p14="http://schemas.microsoft.com/office/powerpoint/2010/main" val="462130081"/>
-      </p:ext>
-    </p:extLst>
-  </p:cSld>
-  <p:clrMapOvr>
-    <a:masterClrMapping/>
-  </p:clrMapOvr>
-</p:sld>
-</file>
-
-<file path=ppt/slides/slide13.xml><?xml version="1.0" encoding="utf-8"?>
-<p:sld xmlns:a="http://schemas.openxmlformats.org/drawingml/2006/main" xmlns:r="http://schemas.openxmlformats.org/officeDocument/2006/relationships" xmlns:p="http://schemas.openxmlformats.org/presentationml/2006/main">
-  <p:cSld>
-    <p:spTree>
-      <p:nvGrpSpPr>
-        <p:cNvPr id="1" name="">
-          <a:extLst>
-            <a:ext uri="{FF2B5EF4-FFF2-40B4-BE49-F238E27FC236}">
               <a16:creationId xmlns:a16="http://schemas.microsoft.com/office/drawing/2014/main" id="{BDC0158A-7E94-43EE-B6C4-DDD96AEC1008}"/>
             </a:ext>
           </a:extLst>
@@ -49836,7 +43351,7 @@
           <a:p>
             <a:r>
               <a:rPr lang="fr-FR" dirty="0"/>
-              <a:t>5- Conteneurisation avec Docker</a:t>
+              <a:t>4- Conteneurisation avec Docker</a:t>
             </a:r>
             <a:br>
               <a:rPr lang="fr-FR" dirty="0"/>
@@ -49954,7 +43469,7 @@
 </p:sld>
 </file>
 
-<file path=ppt/slides/slide14.xml><?xml version="1.0" encoding="utf-8"?>
+<file path=ppt/slides/slide12.xml><?xml version="1.0" encoding="utf-8"?>
 <p:sld xmlns:a="http://schemas.openxmlformats.org/drawingml/2006/main" xmlns:r="http://schemas.openxmlformats.org/officeDocument/2006/relationships" xmlns:p="http://schemas.openxmlformats.org/presentationml/2006/main">
   <p:cSld>
     <p:spTree>
@@ -51627,7 +45142,7 @@
 </p:sld>
 </file>
 
-<file path=ppt/slides/slide15.xml><?xml version="1.0" encoding="utf-8"?>
+<file path=ppt/slides/slide13.xml><?xml version="1.0" encoding="utf-8"?>
 <p:sld xmlns:a="http://schemas.openxmlformats.org/drawingml/2006/main" xmlns:r="http://schemas.openxmlformats.org/officeDocument/2006/relationships" xmlns:p="http://schemas.openxmlformats.org/presentationml/2006/main">
   <p:cSld>
     <p:spTree>
@@ -51673,7 +45188,7 @@
           <a:p>
             <a:r>
               <a:rPr lang="fr-FR" dirty="0"/>
-              <a:t>6- Tests Automatisés</a:t>
+              <a:t>5- Tests Automatisés</a:t>
             </a:r>
             <a:br>
               <a:rPr lang="fr-FR" dirty="0"/>
@@ -51787,7 +45302,7 @@
 </p:sld>
 </file>
 
-<file path=ppt/slides/slide16.xml><?xml version="1.0" encoding="utf-8"?>
+<file path=ppt/slides/slide14.xml><?xml version="1.0" encoding="utf-8"?>
 <p:sld xmlns:a="http://schemas.openxmlformats.org/drawingml/2006/main" xmlns:r="http://schemas.openxmlformats.org/officeDocument/2006/relationships" xmlns:p="http://schemas.openxmlformats.org/presentationml/2006/main">
   <p:cSld>
     <p:spTree>
@@ -51907,7 +45422,7 @@
           <p:nvPr>
             <p:extLst>
               <p:ext uri="{D42A27DB-BD31-4B8C-83A1-F6EECF244321}">
-                <p14:modId xmlns:p14="http://schemas.microsoft.com/office/powerpoint/2010/main" val="4247265642"/>
+                <p14:modId xmlns:p14="http://schemas.microsoft.com/office/powerpoint/2010/main" val="55285602"/>
               </p:ext>
             </p:extLst>
           </p:nvPr>
@@ -51985,7 +45500,7 @@
 </p:sld>
 </file>
 
-<file path=ppt/slides/slide17.xml><?xml version="1.0" encoding="utf-8"?>
+<file path=ppt/slides/slide15.xml><?xml version="1.0" encoding="utf-8"?>
 <p:sld xmlns:a="http://schemas.openxmlformats.org/drawingml/2006/main" xmlns:r="http://schemas.openxmlformats.org/officeDocument/2006/relationships" xmlns:p="http://schemas.openxmlformats.org/presentationml/2006/main">
   <p:cSld>
     <p:spTree>
@@ -52114,7 +45629,7 @@
 </p:sld>
 </file>
 
-<file path=ppt/slides/slide18.xml><?xml version="1.0" encoding="utf-8"?>
+<file path=ppt/slides/slide16.xml><?xml version="1.0" encoding="utf-8"?>
 <p:sld xmlns:a="http://schemas.openxmlformats.org/drawingml/2006/main" xmlns:r="http://schemas.openxmlformats.org/officeDocument/2006/relationships" xmlns:p="http://schemas.openxmlformats.org/presentationml/2006/main">
   <p:cSld>
     <p:spTree>
@@ -52203,7 +45718,7 @@
 </p:sld>
 </file>
 
-<file path=ppt/slides/slide19.xml><?xml version="1.0" encoding="utf-8"?>
+<file path=ppt/slides/slide17.xml><?xml version="1.0" encoding="utf-8"?>
 <p:sld xmlns:a="http://schemas.openxmlformats.org/drawingml/2006/main" xmlns:r="http://schemas.openxmlformats.org/officeDocument/2006/relationships" xmlns:p="http://schemas.openxmlformats.org/presentationml/2006/main">
   <p:cSld>
     <p:spTree>
@@ -52329,131 +45844,7 @@
 </p:sld>
 </file>
 
-<file path=ppt/slides/slide2.xml><?xml version="1.0" encoding="utf-8"?>
-<p:sld xmlns:a="http://schemas.openxmlformats.org/drawingml/2006/main" xmlns:r="http://schemas.openxmlformats.org/officeDocument/2006/relationships" xmlns:p="http://schemas.openxmlformats.org/presentationml/2006/main">
-  <p:cSld>
-    <p:spTree>
-      <p:nvGrpSpPr>
-        <p:cNvPr id="1" name=""/>
-        <p:cNvGrpSpPr/>
-        <p:nvPr/>
-      </p:nvGrpSpPr>
-      <p:grpSpPr>
-        <a:xfrm>
-          <a:off x="0" y="0"/>
-          <a:ext cx="0" cy="0"/>
-          <a:chOff x="0" y="0"/>
-          <a:chExt cx="0" cy="0"/>
-        </a:xfrm>
-      </p:grpSpPr>
-      <p:sp>
-        <p:nvSpPr>
-          <p:cNvPr id="2" name="Titre 1">
-            <a:extLst>
-              <a:ext uri="{FF2B5EF4-FFF2-40B4-BE49-F238E27FC236}">
-                <a16:creationId xmlns:a16="http://schemas.microsoft.com/office/drawing/2014/main" id="{D90581BB-D273-2748-59E2-5B1D678D7EE0}"/>
-              </a:ext>
-            </a:extLst>
-          </p:cNvPr>
-          <p:cNvSpPr>
-            <a:spLocks noGrp="1"/>
-          </p:cNvSpPr>
-          <p:nvPr>
-            <p:ph type="title"/>
-          </p:nvPr>
-        </p:nvSpPr>
-        <p:spPr/>
-        <p:txBody>
-          <a:bodyPr/>
-          <a:lstStyle/>
-          <a:p>
-            <a:r>
-              <a:rPr lang="fr-FR" dirty="0"/>
-              <a:t>Sommaire</a:t>
-            </a:r>
-          </a:p>
-        </p:txBody>
-      </p:sp>
-      <p:graphicFrame>
-        <p:nvGraphicFramePr>
-          <p:cNvPr id="5" name="Espace réservé du contenu 4">
-            <a:extLst>
-              <a:ext uri="{FF2B5EF4-FFF2-40B4-BE49-F238E27FC236}">
-                <a16:creationId xmlns:a16="http://schemas.microsoft.com/office/drawing/2014/main" id="{C0FBDBC2-024B-60B6-BEE4-9D4312913FE4}"/>
-              </a:ext>
-            </a:extLst>
-          </p:cNvPr>
-          <p:cNvGraphicFramePr>
-            <a:graphicFrameLocks noGrp="1"/>
-          </p:cNvGraphicFramePr>
-          <p:nvPr>
-            <p:ph idx="1"/>
-            <p:extLst>
-              <p:ext uri="{D42A27DB-BD31-4B8C-83A1-F6EECF244321}">
-                <p14:modId xmlns:p14="http://schemas.microsoft.com/office/powerpoint/2010/main" val="4165123747"/>
-              </p:ext>
-            </p:extLst>
-          </p:nvPr>
-        </p:nvGraphicFramePr>
-        <p:xfrm>
-          <a:off x="581192" y="1755781"/>
-          <a:ext cx="11348216" cy="4803228"/>
-        </p:xfrm>
-        <a:graphic>
-          <a:graphicData uri="http://schemas.openxmlformats.org/drawingml/2006/diagram">
-            <dgm:relIds xmlns:dgm="http://schemas.openxmlformats.org/drawingml/2006/diagram" xmlns:r="http://schemas.openxmlformats.org/officeDocument/2006/relationships" r:dm="rId2" r:lo="rId3" r:qs="rId4" r:cs="rId5"/>
-          </a:graphicData>
-        </a:graphic>
-      </p:graphicFrame>
-      <p:sp>
-        <p:nvSpPr>
-          <p:cNvPr id="4" name="Espace réservé de la date 3">
-            <a:extLst>
-              <a:ext uri="{FF2B5EF4-FFF2-40B4-BE49-F238E27FC236}">
-                <a16:creationId xmlns:a16="http://schemas.microsoft.com/office/drawing/2014/main" id="{AFB99B3D-02B8-72CA-5973-9E0DC630CA85}"/>
-              </a:ext>
-            </a:extLst>
-          </p:cNvPr>
-          <p:cNvSpPr>
-            <a:spLocks noGrp="1"/>
-          </p:cNvSpPr>
-          <p:nvPr>
-            <p:ph type="dt" sz="half" idx="10"/>
-          </p:nvPr>
-        </p:nvSpPr>
-        <p:spPr>
-          <a:xfrm>
-            <a:off x="7605951" y="6423914"/>
-            <a:ext cx="4004857" cy="365125"/>
-          </a:xfrm>
-        </p:spPr>
-        <p:txBody>
-          <a:bodyPr/>
-          <a:lstStyle/>
-          <a:p>
-            <a:pPr rtl="0"/>
-            <a:fld id="{22897033-9A55-4DAC-991D-1FF1921C78B7}" type="datetime1">
-              <a:rPr lang="fr-FR" smtClean="0"/>
-              <a:t>03/06/2026</a:t>
-            </a:fld>
-            <a:endParaRPr lang="en-US" dirty="0"/>
-          </a:p>
-        </p:txBody>
-      </p:sp>
-    </p:spTree>
-    <p:extLst>
-      <p:ext uri="{BB962C8B-B14F-4D97-AF65-F5344CB8AC3E}">
-        <p14:creationId xmlns:p14="http://schemas.microsoft.com/office/powerpoint/2010/main" val="2393101071"/>
-      </p:ext>
-    </p:extLst>
-  </p:cSld>
-  <p:clrMapOvr>
-    <a:masterClrMapping/>
-  </p:clrMapOvr>
-</p:sld>
-</file>
-
-<file path=ppt/slides/slide20.xml><?xml version="1.0" encoding="utf-8"?>
+<file path=ppt/slides/slide18.xml><?xml version="1.0" encoding="utf-8"?>
 <p:sld xmlns:a="http://schemas.openxmlformats.org/drawingml/2006/main" xmlns:r="http://schemas.openxmlformats.org/officeDocument/2006/relationships" xmlns:p="http://schemas.openxmlformats.org/presentationml/2006/main">
   <p:cSld>
     <p:spTree>
@@ -52517,7 +45908,7 @@
 </p:sld>
 </file>
 
-<file path=ppt/slides/slide21.xml><?xml version="1.0" encoding="utf-8"?>
+<file path=ppt/slides/slide19.xml><?xml version="1.0" encoding="utf-8"?>
 <p:sld xmlns:a="http://schemas.openxmlformats.org/drawingml/2006/main" xmlns:r="http://schemas.openxmlformats.org/officeDocument/2006/relationships" xmlns:p="http://schemas.openxmlformats.org/presentationml/2006/main">
   <p:cSld>
     <p:bg>
@@ -52983,6 +46374,130 @@
     <p:extLst>
       <p:ext uri="{BB962C8B-B14F-4D97-AF65-F5344CB8AC3E}">
         <p14:creationId xmlns:p14="http://schemas.microsoft.com/office/powerpoint/2010/main" val="2682824913"/>
+      </p:ext>
+    </p:extLst>
+  </p:cSld>
+  <p:clrMapOvr>
+    <a:masterClrMapping/>
+  </p:clrMapOvr>
+</p:sld>
+</file>
+
+<file path=ppt/slides/slide2.xml><?xml version="1.0" encoding="utf-8"?>
+<p:sld xmlns:a="http://schemas.openxmlformats.org/drawingml/2006/main" xmlns:r="http://schemas.openxmlformats.org/officeDocument/2006/relationships" xmlns:p="http://schemas.openxmlformats.org/presentationml/2006/main">
+  <p:cSld>
+    <p:spTree>
+      <p:nvGrpSpPr>
+        <p:cNvPr id="1" name=""/>
+        <p:cNvGrpSpPr/>
+        <p:nvPr/>
+      </p:nvGrpSpPr>
+      <p:grpSpPr>
+        <a:xfrm>
+          <a:off x="0" y="0"/>
+          <a:ext cx="0" cy="0"/>
+          <a:chOff x="0" y="0"/>
+          <a:chExt cx="0" cy="0"/>
+        </a:xfrm>
+      </p:grpSpPr>
+      <p:sp>
+        <p:nvSpPr>
+          <p:cNvPr id="2" name="Titre 1">
+            <a:extLst>
+              <a:ext uri="{FF2B5EF4-FFF2-40B4-BE49-F238E27FC236}">
+                <a16:creationId xmlns:a16="http://schemas.microsoft.com/office/drawing/2014/main" id="{D90581BB-D273-2748-59E2-5B1D678D7EE0}"/>
+              </a:ext>
+            </a:extLst>
+          </p:cNvPr>
+          <p:cNvSpPr>
+            <a:spLocks noGrp="1"/>
+          </p:cNvSpPr>
+          <p:nvPr>
+            <p:ph type="title"/>
+          </p:nvPr>
+        </p:nvSpPr>
+        <p:spPr/>
+        <p:txBody>
+          <a:bodyPr/>
+          <a:lstStyle/>
+          <a:p>
+            <a:r>
+              <a:rPr lang="fr-FR" dirty="0"/>
+              <a:t>Sommaire</a:t>
+            </a:r>
+          </a:p>
+        </p:txBody>
+      </p:sp>
+      <p:graphicFrame>
+        <p:nvGraphicFramePr>
+          <p:cNvPr id="5" name="Espace réservé du contenu 4">
+            <a:extLst>
+              <a:ext uri="{FF2B5EF4-FFF2-40B4-BE49-F238E27FC236}">
+                <a16:creationId xmlns:a16="http://schemas.microsoft.com/office/drawing/2014/main" id="{C0FBDBC2-024B-60B6-BEE4-9D4312913FE4}"/>
+              </a:ext>
+            </a:extLst>
+          </p:cNvPr>
+          <p:cNvGraphicFramePr>
+            <a:graphicFrameLocks noGrp="1"/>
+          </p:cNvGraphicFramePr>
+          <p:nvPr>
+            <p:ph idx="1"/>
+            <p:extLst>
+              <p:ext uri="{D42A27DB-BD31-4B8C-83A1-F6EECF244321}">
+                <p14:modId xmlns:p14="http://schemas.microsoft.com/office/powerpoint/2010/main" val="4165123747"/>
+              </p:ext>
+            </p:extLst>
+          </p:nvPr>
+        </p:nvGraphicFramePr>
+        <p:xfrm>
+          <a:off x="581192" y="1755781"/>
+          <a:ext cx="11348216" cy="4803228"/>
+        </p:xfrm>
+        <a:graphic>
+          <a:graphicData uri="http://schemas.openxmlformats.org/drawingml/2006/diagram">
+            <dgm:relIds xmlns:dgm="http://schemas.openxmlformats.org/drawingml/2006/diagram" xmlns:r="http://schemas.openxmlformats.org/officeDocument/2006/relationships" r:dm="rId2" r:lo="rId3" r:qs="rId4" r:cs="rId5"/>
+          </a:graphicData>
+        </a:graphic>
+      </p:graphicFrame>
+      <p:sp>
+        <p:nvSpPr>
+          <p:cNvPr id="4" name="Espace réservé de la date 3">
+            <a:extLst>
+              <a:ext uri="{FF2B5EF4-FFF2-40B4-BE49-F238E27FC236}">
+                <a16:creationId xmlns:a16="http://schemas.microsoft.com/office/drawing/2014/main" id="{AFB99B3D-02B8-72CA-5973-9E0DC630CA85}"/>
+              </a:ext>
+            </a:extLst>
+          </p:cNvPr>
+          <p:cNvSpPr>
+            <a:spLocks noGrp="1"/>
+          </p:cNvSpPr>
+          <p:nvPr>
+            <p:ph type="dt" sz="half" idx="10"/>
+          </p:nvPr>
+        </p:nvSpPr>
+        <p:spPr>
+          <a:xfrm>
+            <a:off x="7605951" y="6423914"/>
+            <a:ext cx="4004857" cy="365125"/>
+          </a:xfrm>
+        </p:spPr>
+        <p:txBody>
+          <a:bodyPr/>
+          <a:lstStyle/>
+          <a:p>
+            <a:pPr rtl="0"/>
+            <a:fld id="{22897033-9A55-4DAC-991D-1FF1921C78B7}" type="datetime1">
+              <a:rPr lang="fr-FR" smtClean="0"/>
+              <a:t>03/06/2026</a:t>
+            </a:fld>
+            <a:endParaRPr lang="en-US" dirty="0"/>
+          </a:p>
+        </p:txBody>
+      </p:sp>
+    </p:spTree>
+    <p:extLst>
+      <p:ext uri="{BB962C8B-B14F-4D97-AF65-F5344CB8AC3E}">
+        <p14:creationId xmlns:p14="http://schemas.microsoft.com/office/powerpoint/2010/main" val="2393101071"/>
       </p:ext>
     </p:extLst>
   </p:cSld>
